--- a/Presentations/AVR Live Class 8.pptx
+++ b/Presentations/AVR Live Class 8.pptx
@@ -5,39 +5,46 @@
     <p:sldMasterId id="2147483654" r:id="rId1"/>
   </p:sldMasterIdLst>
   <p:notesMasterIdLst>
-    <p:notesMasterId r:id="rId12"/>
+    <p:notesMasterId r:id="rId15"/>
   </p:notesMasterIdLst>
   <p:sldIdLst>
     <p:sldId id="256" r:id="rId2"/>
     <p:sldId id="293" r:id="rId3"/>
     <p:sldId id="282" r:id="rId4"/>
-    <p:sldId id="295" r:id="rId5"/>
-    <p:sldId id="296" r:id="rId6"/>
+    <p:sldId id="299" r:id="rId5"/>
+    <p:sldId id="300" r:id="rId6"/>
     <p:sldId id="297" r:id="rId7"/>
-    <p:sldId id="258" r:id="rId8"/>
-    <p:sldId id="285" r:id="rId9"/>
-    <p:sldId id="298" r:id="rId10"/>
-    <p:sldId id="264" r:id="rId11"/>
+    <p:sldId id="301" r:id="rId8"/>
+    <p:sldId id="296" r:id="rId9"/>
+    <p:sldId id="258" r:id="rId10"/>
+    <p:sldId id="285" r:id="rId11"/>
+    <p:sldId id="298" r:id="rId12"/>
+    <p:sldId id="302" r:id="rId13"/>
+    <p:sldId id="264" r:id="rId14"/>
   </p:sldIdLst>
   <p:sldSz cx="9144000" cy="5143500" type="screen16x9"/>
   <p:notesSz cx="6858000" cy="9144000"/>
   <p:embeddedFontLst>
     <p:embeddedFont>
       <p:font typeface="Anek Malayalam" panose="020B0604020202020204" charset="0"/>
-      <p:regular r:id="rId13"/>
-      <p:bold r:id="rId14"/>
+      <p:regular r:id="rId16"/>
+      <p:bold r:id="rId17"/>
     </p:embeddedFont>
     <p:embeddedFont>
       <p:font typeface="Anek Malayalam SemiBold" panose="020B0604020202020204" charset="0"/>
-      <p:regular r:id="rId15"/>
-      <p:bold r:id="rId16"/>
+      <p:regular r:id="rId18"/>
+      <p:bold r:id="rId19"/>
+    </p:embeddedFont>
+    <p:embeddedFont>
+      <p:font typeface="Cambria Math" panose="02040503050406030204" pitchFamily="18" charset="0"/>
+      <p:regular r:id="rId20"/>
     </p:embeddedFont>
     <p:embeddedFont>
       <p:font typeface="Helvetica Neue" panose="020B0604020202020204" charset="0"/>
-      <p:regular r:id="rId17"/>
-      <p:bold r:id="rId18"/>
-      <p:italic r:id="rId19"/>
-      <p:boldItalic r:id="rId20"/>
+      <p:regular r:id="rId21"/>
+      <p:bold r:id="rId22"/>
+      <p:italic r:id="rId23"/>
+      <p:boldItalic r:id="rId24"/>
     </p:embeddedFont>
   </p:embeddedFontLst>
   <p:defaultTextStyle>
@@ -291,7 +298,7 @@
 <file path=ppt/revisionInfo.xml><?xml version="1.0" encoding="utf-8"?>
 <p1510:revInfo xmlns:a="http://schemas.openxmlformats.org/drawingml/2006/main" xmlns:r="http://schemas.openxmlformats.org/officeDocument/2006/relationships" xmlns:p1510="http://schemas.microsoft.com/office/powerpoint/2015/10/main">
   <p1510:revLst>
-    <p1510:client id="{17B399C9-F1BB-4996-A696-8364F90A79DA}" v="26" dt="2025-09-24T16:18:36.986"/>
+    <p1510:client id="{C839D012-F19B-4482-AF87-F2176E9F514A}" v="13" dt="2025-11-29T14:31:38.527"/>
   </p1510:revLst>
 </p1510:revInfo>
 </file>
@@ -301,288 +308,33 @@
   <pc:docChgLst>
     <pc:chgData name="Sreejith Rajan" userId="ec11bca0e4bee75f" providerId="LiveId" clId="{7B4F392D-EAB3-4CE7-903E-F84869825F47}"/>
     <pc:docChg chg="undo custSel addSld delSld modSld sldOrd">
-      <pc:chgData name="Sreejith Rajan" userId="ec11bca0e4bee75f" providerId="LiveId" clId="{7B4F392D-EAB3-4CE7-903E-F84869825F47}" dt="2025-09-24T16:18:49.775" v="2277" actId="15"/>
+      <pc:chgData name="Sreejith Rajan" userId="ec11bca0e4bee75f" providerId="LiveId" clId="{7B4F392D-EAB3-4CE7-903E-F84869825F47}" dt="2025-11-29T15:32:23.817" v="2667" actId="20577"/>
       <pc:docMkLst>
         <pc:docMk/>
       </pc:docMkLst>
-      <pc:sldChg chg="modSp mod">
-        <pc:chgData name="Sreejith Rajan" userId="ec11bca0e4bee75f" providerId="LiveId" clId="{7B4F392D-EAB3-4CE7-903E-F84869825F47}" dt="2025-09-24T14:08:24.684" v="1797" actId="20577"/>
-        <pc:sldMkLst>
-          <pc:docMk/>
-          <pc:sldMk cId="0" sldId="256"/>
-        </pc:sldMkLst>
-        <pc:spChg chg="mod">
-          <ac:chgData name="Sreejith Rajan" userId="ec11bca0e4bee75f" providerId="LiveId" clId="{7B4F392D-EAB3-4CE7-903E-F84869825F47}" dt="2025-09-24T14:08:24.684" v="1797" actId="20577"/>
-          <ac:spMkLst>
-            <pc:docMk/>
-            <pc:sldMk cId="0" sldId="256"/>
-            <ac:spMk id="33" creationId="{00000000-0000-0000-0000-000000000000}"/>
-          </ac:spMkLst>
-        </pc:spChg>
-      </pc:sldChg>
-      <pc:sldChg chg="addSp modSp mod">
-        <pc:chgData name="Sreejith Rajan" userId="ec11bca0e4bee75f" providerId="LiveId" clId="{7B4F392D-EAB3-4CE7-903E-F84869825F47}" dt="2025-09-19T09:07:13.860" v="1004" actId="20577"/>
-        <pc:sldMkLst>
-          <pc:docMk/>
-          <pc:sldMk cId="0" sldId="258"/>
-        </pc:sldMkLst>
-        <pc:spChg chg="mod">
-          <ac:chgData name="Sreejith Rajan" userId="ec11bca0e4bee75f" providerId="LiveId" clId="{7B4F392D-EAB3-4CE7-903E-F84869825F47}" dt="2025-09-19T09:07:13.860" v="1004" actId="20577"/>
-          <ac:spMkLst>
-            <pc:docMk/>
-            <pc:sldMk cId="0" sldId="258"/>
-            <ac:spMk id="46" creationId="{00000000-0000-0000-0000-000000000000}"/>
-          </ac:spMkLst>
-        </pc:spChg>
-        <pc:spChg chg="mod">
-          <ac:chgData name="Sreejith Rajan" userId="ec11bca0e4bee75f" providerId="LiveId" clId="{7B4F392D-EAB3-4CE7-903E-F84869825F47}" dt="2025-09-19T08:08:01.437" v="98" actId="5793"/>
-          <ac:spMkLst>
-            <pc:docMk/>
-            <pc:sldMk cId="0" sldId="258"/>
-            <ac:spMk id="47" creationId="{00000000-0000-0000-0000-000000000000}"/>
-          </ac:spMkLst>
-        </pc:spChg>
-        <pc:picChg chg="add mod">
-          <ac:chgData name="Sreejith Rajan" userId="ec11bca0e4bee75f" providerId="LiveId" clId="{7B4F392D-EAB3-4CE7-903E-F84869825F47}" dt="2025-09-19T08:08:21.806" v="102" actId="1076"/>
-          <ac:picMkLst>
-            <pc:docMk/>
-            <pc:sldMk cId="0" sldId="258"/>
-            <ac:picMk id="2" creationId="{36F74B4C-E0C7-DF56-73A9-85DF4FA43836}"/>
-          </ac:picMkLst>
-        </pc:picChg>
-      </pc:sldChg>
-      <pc:sldChg chg="addSp delSp modSp add del mod ord">
-        <pc:chgData name="Sreejith Rajan" userId="ec11bca0e4bee75f" providerId="LiveId" clId="{7B4F392D-EAB3-4CE7-903E-F84869825F47}" dt="2025-09-24T14:32:51.012" v="2183" actId="47"/>
-        <pc:sldMkLst>
-          <pc:docMk/>
-          <pc:sldMk cId="1389626550" sldId="267"/>
-        </pc:sldMkLst>
-      </pc:sldChg>
-      <pc:sldChg chg="delSp modSp del mod">
-        <pc:chgData name="Sreejith Rajan" userId="ec11bca0e4bee75f" providerId="LiveId" clId="{7B4F392D-EAB3-4CE7-903E-F84869825F47}" dt="2025-09-24T14:33:14.629" v="2188" actId="47"/>
-        <pc:sldMkLst>
-          <pc:docMk/>
-          <pc:sldMk cId="2517281589" sldId="274"/>
-        </pc:sldMkLst>
-      </pc:sldChg>
-      <pc:sldChg chg="addSp delSp modSp mod ord">
-        <pc:chgData name="Sreejith Rajan" userId="ec11bca0e4bee75f" providerId="LiveId" clId="{7B4F392D-EAB3-4CE7-903E-F84869825F47}" dt="2025-09-24T14:10:28.838" v="1830" actId="14100"/>
-        <pc:sldMkLst>
-          <pc:docMk/>
-          <pc:sldMk cId="682396941" sldId="282"/>
-        </pc:sldMkLst>
-        <pc:spChg chg="mod">
-          <ac:chgData name="Sreejith Rajan" userId="ec11bca0e4bee75f" providerId="LiveId" clId="{7B4F392D-EAB3-4CE7-903E-F84869825F47}" dt="2025-09-24T14:09:40.224" v="1825" actId="20577"/>
-          <ac:spMkLst>
-            <pc:docMk/>
-            <pc:sldMk cId="682396941" sldId="282"/>
-            <ac:spMk id="54" creationId="{9283C473-62FC-4E7F-0537-4DF7FFC8FAA1}"/>
-          </ac:spMkLst>
-        </pc:spChg>
-        <pc:spChg chg="mod">
-          <ac:chgData name="Sreejith Rajan" userId="ec11bca0e4bee75f" providerId="LiveId" clId="{7B4F392D-EAB3-4CE7-903E-F84869825F47}" dt="2025-09-19T09:15:14.299" v="1109" actId="5793"/>
-          <ac:spMkLst>
-            <pc:docMk/>
-            <pc:sldMk cId="682396941" sldId="282"/>
-            <ac:spMk id="55" creationId="{CDBEBA7C-FD1D-B57A-1E7D-B25370E3E214}"/>
-          </ac:spMkLst>
-        </pc:spChg>
-        <pc:picChg chg="add mod">
-          <ac:chgData name="Sreejith Rajan" userId="ec11bca0e4bee75f" providerId="LiveId" clId="{7B4F392D-EAB3-4CE7-903E-F84869825F47}" dt="2025-09-24T14:10:28.838" v="1830" actId="14100"/>
-          <ac:picMkLst>
-            <pc:docMk/>
-            <pc:sldMk cId="682396941" sldId="282"/>
-            <ac:picMk id="3" creationId="{0386915B-E876-2A8D-A472-4D65396F9803}"/>
-          </ac:picMkLst>
-        </pc:picChg>
-        <pc:picChg chg="del mod">
-          <ac:chgData name="Sreejith Rajan" userId="ec11bca0e4bee75f" providerId="LiveId" clId="{7B4F392D-EAB3-4CE7-903E-F84869825F47}" dt="2025-09-24T14:09:42.639" v="1826" actId="478"/>
-          <ac:picMkLst>
-            <pc:docMk/>
-            <pc:sldMk cId="682396941" sldId="282"/>
-            <ac:picMk id="6" creationId="{475F8FF4-FAFB-9274-50A5-C9C0753EA1BE}"/>
-          </ac:picMkLst>
-        </pc:picChg>
-      </pc:sldChg>
-      <pc:sldChg chg="addSp modSp del mod ord">
-        <pc:chgData name="Sreejith Rajan" userId="ec11bca0e4bee75f" providerId="LiveId" clId="{7B4F392D-EAB3-4CE7-903E-F84869825F47}" dt="2025-09-24T16:17:14.637" v="2230" actId="47"/>
-        <pc:sldMkLst>
-          <pc:docMk/>
-          <pc:sldMk cId="3362503428" sldId="283"/>
-        </pc:sldMkLst>
-      </pc:sldChg>
-      <pc:sldChg chg="addSp delSp modSp mod">
-        <pc:chgData name="Sreejith Rajan" userId="ec11bca0e4bee75f" providerId="LiveId" clId="{7B4F392D-EAB3-4CE7-903E-F84869825F47}" dt="2025-09-19T08:46:05.396" v="573" actId="1076"/>
-        <pc:sldMkLst>
-          <pc:docMk/>
-          <pc:sldMk cId="2771709912" sldId="285"/>
-        </pc:sldMkLst>
-        <pc:spChg chg="mod">
-          <ac:chgData name="Sreejith Rajan" userId="ec11bca0e4bee75f" providerId="LiveId" clId="{7B4F392D-EAB3-4CE7-903E-F84869825F47}" dt="2025-09-19T08:45:44.582" v="570" actId="20577"/>
-          <ac:spMkLst>
-            <pc:docMk/>
-            <pc:sldMk cId="2771709912" sldId="285"/>
-            <ac:spMk id="46" creationId="{AD0C9125-2529-87A6-A821-EF0157BECEF2}"/>
-          </ac:spMkLst>
-        </pc:spChg>
-        <pc:spChg chg="mod">
-          <ac:chgData name="Sreejith Rajan" userId="ec11bca0e4bee75f" providerId="LiveId" clId="{7B4F392D-EAB3-4CE7-903E-F84869825F47}" dt="2025-09-19T08:08:27.299" v="103" actId="20577"/>
-          <ac:spMkLst>
-            <pc:docMk/>
-            <pc:sldMk cId="2771709912" sldId="285"/>
-            <ac:spMk id="47" creationId="{E974ABAE-A1E9-5AF4-4F05-9A6B3B72156A}"/>
-          </ac:spMkLst>
-        </pc:spChg>
-        <pc:picChg chg="add mod">
-          <ac:chgData name="Sreejith Rajan" userId="ec11bca0e4bee75f" providerId="LiveId" clId="{7B4F392D-EAB3-4CE7-903E-F84869825F47}" dt="2025-09-19T08:46:05.396" v="573" actId="1076"/>
-          <ac:picMkLst>
-            <pc:docMk/>
-            <pc:sldMk cId="2771709912" sldId="285"/>
-            <ac:picMk id="4" creationId="{24A15A76-7B21-037E-1031-980EB6A2BB21}"/>
-          </ac:picMkLst>
-        </pc:picChg>
-      </pc:sldChg>
-      <pc:sldChg chg="delSp del mod">
-        <pc:chgData name="Sreejith Rajan" userId="ec11bca0e4bee75f" providerId="LiveId" clId="{7B4F392D-EAB3-4CE7-903E-F84869825F47}" dt="2025-09-19T08:54:52.742" v="755" actId="47"/>
-        <pc:sldMkLst>
-          <pc:docMk/>
-          <pc:sldMk cId="321485736" sldId="286"/>
-        </pc:sldMkLst>
-      </pc:sldChg>
       <pc:sldChg chg="modSp del mod">
-        <pc:chgData name="Sreejith Rajan" userId="ec11bca0e4bee75f" providerId="LiveId" clId="{7B4F392D-EAB3-4CE7-903E-F84869825F47}" dt="2025-09-24T14:33:07.124" v="2186" actId="47"/>
-        <pc:sldMkLst>
-          <pc:docMk/>
-          <pc:sldMk cId="3959199433" sldId="287"/>
-        </pc:sldMkLst>
-      </pc:sldChg>
-      <pc:sldChg chg="del">
-        <pc:chgData name="Sreejith Rajan" userId="ec11bca0e4bee75f" providerId="LiveId" clId="{7B4F392D-EAB3-4CE7-903E-F84869825F47}" dt="2025-09-19T09:13:31.674" v="1068" actId="47"/>
-        <pc:sldMkLst>
-          <pc:docMk/>
-          <pc:sldMk cId="1933302962" sldId="288"/>
-        </pc:sldMkLst>
-      </pc:sldChg>
-      <pc:sldChg chg="del">
-        <pc:chgData name="Sreejith Rajan" userId="ec11bca0e4bee75f" providerId="LiveId" clId="{7B4F392D-EAB3-4CE7-903E-F84869825F47}" dt="2025-09-19T09:13:25.785" v="1067" actId="47"/>
-        <pc:sldMkLst>
-          <pc:docMk/>
-          <pc:sldMk cId="1380718396" sldId="289"/>
-        </pc:sldMkLst>
-      </pc:sldChg>
-      <pc:sldChg chg="addSp delSp modSp add del mod">
-        <pc:chgData name="Sreejith Rajan" userId="ec11bca0e4bee75f" providerId="LiveId" clId="{7B4F392D-EAB3-4CE7-903E-F84869825F47}" dt="2025-09-24T16:17:09.451" v="2229" actId="47"/>
-        <pc:sldMkLst>
-          <pc:docMk/>
-          <pc:sldMk cId="4163967858" sldId="290"/>
-        </pc:sldMkLst>
-      </pc:sldChg>
-      <pc:sldChg chg="delSp modSp add del mod">
-        <pc:chgData name="Sreejith Rajan" userId="ec11bca0e4bee75f" providerId="LiveId" clId="{7B4F392D-EAB3-4CE7-903E-F84869825F47}" dt="2025-09-24T14:33:00.872" v="2185" actId="47"/>
-        <pc:sldMkLst>
-          <pc:docMk/>
-          <pc:sldMk cId="3054169711" sldId="291"/>
-        </pc:sldMkLst>
-      </pc:sldChg>
-      <pc:sldChg chg="addSp modSp add del mod">
-        <pc:chgData name="Sreejith Rajan" userId="ec11bca0e4bee75f" providerId="LiveId" clId="{7B4F392D-EAB3-4CE7-903E-F84869825F47}" dt="2025-09-24T14:33:12.522" v="2187" actId="47"/>
-        <pc:sldMkLst>
-          <pc:docMk/>
-          <pc:sldMk cId="1690133944" sldId="292"/>
-        </pc:sldMkLst>
-      </pc:sldChg>
-      <pc:sldChg chg="addSp delSp modSp add mod ord">
-        <pc:chgData name="Sreejith Rajan" userId="ec11bca0e4bee75f" providerId="LiveId" clId="{7B4F392D-EAB3-4CE7-903E-F84869825F47}" dt="2025-09-24T14:33:57.860" v="2192" actId="27636"/>
-        <pc:sldMkLst>
-          <pc:docMk/>
-          <pc:sldMk cId="1886088078" sldId="293"/>
-        </pc:sldMkLst>
-        <pc:spChg chg="mod">
-          <ac:chgData name="Sreejith Rajan" userId="ec11bca0e4bee75f" providerId="LiveId" clId="{7B4F392D-EAB3-4CE7-903E-F84869825F47}" dt="2025-09-24T14:09:32.253" v="1817" actId="20577"/>
-          <ac:spMkLst>
-            <pc:docMk/>
-            <pc:sldMk cId="1886088078" sldId="293"/>
-            <ac:spMk id="54" creationId="{9DF19AD3-EF11-9DCE-2D34-41B14C706DBA}"/>
-          </ac:spMkLst>
-        </pc:spChg>
-        <pc:spChg chg="mod">
-          <ac:chgData name="Sreejith Rajan" userId="ec11bca0e4bee75f" providerId="LiveId" clId="{7B4F392D-EAB3-4CE7-903E-F84869825F47}" dt="2025-09-24T14:33:57.860" v="2192" actId="27636"/>
-          <ac:spMkLst>
-            <pc:docMk/>
-            <pc:sldMk cId="1886088078" sldId="293"/>
-            <ac:spMk id="55" creationId="{BAEA60A2-6523-62E4-B4D3-4E0BF968E451}"/>
-          </ac:spMkLst>
-        </pc:spChg>
-        <pc:graphicFrameChg chg="add del mod">
-          <ac:chgData name="Sreejith Rajan" userId="ec11bca0e4bee75f" providerId="LiveId" clId="{7B4F392D-EAB3-4CE7-903E-F84869825F47}" dt="2025-09-24T14:08:44.414" v="1799" actId="478"/>
-          <ac:graphicFrameMkLst>
-            <pc:docMk/>
-            <pc:sldMk cId="1886088078" sldId="293"/>
-            <ac:graphicFrameMk id="2" creationId="{3911547E-BDC0-E377-4CA6-AD81316F4DB6}"/>
-          </ac:graphicFrameMkLst>
-        </pc:graphicFrameChg>
-      </pc:sldChg>
-      <pc:sldChg chg="addSp delSp modSp add del mod">
-        <pc:chgData name="Sreejith Rajan" userId="ec11bca0e4bee75f" providerId="LiveId" clId="{7B4F392D-EAB3-4CE7-903E-F84869825F47}" dt="2025-09-24T14:32:56.715" v="2184" actId="47"/>
-        <pc:sldMkLst>
-          <pc:docMk/>
-          <pc:sldMk cId="812141662" sldId="294"/>
-        </pc:sldMkLst>
-      </pc:sldChg>
-      <pc:sldChg chg="new del">
-        <pc:chgData name="Sreejith Rajan" userId="ec11bca0e4bee75f" providerId="LiveId" clId="{7B4F392D-EAB3-4CE7-903E-F84869825F47}" dt="2025-09-19T09:29:05.345" v="1574" actId="680"/>
-        <pc:sldMkLst>
-          <pc:docMk/>
-          <pc:sldMk cId="4185100054" sldId="294"/>
-        </pc:sldMkLst>
-      </pc:sldChg>
-      <pc:sldChg chg="delSp modSp add mod">
-        <pc:chgData name="Sreejith Rajan" userId="ec11bca0e4bee75f" providerId="LiveId" clId="{7B4F392D-EAB3-4CE7-903E-F84869825F47}" dt="2025-09-24T15:14:44.101" v="2228" actId="20577"/>
+        <pc:chgData name="Sreejith Rajan" userId="ec11bca0e4bee75f" providerId="LiveId" clId="{7B4F392D-EAB3-4CE7-903E-F84869825F47}" dt="2025-11-29T13:34:44.760" v="2420" actId="47"/>
         <pc:sldMkLst>
           <pc:docMk/>
           <pc:sldMk cId="1255739614" sldId="295"/>
         </pc:sldMkLst>
         <pc:spChg chg="mod">
-          <ac:chgData name="Sreejith Rajan" userId="ec11bca0e4bee75f" providerId="LiveId" clId="{7B4F392D-EAB3-4CE7-903E-F84869825F47}" dt="2025-09-24T14:11:28.683" v="1842" actId="20577"/>
+          <ac:chgData name="Sreejith Rajan" userId="ec11bca0e4bee75f" providerId="LiveId" clId="{7B4F392D-EAB3-4CE7-903E-F84869825F47}" dt="2025-11-29T13:16:07.736" v="2286" actId="20577"/>
           <ac:spMkLst>
             <pc:docMk/>
             <pc:sldMk cId="1255739614" sldId="295"/>
             <ac:spMk id="54" creationId="{30DA5EE7-6660-CD87-865D-D50168C59BB5}"/>
           </ac:spMkLst>
         </pc:spChg>
-        <pc:spChg chg="mod">
-          <ac:chgData name="Sreejith Rajan" userId="ec11bca0e4bee75f" providerId="LiveId" clId="{7B4F392D-EAB3-4CE7-903E-F84869825F47}" dt="2025-09-24T15:14:44.101" v="2228" actId="20577"/>
-          <ac:spMkLst>
-            <pc:docMk/>
-            <pc:sldMk cId="1255739614" sldId="295"/>
-            <ac:spMk id="55" creationId="{BF0CD398-A66F-BE54-C42B-73E9F30FF70A}"/>
-          </ac:spMkLst>
-        </pc:spChg>
-        <pc:picChg chg="del">
-          <ac:chgData name="Sreejith Rajan" userId="ec11bca0e4bee75f" providerId="LiveId" clId="{7B4F392D-EAB3-4CE7-903E-F84869825F47}" dt="2025-09-24T14:11:22.675" v="1832" actId="478"/>
-          <ac:picMkLst>
-            <pc:docMk/>
-            <pc:sldMk cId="1255739614" sldId="295"/>
-            <ac:picMk id="3" creationId="{4F259B3D-3B25-BC80-36FC-ABA9DA8815A2}"/>
-          </ac:picMkLst>
-        </pc:picChg>
       </pc:sldChg>
       <pc:sldChg chg="modSp add mod">
-        <pc:chgData name="Sreejith Rajan" userId="ec11bca0e4bee75f" providerId="LiveId" clId="{7B4F392D-EAB3-4CE7-903E-F84869825F47}" dt="2025-09-24T16:18:37.923" v="2275" actId="5793"/>
+        <pc:chgData name="Sreejith Rajan" userId="ec11bca0e4bee75f" providerId="LiveId" clId="{7B4F392D-EAB3-4CE7-903E-F84869825F47}" dt="2025-11-29T13:30:51.797" v="2352" actId="20577"/>
         <pc:sldMkLst>
           <pc:docMk/>
           <pc:sldMk cId="1472709791" sldId="296"/>
         </pc:sldMkLst>
         <pc:spChg chg="mod">
-          <ac:chgData name="Sreejith Rajan" userId="ec11bca0e4bee75f" providerId="LiveId" clId="{7B4F392D-EAB3-4CE7-903E-F84869825F47}" dt="2025-09-24T14:15:45.360" v="1911" actId="20577"/>
-          <ac:spMkLst>
-            <pc:docMk/>
-            <pc:sldMk cId="1472709791" sldId="296"/>
-            <ac:spMk id="54" creationId="{2C8E0C1C-1D00-3A9F-C353-20CA2329814E}"/>
-          </ac:spMkLst>
-        </pc:spChg>
-        <pc:spChg chg="mod">
-          <ac:chgData name="Sreejith Rajan" userId="ec11bca0e4bee75f" providerId="LiveId" clId="{7B4F392D-EAB3-4CE7-903E-F84869825F47}" dt="2025-09-24T16:18:37.923" v="2275" actId="5793"/>
+          <ac:chgData name="Sreejith Rajan" userId="ec11bca0e4bee75f" providerId="LiveId" clId="{7B4F392D-EAB3-4CE7-903E-F84869825F47}" dt="2025-11-29T13:30:51.797" v="2352" actId="20577"/>
           <ac:spMkLst>
             <pc:docMk/>
             <pc:sldMk cId="1472709791" sldId="296"/>
@@ -590,51 +342,152 @@
           </ac:spMkLst>
         </pc:spChg>
       </pc:sldChg>
-      <pc:sldChg chg="modSp add mod">
-        <pc:chgData name="Sreejith Rajan" userId="ec11bca0e4bee75f" providerId="LiveId" clId="{7B4F392D-EAB3-4CE7-903E-F84869825F47}" dt="2025-09-24T16:18:49.775" v="2277" actId="15"/>
+      <pc:sldChg chg="addSp delSp modSp mod ord">
+        <pc:chgData name="Sreejith Rajan" userId="ec11bca0e4bee75f" providerId="LiveId" clId="{7B4F392D-EAB3-4CE7-903E-F84869825F47}" dt="2025-11-29T14:31:56.614" v="2438" actId="1076"/>
         <pc:sldMkLst>
           <pc:docMk/>
           <pc:sldMk cId="2957352177" sldId="297"/>
         </pc:sldMkLst>
-        <pc:spChg chg="mod">
-          <ac:chgData name="Sreejith Rajan" userId="ec11bca0e4bee75f" providerId="LiveId" clId="{7B4F392D-EAB3-4CE7-903E-F84869825F47}" dt="2025-09-24T14:31:48.084" v="2154" actId="14100"/>
-          <ac:spMkLst>
-            <pc:docMk/>
-            <pc:sldMk cId="2957352177" sldId="297"/>
-            <ac:spMk id="54" creationId="{B99B92AD-4783-9494-3A62-3B2D9861BB69}"/>
-          </ac:spMkLst>
-        </pc:spChg>
-        <pc:spChg chg="mod">
-          <ac:chgData name="Sreejith Rajan" userId="ec11bca0e4bee75f" providerId="LiveId" clId="{7B4F392D-EAB3-4CE7-903E-F84869825F47}" dt="2025-09-24T16:18:49.775" v="2277" actId="15"/>
+        <pc:spChg chg="del mod">
+          <ac:chgData name="Sreejith Rajan" userId="ec11bca0e4bee75f" providerId="LiveId" clId="{7B4F392D-EAB3-4CE7-903E-F84869825F47}" dt="2025-11-29T14:31:28.484" v="2432" actId="478"/>
           <ac:spMkLst>
             <pc:docMk/>
             <pc:sldMk cId="2957352177" sldId="297"/>
             <ac:spMk id="55" creationId="{2098EACB-53C4-E0DB-A70B-D0A9993E17EF}"/>
           </ac:spMkLst>
         </pc:spChg>
+        <pc:graphicFrameChg chg="add mod modGraphic">
+          <ac:chgData name="Sreejith Rajan" userId="ec11bca0e4bee75f" providerId="LiveId" clId="{7B4F392D-EAB3-4CE7-903E-F84869825F47}" dt="2025-11-29T14:31:56.614" v="2438" actId="1076"/>
+          <ac:graphicFrameMkLst>
+            <pc:docMk/>
+            <pc:sldMk cId="2957352177" sldId="297"/>
+            <ac:graphicFrameMk id="4" creationId="{AA0C860D-DD57-0428-CC84-A022984C5D96}"/>
+          </ac:graphicFrameMkLst>
+        </pc:graphicFrameChg>
+        <pc:picChg chg="add del mod">
+          <ac:chgData name="Sreejith Rajan" userId="ec11bca0e4bee75f" providerId="LiveId" clId="{7B4F392D-EAB3-4CE7-903E-F84869825F47}" dt="2025-11-29T14:24:42.620" v="2425" actId="478"/>
+          <ac:picMkLst>
+            <pc:docMk/>
+            <pc:sldMk cId="2957352177" sldId="297"/>
+            <ac:picMk id="3" creationId="{F92DFCCF-1F99-07CA-9231-417B3BC3A7F6}"/>
+          </ac:picMkLst>
+        </pc:picChg>
       </pc:sldChg>
-      <pc:sldChg chg="delSp modSp add mod">
-        <pc:chgData name="Sreejith Rajan" userId="ec11bca0e4bee75f" providerId="LiveId" clId="{7B4F392D-EAB3-4CE7-903E-F84869825F47}" dt="2025-09-24T16:17:55.051" v="2248" actId="1076"/>
+      <pc:sldChg chg="addSp modSp add mod ord">
+        <pc:chgData name="Sreejith Rajan" userId="ec11bca0e4bee75f" providerId="LiveId" clId="{7B4F392D-EAB3-4CE7-903E-F84869825F47}" dt="2025-11-29T13:34:25.350" v="2401" actId="20577"/>
         <pc:sldMkLst>
           <pc:docMk/>
-          <pc:sldMk cId="2816312007" sldId="298"/>
+          <pc:sldMk cId="1542529864" sldId="299"/>
         </pc:sldMkLst>
         <pc:spChg chg="mod">
-          <ac:chgData name="Sreejith Rajan" userId="ec11bca0e4bee75f" providerId="LiveId" clId="{7B4F392D-EAB3-4CE7-903E-F84869825F47}" dt="2025-09-24T16:17:55.051" v="2248" actId="1076"/>
+          <ac:chgData name="Sreejith Rajan" userId="ec11bca0e4bee75f" providerId="LiveId" clId="{7B4F392D-EAB3-4CE7-903E-F84869825F47}" dt="2025-11-29T13:33:51.990" v="2373" actId="20577"/>
           <ac:spMkLst>
             <pc:docMk/>
-            <pc:sldMk cId="2816312007" sldId="298"/>
-            <ac:spMk id="46" creationId="{9A579AF7-4051-6167-3D0A-4D25C2B6F53E}"/>
+            <pc:sldMk cId="1542529864" sldId="299"/>
+            <ac:spMk id="54" creationId="{C7928DC8-E13F-2991-8EA4-0C6925F8EE6C}"/>
+          </ac:spMkLst>
+        </pc:spChg>
+        <pc:spChg chg="mod">
+          <ac:chgData name="Sreejith Rajan" userId="ec11bca0e4bee75f" providerId="LiveId" clId="{7B4F392D-EAB3-4CE7-903E-F84869825F47}" dt="2025-11-29T13:34:25.350" v="2401" actId="20577"/>
+          <ac:spMkLst>
+            <pc:docMk/>
+            <pc:sldMk cId="1542529864" sldId="299"/>
+            <ac:spMk id="55" creationId="{3AF1126F-07D6-CEB2-8861-513FA81FB544}"/>
+          </ac:spMkLst>
+        </pc:spChg>
+        <pc:picChg chg="add mod">
+          <ac:chgData name="Sreejith Rajan" userId="ec11bca0e4bee75f" providerId="LiveId" clId="{7B4F392D-EAB3-4CE7-903E-F84869825F47}" dt="2025-11-29T13:28:36.112" v="2344" actId="1076"/>
+          <ac:picMkLst>
+            <pc:docMk/>
+            <pc:sldMk cId="1542529864" sldId="299"/>
+            <ac:picMk id="3" creationId="{FB83019C-ACF8-3F44-7281-A9CA1792F20E}"/>
+          </ac:picMkLst>
+        </pc:picChg>
+      </pc:sldChg>
+      <pc:sldChg chg="addSp delSp modSp add mod ord">
+        <pc:chgData name="Sreejith Rajan" userId="ec11bca0e4bee75f" providerId="LiveId" clId="{7B4F392D-EAB3-4CE7-903E-F84869825F47}" dt="2025-11-29T13:34:37.190" v="2419" actId="20577"/>
+        <pc:sldMkLst>
+          <pc:docMk/>
+          <pc:sldMk cId="988321391" sldId="300"/>
+        </pc:sldMkLst>
+        <pc:spChg chg="add del mod">
+          <ac:chgData name="Sreejith Rajan" userId="ec11bca0e4bee75f" providerId="LiveId" clId="{7B4F392D-EAB3-4CE7-903E-F84869825F47}" dt="2025-11-29T13:29:15.677" v="2350" actId="478"/>
+          <ac:spMkLst>
+            <pc:docMk/>
+            <pc:sldMk cId="988321391" sldId="300"/>
+            <ac:spMk id="8" creationId="{3505DB15-71CE-CC55-D613-73F43082C057}"/>
+          </ac:spMkLst>
+        </pc:spChg>
+        <pc:spChg chg="mod">
+          <ac:chgData name="Sreejith Rajan" userId="ec11bca0e4bee75f" providerId="LiveId" clId="{7B4F392D-EAB3-4CE7-903E-F84869825F47}" dt="2025-11-29T13:34:00.548" v="2385" actId="20577"/>
+          <ac:spMkLst>
+            <pc:docMk/>
+            <pc:sldMk cId="988321391" sldId="300"/>
+            <ac:spMk id="54" creationId="{0E0B9E82-8A35-E70E-6693-3E87831442CA}"/>
+          </ac:spMkLst>
+        </pc:spChg>
+        <pc:spChg chg="add del mod">
+          <ac:chgData name="Sreejith Rajan" userId="ec11bca0e4bee75f" providerId="LiveId" clId="{7B4F392D-EAB3-4CE7-903E-F84869825F47}" dt="2025-11-29T13:34:37.190" v="2419" actId="20577"/>
+          <ac:spMkLst>
+            <pc:docMk/>
+            <pc:sldMk cId="988321391" sldId="300"/>
+            <ac:spMk id="55" creationId="{EB88BF98-861C-8470-0E43-431DC38938BE}"/>
           </ac:spMkLst>
         </pc:spChg>
         <pc:picChg chg="del">
-          <ac:chgData name="Sreejith Rajan" userId="ec11bca0e4bee75f" providerId="LiveId" clId="{7B4F392D-EAB3-4CE7-903E-F84869825F47}" dt="2025-09-24T16:17:49.291" v="2247" actId="478"/>
+          <ac:chgData name="Sreejith Rajan" userId="ec11bca0e4bee75f" providerId="LiveId" clId="{7B4F392D-EAB3-4CE7-903E-F84869825F47}" dt="2025-11-29T13:22:17.099" v="2336" actId="478"/>
           <ac:picMkLst>
             <pc:docMk/>
-            <pc:sldMk cId="2816312007" sldId="298"/>
-            <ac:picMk id="4" creationId="{3000D526-8572-CCAB-0960-B9D71CCC22A4}"/>
+            <pc:sldMk cId="988321391" sldId="300"/>
+            <ac:picMk id="3" creationId="{2F2FF3CF-C32E-CB96-2D3B-CAD4010173D4}"/>
           </ac:picMkLst>
         </pc:picChg>
+        <pc:picChg chg="add del mod">
+          <ac:chgData name="Sreejith Rajan" userId="ec11bca0e4bee75f" providerId="LiveId" clId="{7B4F392D-EAB3-4CE7-903E-F84869825F47}" dt="2025-11-29T13:22:34.138" v="2338" actId="478"/>
+          <ac:picMkLst>
+            <pc:docMk/>
+            <pc:sldMk cId="988321391" sldId="300"/>
+            <ac:picMk id="4" creationId="{7294D718-FBF5-C41A-BEC5-F74B055AECD8}"/>
+          </ac:picMkLst>
+        </pc:picChg>
+        <pc:picChg chg="add mod">
+          <ac:chgData name="Sreejith Rajan" userId="ec11bca0e4bee75f" providerId="LiveId" clId="{7B4F392D-EAB3-4CE7-903E-F84869825F47}" dt="2025-11-29T13:29:01.113" v="2346" actId="1076"/>
+          <ac:picMkLst>
+            <pc:docMk/>
+            <pc:sldMk cId="988321391" sldId="300"/>
+            <ac:picMk id="6" creationId="{68C82DA3-DF1D-05D6-0D17-121E490BCB9B}"/>
+          </ac:picMkLst>
+        </pc:picChg>
+      </pc:sldChg>
+      <pc:sldChg chg="modSp add mod">
+        <pc:chgData name="Sreejith Rajan" userId="ec11bca0e4bee75f" providerId="LiveId" clId="{7B4F392D-EAB3-4CE7-903E-F84869825F47}" dt="2025-11-29T14:32:04.565" v="2439" actId="20577"/>
+        <pc:sldMkLst>
+          <pc:docMk/>
+          <pc:sldMk cId="668661736" sldId="301"/>
+        </pc:sldMkLst>
+        <pc:spChg chg="mod">
+          <ac:chgData name="Sreejith Rajan" userId="ec11bca0e4bee75f" providerId="LiveId" clId="{7B4F392D-EAB3-4CE7-903E-F84869825F47}" dt="2025-11-29T14:32:04.565" v="2439" actId="20577"/>
+          <ac:spMkLst>
+            <pc:docMk/>
+            <pc:sldMk cId="668661736" sldId="301"/>
+            <ac:spMk id="55" creationId="{6B9686C3-835E-9639-2AA7-D0B611D0485D}"/>
+          </ac:spMkLst>
+        </pc:spChg>
+      </pc:sldChg>
+      <pc:sldChg chg="modSp new mod">
+        <pc:chgData name="Sreejith Rajan" userId="ec11bca0e4bee75f" providerId="LiveId" clId="{7B4F392D-EAB3-4CE7-903E-F84869825F47}" dt="2025-11-29T15:32:23.817" v="2667" actId="20577"/>
+        <pc:sldMkLst>
+          <pc:docMk/>
+          <pc:sldMk cId="2168209001" sldId="302"/>
+        </pc:sldMkLst>
+        <pc:spChg chg="mod">
+          <ac:chgData name="Sreejith Rajan" userId="ec11bca0e4bee75f" providerId="LiveId" clId="{7B4F392D-EAB3-4CE7-903E-F84869825F47}" dt="2025-11-29T15:32:23.817" v="2667" actId="20577"/>
+          <ac:spMkLst>
+            <pc:docMk/>
+            <pc:sldMk cId="2168209001" sldId="302"/>
+            <ac:spMk id="2" creationId="{004D21FA-FB07-B556-EAC7-51D79FFCFB6A}"/>
+          </ac:spMkLst>
+        </pc:spChg>
       </pc:sldChg>
     </pc:docChg>
   </pc:docChgLst>
@@ -1191,6 +1044,260 @@
   <p:cSld>
     <p:spTree>
       <p:nvGrpSpPr>
+        <p:cNvPr id="1" name="Shape 42">
+          <a:extLst>
+            <a:ext uri="{FF2B5EF4-FFF2-40B4-BE49-F238E27FC236}">
+              <a16:creationId xmlns:a16="http://schemas.microsoft.com/office/drawing/2014/main" id="{F83276EB-F4B2-D99E-34FD-B8BFA3D3110D}"/>
+            </a:ext>
+          </a:extLst>
+        </p:cNvPr>
+        <p:cNvGrpSpPr/>
+        <p:nvPr/>
+      </p:nvGrpSpPr>
+      <p:grpSpPr>
+        <a:xfrm>
+          <a:off x="0" y="0"/>
+          <a:ext cx="0" cy="0"/>
+          <a:chOff x="0" y="0"/>
+          <a:chExt cx="0" cy="0"/>
+        </a:xfrm>
+      </p:grpSpPr>
+      <p:sp>
+        <p:nvSpPr>
+          <p:cNvPr id="43" name="Google Shape;43;g2ff2b50d283_0_13:notes">
+            <a:extLst>
+              <a:ext uri="{FF2B5EF4-FFF2-40B4-BE49-F238E27FC236}">
+                <a16:creationId xmlns:a16="http://schemas.microsoft.com/office/drawing/2014/main" id="{800C32EA-A2AE-AC0A-696F-31B96CA36982}"/>
+              </a:ext>
+            </a:extLst>
+          </p:cNvPr>
+          <p:cNvSpPr>
+            <a:spLocks noGrp="1" noRot="1" noChangeAspect="1"/>
+          </p:cNvSpPr>
+          <p:nvPr>
+            <p:ph type="sldImg" idx="2"/>
+          </p:nvPr>
+        </p:nvSpPr>
+        <p:spPr>
+          <a:xfrm>
+            <a:off x="381000" y="685800"/>
+            <a:ext cx="6096000" cy="3429000"/>
+          </a:xfrm>
+          <a:custGeom>
+            <a:avLst/>
+            <a:gdLst/>
+            <a:ahLst/>
+            <a:cxnLst/>
+            <a:rect l="l" t="t" r="r" b="b"/>
+            <a:pathLst>
+              <a:path w="120000" h="120000" extrusionOk="0">
+                <a:moveTo>
+                  <a:pt x="0" y="0"/>
+                </a:moveTo>
+                <a:lnTo>
+                  <a:pt x="120000" y="0"/>
+                </a:lnTo>
+                <a:lnTo>
+                  <a:pt x="120000" y="120000"/>
+                </a:lnTo>
+                <a:lnTo>
+                  <a:pt x="0" y="120000"/>
+                </a:lnTo>
+                <a:close/>
+              </a:path>
+            </a:pathLst>
+          </a:custGeom>
+        </p:spPr>
+      </p:sp>
+      <p:sp>
+        <p:nvSpPr>
+          <p:cNvPr id="44" name="Google Shape;44;g2ff2b50d283_0_13:notes">
+            <a:extLst>
+              <a:ext uri="{FF2B5EF4-FFF2-40B4-BE49-F238E27FC236}">
+                <a16:creationId xmlns:a16="http://schemas.microsoft.com/office/drawing/2014/main" id="{E988F3D7-7EBF-EA1C-A6D6-C91C3C571CF3}"/>
+              </a:ext>
+            </a:extLst>
+          </p:cNvPr>
+          <p:cNvSpPr txBox="1">
+            <a:spLocks noGrp="1"/>
+          </p:cNvSpPr>
+          <p:nvPr>
+            <p:ph type="body" idx="1"/>
+          </p:nvPr>
+        </p:nvSpPr>
+        <p:spPr>
+          <a:xfrm>
+            <a:off x="685800" y="4343400"/>
+            <a:ext cx="5486400" cy="4114800"/>
+          </a:xfrm>
+          <a:prstGeom prst="rect">
+            <a:avLst/>
+          </a:prstGeom>
+        </p:spPr>
+        <p:txBody>
+          <a:bodyPr spcFirstLastPara="1" wrap="square" lIns="91425" tIns="91425" rIns="91425" bIns="91425" anchor="t" anchorCtr="0">
+            <a:noAutofit/>
+          </a:bodyPr>
+          <a:lstStyle/>
+          <a:p>
+            <a:pPr marL="0" lvl="0" indent="0" algn="l" rtl="0">
+              <a:spcBef>
+                <a:spcPts val="0"/>
+              </a:spcBef>
+              <a:spcAft>
+                <a:spcPts val="0"/>
+              </a:spcAft>
+              <a:buNone/>
+            </a:pPr>
+            <a:endParaRPr/>
+          </a:p>
+        </p:txBody>
+      </p:sp>
+    </p:spTree>
+    <p:extLst>
+      <p:ext uri="{BB962C8B-B14F-4D97-AF65-F5344CB8AC3E}">
+        <p14:creationId xmlns:p14="http://schemas.microsoft.com/office/powerpoint/2010/main" val="2652559166"/>
+      </p:ext>
+    </p:extLst>
+  </p:cSld>
+  <p:clrMapOvr>
+    <a:masterClrMapping/>
+  </p:clrMapOvr>
+</p:notes>
+</file>
+
+<file path=ppt/notesSlides/notesSlide11.xml><?xml version="1.0" encoding="utf-8"?>
+<p:notes xmlns:a="http://schemas.openxmlformats.org/drawingml/2006/main" xmlns:r="http://schemas.openxmlformats.org/officeDocument/2006/relationships" xmlns:p="http://schemas.openxmlformats.org/presentationml/2006/main" showMasterSp="0" showMasterPhAnim="0">
+  <p:cSld>
+    <p:spTree>
+      <p:nvGrpSpPr>
+        <p:cNvPr id="1" name="Shape 42">
+          <a:extLst>
+            <a:ext uri="{FF2B5EF4-FFF2-40B4-BE49-F238E27FC236}">
+              <a16:creationId xmlns:a16="http://schemas.microsoft.com/office/drawing/2014/main" id="{54B8DF1C-1316-4B88-E0B4-AAB4FDDE1CC4}"/>
+            </a:ext>
+          </a:extLst>
+        </p:cNvPr>
+        <p:cNvGrpSpPr/>
+        <p:nvPr/>
+      </p:nvGrpSpPr>
+      <p:grpSpPr>
+        <a:xfrm>
+          <a:off x="0" y="0"/>
+          <a:ext cx="0" cy="0"/>
+          <a:chOff x="0" y="0"/>
+          <a:chExt cx="0" cy="0"/>
+        </a:xfrm>
+      </p:grpSpPr>
+      <p:sp>
+        <p:nvSpPr>
+          <p:cNvPr id="43" name="Google Shape;43;g2ff2b50d283_0_13:notes">
+            <a:extLst>
+              <a:ext uri="{FF2B5EF4-FFF2-40B4-BE49-F238E27FC236}">
+                <a16:creationId xmlns:a16="http://schemas.microsoft.com/office/drawing/2014/main" id="{433E7CFC-4C96-6749-9159-DCF56AE67613}"/>
+              </a:ext>
+            </a:extLst>
+          </p:cNvPr>
+          <p:cNvSpPr>
+            <a:spLocks noGrp="1" noRot="1" noChangeAspect="1"/>
+          </p:cNvSpPr>
+          <p:nvPr>
+            <p:ph type="sldImg" idx="2"/>
+          </p:nvPr>
+        </p:nvSpPr>
+        <p:spPr>
+          <a:xfrm>
+            <a:off x="381000" y="685800"/>
+            <a:ext cx="6096000" cy="3429000"/>
+          </a:xfrm>
+          <a:custGeom>
+            <a:avLst/>
+            <a:gdLst/>
+            <a:ahLst/>
+            <a:cxnLst/>
+            <a:rect l="l" t="t" r="r" b="b"/>
+            <a:pathLst>
+              <a:path w="120000" h="120000" extrusionOk="0">
+                <a:moveTo>
+                  <a:pt x="0" y="0"/>
+                </a:moveTo>
+                <a:lnTo>
+                  <a:pt x="120000" y="0"/>
+                </a:lnTo>
+                <a:lnTo>
+                  <a:pt x="120000" y="120000"/>
+                </a:lnTo>
+                <a:lnTo>
+                  <a:pt x="0" y="120000"/>
+                </a:lnTo>
+                <a:close/>
+              </a:path>
+            </a:pathLst>
+          </a:custGeom>
+        </p:spPr>
+      </p:sp>
+      <p:sp>
+        <p:nvSpPr>
+          <p:cNvPr id="44" name="Google Shape;44;g2ff2b50d283_0_13:notes">
+            <a:extLst>
+              <a:ext uri="{FF2B5EF4-FFF2-40B4-BE49-F238E27FC236}">
+                <a16:creationId xmlns:a16="http://schemas.microsoft.com/office/drawing/2014/main" id="{6E8BC523-C8D8-DE53-8DC6-4755EB09CC52}"/>
+              </a:ext>
+            </a:extLst>
+          </p:cNvPr>
+          <p:cNvSpPr txBox="1">
+            <a:spLocks noGrp="1"/>
+          </p:cNvSpPr>
+          <p:nvPr>
+            <p:ph type="body" idx="1"/>
+          </p:nvPr>
+        </p:nvSpPr>
+        <p:spPr>
+          <a:xfrm>
+            <a:off x="685800" y="4343400"/>
+            <a:ext cx="5486400" cy="4114800"/>
+          </a:xfrm>
+          <a:prstGeom prst="rect">
+            <a:avLst/>
+          </a:prstGeom>
+        </p:spPr>
+        <p:txBody>
+          <a:bodyPr spcFirstLastPara="1" wrap="square" lIns="91425" tIns="91425" rIns="91425" bIns="91425" anchor="t" anchorCtr="0">
+            <a:noAutofit/>
+          </a:bodyPr>
+          <a:lstStyle/>
+          <a:p>
+            <a:pPr marL="0" lvl="0" indent="0" algn="l" rtl="0">
+              <a:spcBef>
+                <a:spcPts val="0"/>
+              </a:spcBef>
+              <a:spcAft>
+                <a:spcPts val="0"/>
+              </a:spcAft>
+              <a:buNone/>
+            </a:pPr>
+            <a:endParaRPr/>
+          </a:p>
+        </p:txBody>
+      </p:sp>
+    </p:spTree>
+    <p:extLst>
+      <p:ext uri="{BB962C8B-B14F-4D97-AF65-F5344CB8AC3E}">
+        <p14:creationId xmlns:p14="http://schemas.microsoft.com/office/powerpoint/2010/main" val="3673847971"/>
+      </p:ext>
+    </p:extLst>
+  </p:cSld>
+  <p:clrMapOvr>
+    <a:masterClrMapping/>
+  </p:clrMapOvr>
+</p:notes>
+</file>
+
+<file path=ppt/notesSlides/notesSlide12.xml><?xml version="1.0" encoding="utf-8"?>
+<p:notes xmlns:a="http://schemas.openxmlformats.org/drawingml/2006/main" xmlns:r="http://schemas.openxmlformats.org/officeDocument/2006/relationships" xmlns:p="http://schemas.openxmlformats.org/presentationml/2006/main" showMasterSp="0" showMasterPhAnim="0">
+  <p:cSld>
+    <p:spTree>
+      <p:nvGrpSpPr>
         <p:cNvPr id="1" name="Shape 76"/>
         <p:cNvGrpSpPr/>
         <p:nvPr/>
@@ -1552,7 +1659,7 @@
         <p:cNvPr id="1" name="Shape 50">
           <a:extLst>
             <a:ext uri="{FF2B5EF4-FFF2-40B4-BE49-F238E27FC236}">
-              <a16:creationId xmlns:a16="http://schemas.microsoft.com/office/drawing/2014/main" id="{5543B6A2-2FD3-37D3-4673-F2311B99FE23}"/>
+              <a16:creationId xmlns:a16="http://schemas.microsoft.com/office/drawing/2014/main" id="{322A252D-0DF9-C71B-3F68-68CA3EAB9453}"/>
             </a:ext>
           </a:extLst>
         </p:cNvPr>
@@ -1572,7 +1679,7 @@
           <p:cNvPr id="51" name="Google Shape;51;g2ff2b50d283_0_18:notes">
             <a:extLst>
               <a:ext uri="{FF2B5EF4-FFF2-40B4-BE49-F238E27FC236}">
-                <a16:creationId xmlns:a16="http://schemas.microsoft.com/office/drawing/2014/main" id="{9B160F8F-4B41-0B97-9A82-F06F9B0C0DF9}"/>
+                <a16:creationId xmlns:a16="http://schemas.microsoft.com/office/drawing/2014/main" id="{71793C20-7D87-CC9B-3DB2-29CF6DB36CFA}"/>
               </a:ext>
             </a:extLst>
           </p:cNvPr>
@@ -1619,7 +1726,7 @@
           <p:cNvPr id="52" name="Google Shape;52;g2ff2b50d283_0_18:notes">
             <a:extLst>
               <a:ext uri="{FF2B5EF4-FFF2-40B4-BE49-F238E27FC236}">
-                <a16:creationId xmlns:a16="http://schemas.microsoft.com/office/drawing/2014/main" id="{15BEEC47-031E-DB90-DF83-37572B5485FC}"/>
+                <a16:creationId xmlns:a16="http://schemas.microsoft.com/office/drawing/2014/main" id="{9309BAE0-EF8A-5941-D85F-B1ABEA6876AF}"/>
               </a:ext>
             </a:extLst>
           </p:cNvPr>
@@ -1661,7 +1768,7 @@
     </p:spTree>
     <p:extLst>
       <p:ext uri="{BB962C8B-B14F-4D97-AF65-F5344CB8AC3E}">
-        <p14:creationId xmlns:p14="http://schemas.microsoft.com/office/powerpoint/2010/main" val="1832115532"/>
+        <p14:creationId xmlns:p14="http://schemas.microsoft.com/office/powerpoint/2010/main" val="4103713774"/>
       </p:ext>
     </p:extLst>
   </p:cSld>
@@ -1679,7 +1786,7 @@
         <p:cNvPr id="1" name="Shape 50">
           <a:extLst>
             <a:ext uri="{FF2B5EF4-FFF2-40B4-BE49-F238E27FC236}">
-              <a16:creationId xmlns:a16="http://schemas.microsoft.com/office/drawing/2014/main" id="{2E6D6AB0-ED99-4C25-9053-C556A66D6122}"/>
+              <a16:creationId xmlns:a16="http://schemas.microsoft.com/office/drawing/2014/main" id="{8C97CAC0-0DC8-81E8-E1B3-F25FB42CECFE}"/>
             </a:ext>
           </a:extLst>
         </p:cNvPr>
@@ -1699,7 +1806,7 @@
           <p:cNvPr id="51" name="Google Shape;51;g2ff2b50d283_0_18:notes">
             <a:extLst>
               <a:ext uri="{FF2B5EF4-FFF2-40B4-BE49-F238E27FC236}">
-                <a16:creationId xmlns:a16="http://schemas.microsoft.com/office/drawing/2014/main" id="{2F5130FD-80DA-B0F9-10A2-9C0AFE4973D4}"/>
+                <a16:creationId xmlns:a16="http://schemas.microsoft.com/office/drawing/2014/main" id="{7B8B5BED-72C4-D1F1-32B7-0D25F528633F}"/>
               </a:ext>
             </a:extLst>
           </p:cNvPr>
@@ -1746,7 +1853,7 @@
           <p:cNvPr id="52" name="Google Shape;52;g2ff2b50d283_0_18:notes">
             <a:extLst>
               <a:ext uri="{FF2B5EF4-FFF2-40B4-BE49-F238E27FC236}">
-                <a16:creationId xmlns:a16="http://schemas.microsoft.com/office/drawing/2014/main" id="{C5381CAE-4C6C-A190-74CC-FB0534051A56}"/>
+                <a16:creationId xmlns:a16="http://schemas.microsoft.com/office/drawing/2014/main" id="{8997FC44-5567-F6C8-60A6-1A105BEB2073}"/>
               </a:ext>
             </a:extLst>
           </p:cNvPr>
@@ -1788,7 +1895,7 @@
     </p:spTree>
     <p:extLst>
       <p:ext uri="{BB962C8B-B14F-4D97-AF65-F5344CB8AC3E}">
-        <p14:creationId xmlns:p14="http://schemas.microsoft.com/office/powerpoint/2010/main" val="3634815361"/>
+        <p14:creationId xmlns:p14="http://schemas.microsoft.com/office/powerpoint/2010/main" val="2966500799"/>
       </p:ext>
     </p:extLst>
   </p:cSld>
@@ -1930,6 +2037,260 @@
   <p:cSld>
     <p:spTree>
       <p:nvGrpSpPr>
+        <p:cNvPr id="1" name="Shape 50">
+          <a:extLst>
+            <a:ext uri="{FF2B5EF4-FFF2-40B4-BE49-F238E27FC236}">
+              <a16:creationId xmlns:a16="http://schemas.microsoft.com/office/drawing/2014/main" id="{53A7C904-5D6D-2146-2E2D-A8BB9B5A1DAA}"/>
+            </a:ext>
+          </a:extLst>
+        </p:cNvPr>
+        <p:cNvGrpSpPr/>
+        <p:nvPr/>
+      </p:nvGrpSpPr>
+      <p:grpSpPr>
+        <a:xfrm>
+          <a:off x="0" y="0"/>
+          <a:ext cx="0" cy="0"/>
+          <a:chOff x="0" y="0"/>
+          <a:chExt cx="0" cy="0"/>
+        </a:xfrm>
+      </p:grpSpPr>
+      <p:sp>
+        <p:nvSpPr>
+          <p:cNvPr id="51" name="Google Shape;51;g2ff2b50d283_0_18:notes">
+            <a:extLst>
+              <a:ext uri="{FF2B5EF4-FFF2-40B4-BE49-F238E27FC236}">
+                <a16:creationId xmlns:a16="http://schemas.microsoft.com/office/drawing/2014/main" id="{38D3B9B9-53AB-2ECE-119A-FA6B09571E5B}"/>
+              </a:ext>
+            </a:extLst>
+          </p:cNvPr>
+          <p:cNvSpPr>
+            <a:spLocks noGrp="1" noRot="1" noChangeAspect="1"/>
+          </p:cNvSpPr>
+          <p:nvPr>
+            <p:ph type="sldImg" idx="2"/>
+          </p:nvPr>
+        </p:nvSpPr>
+        <p:spPr>
+          <a:xfrm>
+            <a:off x="381000" y="685800"/>
+            <a:ext cx="6096000" cy="3429000"/>
+          </a:xfrm>
+          <a:custGeom>
+            <a:avLst/>
+            <a:gdLst/>
+            <a:ahLst/>
+            <a:cxnLst/>
+            <a:rect l="l" t="t" r="r" b="b"/>
+            <a:pathLst>
+              <a:path w="120000" h="120000" extrusionOk="0">
+                <a:moveTo>
+                  <a:pt x="0" y="0"/>
+                </a:moveTo>
+                <a:lnTo>
+                  <a:pt x="120000" y="0"/>
+                </a:lnTo>
+                <a:lnTo>
+                  <a:pt x="120000" y="120000"/>
+                </a:lnTo>
+                <a:lnTo>
+                  <a:pt x="0" y="120000"/>
+                </a:lnTo>
+                <a:close/>
+              </a:path>
+            </a:pathLst>
+          </a:custGeom>
+        </p:spPr>
+      </p:sp>
+      <p:sp>
+        <p:nvSpPr>
+          <p:cNvPr id="52" name="Google Shape;52;g2ff2b50d283_0_18:notes">
+            <a:extLst>
+              <a:ext uri="{FF2B5EF4-FFF2-40B4-BE49-F238E27FC236}">
+                <a16:creationId xmlns:a16="http://schemas.microsoft.com/office/drawing/2014/main" id="{EE9DA16C-D4BC-8445-9C46-BA44708DF6F1}"/>
+              </a:ext>
+            </a:extLst>
+          </p:cNvPr>
+          <p:cNvSpPr txBox="1">
+            <a:spLocks noGrp="1"/>
+          </p:cNvSpPr>
+          <p:nvPr>
+            <p:ph type="body" idx="1"/>
+          </p:nvPr>
+        </p:nvSpPr>
+        <p:spPr>
+          <a:xfrm>
+            <a:off x="685800" y="4343400"/>
+            <a:ext cx="5486400" cy="4114800"/>
+          </a:xfrm>
+          <a:prstGeom prst="rect">
+            <a:avLst/>
+          </a:prstGeom>
+        </p:spPr>
+        <p:txBody>
+          <a:bodyPr spcFirstLastPara="1" wrap="square" lIns="91425" tIns="91425" rIns="91425" bIns="91425" anchor="t" anchorCtr="0">
+            <a:noAutofit/>
+          </a:bodyPr>
+          <a:lstStyle/>
+          <a:p>
+            <a:pPr marL="0" lvl="0" indent="0" algn="l" rtl="0">
+              <a:spcBef>
+                <a:spcPts val="0"/>
+              </a:spcBef>
+              <a:spcAft>
+                <a:spcPts val="0"/>
+              </a:spcAft>
+              <a:buNone/>
+            </a:pPr>
+            <a:endParaRPr/>
+          </a:p>
+        </p:txBody>
+      </p:sp>
+    </p:spTree>
+    <p:extLst>
+      <p:ext uri="{BB962C8B-B14F-4D97-AF65-F5344CB8AC3E}">
+        <p14:creationId xmlns:p14="http://schemas.microsoft.com/office/powerpoint/2010/main" val="2792572954"/>
+      </p:ext>
+    </p:extLst>
+  </p:cSld>
+  <p:clrMapOvr>
+    <a:masterClrMapping/>
+  </p:clrMapOvr>
+</p:notes>
+</file>
+
+<file path=ppt/notesSlides/notesSlide8.xml><?xml version="1.0" encoding="utf-8"?>
+<p:notes xmlns:a="http://schemas.openxmlformats.org/drawingml/2006/main" xmlns:r="http://schemas.openxmlformats.org/officeDocument/2006/relationships" xmlns:p="http://schemas.openxmlformats.org/presentationml/2006/main" showMasterSp="0" showMasterPhAnim="0">
+  <p:cSld>
+    <p:spTree>
+      <p:nvGrpSpPr>
+        <p:cNvPr id="1" name="Shape 50">
+          <a:extLst>
+            <a:ext uri="{FF2B5EF4-FFF2-40B4-BE49-F238E27FC236}">
+              <a16:creationId xmlns:a16="http://schemas.microsoft.com/office/drawing/2014/main" id="{2E6D6AB0-ED99-4C25-9053-C556A66D6122}"/>
+            </a:ext>
+          </a:extLst>
+        </p:cNvPr>
+        <p:cNvGrpSpPr/>
+        <p:nvPr/>
+      </p:nvGrpSpPr>
+      <p:grpSpPr>
+        <a:xfrm>
+          <a:off x="0" y="0"/>
+          <a:ext cx="0" cy="0"/>
+          <a:chOff x="0" y="0"/>
+          <a:chExt cx="0" cy="0"/>
+        </a:xfrm>
+      </p:grpSpPr>
+      <p:sp>
+        <p:nvSpPr>
+          <p:cNvPr id="51" name="Google Shape;51;g2ff2b50d283_0_18:notes">
+            <a:extLst>
+              <a:ext uri="{FF2B5EF4-FFF2-40B4-BE49-F238E27FC236}">
+                <a16:creationId xmlns:a16="http://schemas.microsoft.com/office/drawing/2014/main" id="{2F5130FD-80DA-B0F9-10A2-9C0AFE4973D4}"/>
+              </a:ext>
+            </a:extLst>
+          </p:cNvPr>
+          <p:cNvSpPr>
+            <a:spLocks noGrp="1" noRot="1" noChangeAspect="1"/>
+          </p:cNvSpPr>
+          <p:nvPr>
+            <p:ph type="sldImg" idx="2"/>
+          </p:nvPr>
+        </p:nvSpPr>
+        <p:spPr>
+          <a:xfrm>
+            <a:off x="381000" y="685800"/>
+            <a:ext cx="6096000" cy="3429000"/>
+          </a:xfrm>
+          <a:custGeom>
+            <a:avLst/>
+            <a:gdLst/>
+            <a:ahLst/>
+            <a:cxnLst/>
+            <a:rect l="l" t="t" r="r" b="b"/>
+            <a:pathLst>
+              <a:path w="120000" h="120000" extrusionOk="0">
+                <a:moveTo>
+                  <a:pt x="0" y="0"/>
+                </a:moveTo>
+                <a:lnTo>
+                  <a:pt x="120000" y="0"/>
+                </a:lnTo>
+                <a:lnTo>
+                  <a:pt x="120000" y="120000"/>
+                </a:lnTo>
+                <a:lnTo>
+                  <a:pt x="0" y="120000"/>
+                </a:lnTo>
+                <a:close/>
+              </a:path>
+            </a:pathLst>
+          </a:custGeom>
+        </p:spPr>
+      </p:sp>
+      <p:sp>
+        <p:nvSpPr>
+          <p:cNvPr id="52" name="Google Shape;52;g2ff2b50d283_0_18:notes">
+            <a:extLst>
+              <a:ext uri="{FF2B5EF4-FFF2-40B4-BE49-F238E27FC236}">
+                <a16:creationId xmlns:a16="http://schemas.microsoft.com/office/drawing/2014/main" id="{C5381CAE-4C6C-A190-74CC-FB0534051A56}"/>
+              </a:ext>
+            </a:extLst>
+          </p:cNvPr>
+          <p:cNvSpPr txBox="1">
+            <a:spLocks noGrp="1"/>
+          </p:cNvSpPr>
+          <p:nvPr>
+            <p:ph type="body" idx="1"/>
+          </p:nvPr>
+        </p:nvSpPr>
+        <p:spPr>
+          <a:xfrm>
+            <a:off x="685800" y="4343400"/>
+            <a:ext cx="5486400" cy="4114800"/>
+          </a:xfrm>
+          <a:prstGeom prst="rect">
+            <a:avLst/>
+          </a:prstGeom>
+        </p:spPr>
+        <p:txBody>
+          <a:bodyPr spcFirstLastPara="1" wrap="square" lIns="91425" tIns="91425" rIns="91425" bIns="91425" anchor="t" anchorCtr="0">
+            <a:noAutofit/>
+          </a:bodyPr>
+          <a:lstStyle/>
+          <a:p>
+            <a:pPr marL="0" lvl="0" indent="0" algn="l" rtl="0">
+              <a:spcBef>
+                <a:spcPts val="0"/>
+              </a:spcBef>
+              <a:spcAft>
+                <a:spcPts val="0"/>
+              </a:spcAft>
+              <a:buNone/>
+            </a:pPr>
+            <a:endParaRPr/>
+          </a:p>
+        </p:txBody>
+      </p:sp>
+    </p:spTree>
+    <p:extLst>
+      <p:ext uri="{BB962C8B-B14F-4D97-AF65-F5344CB8AC3E}">
+        <p14:creationId xmlns:p14="http://schemas.microsoft.com/office/powerpoint/2010/main" val="3634815361"/>
+      </p:ext>
+    </p:extLst>
+  </p:cSld>
+  <p:clrMapOvr>
+    <a:masterClrMapping/>
+  </p:clrMapOvr>
+</p:notes>
+</file>
+
+<file path=ppt/notesSlides/notesSlide9.xml><?xml version="1.0" encoding="utf-8"?>
+<p:notes xmlns:a="http://schemas.openxmlformats.org/drawingml/2006/main" xmlns:r="http://schemas.openxmlformats.org/officeDocument/2006/relationships" xmlns:p="http://schemas.openxmlformats.org/presentationml/2006/main" showMasterSp="0" showMasterPhAnim="0">
+  <p:cSld>
+    <p:spTree>
+      <p:nvGrpSpPr>
         <p:cNvPr id="1" name="Shape 42"/>
         <p:cNvGrpSpPr/>
         <p:nvPr/>
@@ -2022,260 +2383,6 @@
         </p:txBody>
       </p:sp>
     </p:spTree>
-  </p:cSld>
-  <p:clrMapOvr>
-    <a:masterClrMapping/>
-  </p:clrMapOvr>
-</p:notes>
-</file>
-
-<file path=ppt/notesSlides/notesSlide8.xml><?xml version="1.0" encoding="utf-8"?>
-<p:notes xmlns:a="http://schemas.openxmlformats.org/drawingml/2006/main" xmlns:r="http://schemas.openxmlformats.org/officeDocument/2006/relationships" xmlns:p="http://schemas.openxmlformats.org/presentationml/2006/main" showMasterSp="0" showMasterPhAnim="0">
-  <p:cSld>
-    <p:spTree>
-      <p:nvGrpSpPr>
-        <p:cNvPr id="1" name="Shape 42">
-          <a:extLst>
-            <a:ext uri="{FF2B5EF4-FFF2-40B4-BE49-F238E27FC236}">
-              <a16:creationId xmlns:a16="http://schemas.microsoft.com/office/drawing/2014/main" id="{F83276EB-F4B2-D99E-34FD-B8BFA3D3110D}"/>
-            </a:ext>
-          </a:extLst>
-        </p:cNvPr>
-        <p:cNvGrpSpPr/>
-        <p:nvPr/>
-      </p:nvGrpSpPr>
-      <p:grpSpPr>
-        <a:xfrm>
-          <a:off x="0" y="0"/>
-          <a:ext cx="0" cy="0"/>
-          <a:chOff x="0" y="0"/>
-          <a:chExt cx="0" cy="0"/>
-        </a:xfrm>
-      </p:grpSpPr>
-      <p:sp>
-        <p:nvSpPr>
-          <p:cNvPr id="43" name="Google Shape;43;g2ff2b50d283_0_13:notes">
-            <a:extLst>
-              <a:ext uri="{FF2B5EF4-FFF2-40B4-BE49-F238E27FC236}">
-                <a16:creationId xmlns:a16="http://schemas.microsoft.com/office/drawing/2014/main" id="{800C32EA-A2AE-AC0A-696F-31B96CA36982}"/>
-              </a:ext>
-            </a:extLst>
-          </p:cNvPr>
-          <p:cNvSpPr>
-            <a:spLocks noGrp="1" noRot="1" noChangeAspect="1"/>
-          </p:cNvSpPr>
-          <p:nvPr>
-            <p:ph type="sldImg" idx="2"/>
-          </p:nvPr>
-        </p:nvSpPr>
-        <p:spPr>
-          <a:xfrm>
-            <a:off x="381000" y="685800"/>
-            <a:ext cx="6096000" cy="3429000"/>
-          </a:xfrm>
-          <a:custGeom>
-            <a:avLst/>
-            <a:gdLst/>
-            <a:ahLst/>
-            <a:cxnLst/>
-            <a:rect l="l" t="t" r="r" b="b"/>
-            <a:pathLst>
-              <a:path w="120000" h="120000" extrusionOk="0">
-                <a:moveTo>
-                  <a:pt x="0" y="0"/>
-                </a:moveTo>
-                <a:lnTo>
-                  <a:pt x="120000" y="0"/>
-                </a:lnTo>
-                <a:lnTo>
-                  <a:pt x="120000" y="120000"/>
-                </a:lnTo>
-                <a:lnTo>
-                  <a:pt x="0" y="120000"/>
-                </a:lnTo>
-                <a:close/>
-              </a:path>
-            </a:pathLst>
-          </a:custGeom>
-        </p:spPr>
-      </p:sp>
-      <p:sp>
-        <p:nvSpPr>
-          <p:cNvPr id="44" name="Google Shape;44;g2ff2b50d283_0_13:notes">
-            <a:extLst>
-              <a:ext uri="{FF2B5EF4-FFF2-40B4-BE49-F238E27FC236}">
-                <a16:creationId xmlns:a16="http://schemas.microsoft.com/office/drawing/2014/main" id="{E988F3D7-7EBF-EA1C-A6D6-C91C3C571CF3}"/>
-              </a:ext>
-            </a:extLst>
-          </p:cNvPr>
-          <p:cNvSpPr txBox="1">
-            <a:spLocks noGrp="1"/>
-          </p:cNvSpPr>
-          <p:nvPr>
-            <p:ph type="body" idx="1"/>
-          </p:nvPr>
-        </p:nvSpPr>
-        <p:spPr>
-          <a:xfrm>
-            <a:off x="685800" y="4343400"/>
-            <a:ext cx="5486400" cy="4114800"/>
-          </a:xfrm>
-          <a:prstGeom prst="rect">
-            <a:avLst/>
-          </a:prstGeom>
-        </p:spPr>
-        <p:txBody>
-          <a:bodyPr spcFirstLastPara="1" wrap="square" lIns="91425" tIns="91425" rIns="91425" bIns="91425" anchor="t" anchorCtr="0">
-            <a:noAutofit/>
-          </a:bodyPr>
-          <a:lstStyle/>
-          <a:p>
-            <a:pPr marL="0" lvl="0" indent="0" algn="l" rtl="0">
-              <a:spcBef>
-                <a:spcPts val="0"/>
-              </a:spcBef>
-              <a:spcAft>
-                <a:spcPts val="0"/>
-              </a:spcAft>
-              <a:buNone/>
-            </a:pPr>
-            <a:endParaRPr/>
-          </a:p>
-        </p:txBody>
-      </p:sp>
-    </p:spTree>
-    <p:extLst>
-      <p:ext uri="{BB962C8B-B14F-4D97-AF65-F5344CB8AC3E}">
-        <p14:creationId xmlns:p14="http://schemas.microsoft.com/office/powerpoint/2010/main" val="2652559166"/>
-      </p:ext>
-    </p:extLst>
-  </p:cSld>
-  <p:clrMapOvr>
-    <a:masterClrMapping/>
-  </p:clrMapOvr>
-</p:notes>
-</file>
-
-<file path=ppt/notesSlides/notesSlide9.xml><?xml version="1.0" encoding="utf-8"?>
-<p:notes xmlns:a="http://schemas.openxmlformats.org/drawingml/2006/main" xmlns:r="http://schemas.openxmlformats.org/officeDocument/2006/relationships" xmlns:p="http://schemas.openxmlformats.org/presentationml/2006/main" showMasterSp="0" showMasterPhAnim="0">
-  <p:cSld>
-    <p:spTree>
-      <p:nvGrpSpPr>
-        <p:cNvPr id="1" name="Shape 42">
-          <a:extLst>
-            <a:ext uri="{FF2B5EF4-FFF2-40B4-BE49-F238E27FC236}">
-              <a16:creationId xmlns:a16="http://schemas.microsoft.com/office/drawing/2014/main" id="{54B8DF1C-1316-4B88-E0B4-AAB4FDDE1CC4}"/>
-            </a:ext>
-          </a:extLst>
-        </p:cNvPr>
-        <p:cNvGrpSpPr/>
-        <p:nvPr/>
-      </p:nvGrpSpPr>
-      <p:grpSpPr>
-        <a:xfrm>
-          <a:off x="0" y="0"/>
-          <a:ext cx="0" cy="0"/>
-          <a:chOff x="0" y="0"/>
-          <a:chExt cx="0" cy="0"/>
-        </a:xfrm>
-      </p:grpSpPr>
-      <p:sp>
-        <p:nvSpPr>
-          <p:cNvPr id="43" name="Google Shape;43;g2ff2b50d283_0_13:notes">
-            <a:extLst>
-              <a:ext uri="{FF2B5EF4-FFF2-40B4-BE49-F238E27FC236}">
-                <a16:creationId xmlns:a16="http://schemas.microsoft.com/office/drawing/2014/main" id="{433E7CFC-4C96-6749-9159-DCF56AE67613}"/>
-              </a:ext>
-            </a:extLst>
-          </p:cNvPr>
-          <p:cNvSpPr>
-            <a:spLocks noGrp="1" noRot="1" noChangeAspect="1"/>
-          </p:cNvSpPr>
-          <p:nvPr>
-            <p:ph type="sldImg" idx="2"/>
-          </p:nvPr>
-        </p:nvSpPr>
-        <p:spPr>
-          <a:xfrm>
-            <a:off x="381000" y="685800"/>
-            <a:ext cx="6096000" cy="3429000"/>
-          </a:xfrm>
-          <a:custGeom>
-            <a:avLst/>
-            <a:gdLst/>
-            <a:ahLst/>
-            <a:cxnLst/>
-            <a:rect l="l" t="t" r="r" b="b"/>
-            <a:pathLst>
-              <a:path w="120000" h="120000" extrusionOk="0">
-                <a:moveTo>
-                  <a:pt x="0" y="0"/>
-                </a:moveTo>
-                <a:lnTo>
-                  <a:pt x="120000" y="0"/>
-                </a:lnTo>
-                <a:lnTo>
-                  <a:pt x="120000" y="120000"/>
-                </a:lnTo>
-                <a:lnTo>
-                  <a:pt x="0" y="120000"/>
-                </a:lnTo>
-                <a:close/>
-              </a:path>
-            </a:pathLst>
-          </a:custGeom>
-        </p:spPr>
-      </p:sp>
-      <p:sp>
-        <p:nvSpPr>
-          <p:cNvPr id="44" name="Google Shape;44;g2ff2b50d283_0_13:notes">
-            <a:extLst>
-              <a:ext uri="{FF2B5EF4-FFF2-40B4-BE49-F238E27FC236}">
-                <a16:creationId xmlns:a16="http://schemas.microsoft.com/office/drawing/2014/main" id="{6E8BC523-C8D8-DE53-8DC6-4755EB09CC52}"/>
-              </a:ext>
-            </a:extLst>
-          </p:cNvPr>
-          <p:cNvSpPr txBox="1">
-            <a:spLocks noGrp="1"/>
-          </p:cNvSpPr>
-          <p:nvPr>
-            <p:ph type="body" idx="1"/>
-          </p:nvPr>
-        </p:nvSpPr>
-        <p:spPr>
-          <a:xfrm>
-            <a:off x="685800" y="4343400"/>
-            <a:ext cx="5486400" cy="4114800"/>
-          </a:xfrm>
-          <a:prstGeom prst="rect">
-            <a:avLst/>
-          </a:prstGeom>
-        </p:spPr>
-        <p:txBody>
-          <a:bodyPr spcFirstLastPara="1" wrap="square" lIns="91425" tIns="91425" rIns="91425" bIns="91425" anchor="t" anchorCtr="0">
-            <a:noAutofit/>
-          </a:bodyPr>
-          <a:lstStyle/>
-          <a:p>
-            <a:pPr marL="0" lvl="0" indent="0" algn="l" rtl="0">
-              <a:spcBef>
-                <a:spcPts val="0"/>
-              </a:spcBef>
-              <a:spcAft>
-                <a:spcPts val="0"/>
-              </a:spcAft>
-              <a:buNone/>
-            </a:pPr>
-            <a:endParaRPr/>
-          </a:p>
-        </p:txBody>
-      </p:sp>
-    </p:spTree>
-    <p:extLst>
-      <p:ext uri="{BB962C8B-B14F-4D97-AF65-F5344CB8AC3E}">
-        <p14:creationId xmlns:p14="http://schemas.microsoft.com/office/powerpoint/2010/main" val="3673847971"/>
-      </p:ext>
-    </p:extLst>
   </p:cSld>
   <p:clrMapOvr>
     <a:masterClrMapping/>
@@ -5304,6 +5411,528 @@
   <p:cSld>
     <p:spTree>
       <p:nvGrpSpPr>
+        <p:cNvPr id="1" name="Shape 45">
+          <a:extLst>
+            <a:ext uri="{FF2B5EF4-FFF2-40B4-BE49-F238E27FC236}">
+              <a16:creationId xmlns:a16="http://schemas.microsoft.com/office/drawing/2014/main" id="{B5F0FD63-E2C6-3346-9533-4F323DCCD5BC}"/>
+            </a:ext>
+          </a:extLst>
+        </p:cNvPr>
+        <p:cNvGrpSpPr/>
+        <p:nvPr/>
+      </p:nvGrpSpPr>
+      <p:grpSpPr>
+        <a:xfrm>
+          <a:off x="0" y="0"/>
+          <a:ext cx="0" cy="0"/>
+          <a:chOff x="0" y="0"/>
+          <a:chExt cx="0" cy="0"/>
+        </a:xfrm>
+      </p:grpSpPr>
+      <p:sp>
+        <p:nvSpPr>
+          <p:cNvPr id="46" name="Google Shape;46;p10">
+            <a:extLst>
+              <a:ext uri="{FF2B5EF4-FFF2-40B4-BE49-F238E27FC236}">
+                <a16:creationId xmlns:a16="http://schemas.microsoft.com/office/drawing/2014/main" id="{AD0C9125-2529-87A6-A821-EF0157BECEF2}"/>
+              </a:ext>
+            </a:extLst>
+          </p:cNvPr>
+          <p:cNvSpPr txBox="1">
+            <a:spLocks noGrp="1"/>
+          </p:cNvSpPr>
+          <p:nvPr>
+            <p:ph type="title"/>
+          </p:nvPr>
+        </p:nvSpPr>
+        <p:spPr>
+          <a:xfrm>
+            <a:off x="2698250" y="367100"/>
+            <a:ext cx="5905500" cy="572700"/>
+          </a:xfrm>
+          <a:prstGeom prst="rect">
+            <a:avLst/>
+          </a:prstGeom>
+        </p:spPr>
+        <p:txBody>
+          <a:bodyPr spcFirstLastPara="1" wrap="square" lIns="91425" tIns="91425" rIns="91425" bIns="91425" anchor="t" anchorCtr="0">
+            <a:normAutofit fontScale="90000"/>
+          </a:bodyPr>
+          <a:lstStyle/>
+          <a:p>
+            <a:pPr marL="0" lvl="0" indent="0" algn="ctr" rtl="0">
+              <a:lnSpc>
+                <a:spcPct val="115000"/>
+              </a:lnSpc>
+              <a:spcBef>
+                <a:spcPts val="0"/>
+              </a:spcBef>
+              <a:spcAft>
+                <a:spcPts val="0"/>
+              </a:spcAft>
+              <a:buNone/>
+            </a:pPr>
+            <a:r>
+              <a:rPr lang="en-IN" sz="3300" dirty="0">
+                <a:solidFill>
+                  <a:schemeClr val="dk1"/>
+                </a:solidFill>
+                <a:latin typeface="Helvetica Neue"/>
+                <a:ea typeface="Helvetica Neue"/>
+                <a:cs typeface="Helvetica Neue"/>
+                <a:sym typeface="Helvetica Neue"/>
+              </a:rPr>
+              <a:t>ATMEGA 328 TCCR 0</a:t>
+            </a:r>
+            <a:endParaRPr sz="3300" dirty="0">
+              <a:solidFill>
+                <a:schemeClr val="dk1"/>
+              </a:solidFill>
+              <a:latin typeface="Helvetica Neue"/>
+              <a:ea typeface="Helvetica Neue"/>
+              <a:cs typeface="Helvetica Neue"/>
+              <a:sym typeface="Helvetica Neue"/>
+            </a:endParaRPr>
+          </a:p>
+          <a:p>
+            <a:pPr marL="0" lvl="0" indent="0" algn="l" rtl="0">
+              <a:spcBef>
+                <a:spcPts val="0"/>
+              </a:spcBef>
+              <a:spcAft>
+                <a:spcPts val="0"/>
+              </a:spcAft>
+              <a:buNone/>
+            </a:pPr>
+            <a:endParaRPr dirty="0"/>
+          </a:p>
+        </p:txBody>
+      </p:sp>
+      <p:sp>
+        <p:nvSpPr>
+          <p:cNvPr id="47" name="Google Shape;47;p10">
+            <a:extLst>
+              <a:ext uri="{FF2B5EF4-FFF2-40B4-BE49-F238E27FC236}">
+                <a16:creationId xmlns:a16="http://schemas.microsoft.com/office/drawing/2014/main" id="{E974ABAE-A1E9-5AF4-4F05-9A6B3B72156A}"/>
+              </a:ext>
+            </a:extLst>
+          </p:cNvPr>
+          <p:cNvSpPr txBox="1"/>
+          <p:nvPr/>
+        </p:nvSpPr>
+        <p:spPr>
+          <a:xfrm>
+            <a:off x="2926725" y="1057650"/>
+            <a:ext cx="5274000" cy="3028200"/>
+          </a:xfrm>
+          <a:prstGeom prst="rect">
+            <a:avLst/>
+          </a:prstGeom>
+          <a:noFill/>
+          <a:ln>
+            <a:noFill/>
+          </a:ln>
+        </p:spPr>
+        <p:txBody>
+          <a:bodyPr spcFirstLastPara="1" wrap="square" lIns="91425" tIns="91425" rIns="91425" bIns="91425" anchor="t" anchorCtr="0">
+            <a:noAutofit/>
+          </a:bodyPr>
+          <a:lstStyle/>
+          <a:p>
+            <a:pPr marL="444500" lvl="0" indent="-342900" algn="l" rtl="0">
+              <a:lnSpc>
+                <a:spcPct val="115000"/>
+              </a:lnSpc>
+              <a:spcBef>
+                <a:spcPts val="0"/>
+              </a:spcBef>
+              <a:spcAft>
+                <a:spcPts val="0"/>
+              </a:spcAft>
+              <a:buClr>
+                <a:schemeClr val="dk1"/>
+              </a:buClr>
+              <a:buSzPts val="2000"/>
+              <a:buFont typeface="Arial" panose="020B0604020202020204" pitchFamily="34" charset="0"/>
+              <a:buChar char="•"/>
+            </a:pPr>
+            <a:endParaRPr lang="en-US" sz="2000" dirty="0">
+              <a:solidFill>
+                <a:schemeClr val="dk1"/>
+              </a:solidFill>
+              <a:latin typeface="Helvetica Neue"/>
+              <a:ea typeface="Helvetica Neue"/>
+              <a:cs typeface="Helvetica Neue"/>
+              <a:sym typeface="Helvetica Neue"/>
+            </a:endParaRPr>
+          </a:p>
+        </p:txBody>
+      </p:sp>
+      <p:pic>
+        <p:nvPicPr>
+          <p:cNvPr id="4" name="Picture 3">
+            <a:extLst>
+              <a:ext uri="{FF2B5EF4-FFF2-40B4-BE49-F238E27FC236}">
+                <a16:creationId xmlns:a16="http://schemas.microsoft.com/office/drawing/2014/main" id="{24A15A76-7B21-037E-1031-980EB6A2BB21}"/>
+              </a:ext>
+            </a:extLst>
+          </p:cNvPr>
+          <p:cNvPicPr>
+            <a:picLocks noChangeAspect="1"/>
+          </p:cNvPicPr>
+          <p:nvPr/>
+        </p:nvPicPr>
+        <p:blipFill>
+          <a:blip r:embed="rId3"/>
+          <a:stretch>
+            <a:fillRect/>
+          </a:stretch>
+        </p:blipFill>
+        <p:spPr>
+          <a:xfrm>
+            <a:off x="2698250" y="1636745"/>
+            <a:ext cx="6021172" cy="1778405"/>
+          </a:xfrm>
+          <a:prstGeom prst="rect">
+            <a:avLst/>
+          </a:prstGeom>
+        </p:spPr>
+      </p:pic>
+    </p:spTree>
+    <p:extLst>
+      <p:ext uri="{BB962C8B-B14F-4D97-AF65-F5344CB8AC3E}">
+        <p14:creationId xmlns:p14="http://schemas.microsoft.com/office/powerpoint/2010/main" val="2771709912"/>
+      </p:ext>
+    </p:extLst>
+  </p:cSld>
+  <p:clrMapOvr>
+    <a:masterClrMapping/>
+  </p:clrMapOvr>
+</p:sld>
+</file>
+
+<file path=ppt/slides/slide11.xml><?xml version="1.0" encoding="utf-8"?>
+<p:sld xmlns:a="http://schemas.openxmlformats.org/drawingml/2006/main" xmlns:r="http://schemas.openxmlformats.org/officeDocument/2006/relationships" xmlns:p="http://schemas.openxmlformats.org/presentationml/2006/main">
+  <p:cSld>
+    <p:spTree>
+      <p:nvGrpSpPr>
+        <p:cNvPr id="1" name="Shape 45">
+          <a:extLst>
+            <a:ext uri="{FF2B5EF4-FFF2-40B4-BE49-F238E27FC236}">
+              <a16:creationId xmlns:a16="http://schemas.microsoft.com/office/drawing/2014/main" id="{C9F305B8-3D07-4351-6D66-D5B8ECD1F6AC}"/>
+            </a:ext>
+          </a:extLst>
+        </p:cNvPr>
+        <p:cNvGrpSpPr/>
+        <p:nvPr/>
+      </p:nvGrpSpPr>
+      <p:grpSpPr>
+        <a:xfrm>
+          <a:off x="0" y="0"/>
+          <a:ext cx="0" cy="0"/>
+          <a:chOff x="0" y="0"/>
+          <a:chExt cx="0" cy="0"/>
+        </a:xfrm>
+      </p:grpSpPr>
+      <p:sp>
+        <p:nvSpPr>
+          <p:cNvPr id="46" name="Google Shape;46;p10">
+            <a:extLst>
+              <a:ext uri="{FF2B5EF4-FFF2-40B4-BE49-F238E27FC236}">
+                <a16:creationId xmlns:a16="http://schemas.microsoft.com/office/drawing/2014/main" id="{9A579AF7-4051-6167-3D0A-4D25C2B6F53E}"/>
+              </a:ext>
+            </a:extLst>
+          </p:cNvPr>
+          <p:cNvSpPr txBox="1">
+            <a:spLocks noGrp="1"/>
+          </p:cNvSpPr>
+          <p:nvPr>
+            <p:ph type="title"/>
+          </p:nvPr>
+        </p:nvSpPr>
+        <p:spPr>
+          <a:xfrm>
+            <a:off x="2610975" y="1948250"/>
+            <a:ext cx="5905500" cy="572700"/>
+          </a:xfrm>
+          <a:prstGeom prst="rect">
+            <a:avLst/>
+          </a:prstGeom>
+        </p:spPr>
+        <p:txBody>
+          <a:bodyPr spcFirstLastPara="1" wrap="square" lIns="91425" tIns="91425" rIns="91425" bIns="91425" anchor="t" anchorCtr="0">
+            <a:normAutofit fontScale="90000"/>
+          </a:bodyPr>
+          <a:lstStyle/>
+          <a:p>
+            <a:pPr marL="0" lvl="0" indent="0" algn="ctr" rtl="0">
+              <a:lnSpc>
+                <a:spcPct val="115000"/>
+              </a:lnSpc>
+              <a:spcBef>
+                <a:spcPts val="0"/>
+              </a:spcBef>
+              <a:spcAft>
+                <a:spcPts val="0"/>
+              </a:spcAft>
+              <a:buNone/>
+            </a:pPr>
+            <a:r>
+              <a:rPr lang="en-IN" sz="3300" dirty="0">
+                <a:solidFill>
+                  <a:schemeClr val="dk1"/>
+                </a:solidFill>
+                <a:latin typeface="Helvetica Neue"/>
+                <a:ea typeface="Helvetica Neue"/>
+                <a:cs typeface="Helvetica Neue"/>
+                <a:sym typeface="Helvetica Neue"/>
+              </a:rPr>
+              <a:t>Let us Code</a:t>
+            </a:r>
+            <a:endParaRPr sz="3300" dirty="0">
+              <a:solidFill>
+                <a:schemeClr val="dk1"/>
+              </a:solidFill>
+              <a:latin typeface="Helvetica Neue"/>
+              <a:ea typeface="Helvetica Neue"/>
+              <a:cs typeface="Helvetica Neue"/>
+              <a:sym typeface="Helvetica Neue"/>
+            </a:endParaRPr>
+          </a:p>
+          <a:p>
+            <a:pPr marL="0" lvl="0" indent="0" algn="l" rtl="0">
+              <a:spcBef>
+                <a:spcPts val="0"/>
+              </a:spcBef>
+              <a:spcAft>
+                <a:spcPts val="0"/>
+              </a:spcAft>
+              <a:buNone/>
+            </a:pPr>
+            <a:endParaRPr dirty="0"/>
+          </a:p>
+        </p:txBody>
+      </p:sp>
+      <p:sp>
+        <p:nvSpPr>
+          <p:cNvPr id="47" name="Google Shape;47;p10">
+            <a:extLst>
+              <a:ext uri="{FF2B5EF4-FFF2-40B4-BE49-F238E27FC236}">
+                <a16:creationId xmlns:a16="http://schemas.microsoft.com/office/drawing/2014/main" id="{E30FF108-42AE-A420-A9C5-909055950C75}"/>
+              </a:ext>
+            </a:extLst>
+          </p:cNvPr>
+          <p:cNvSpPr txBox="1"/>
+          <p:nvPr/>
+        </p:nvSpPr>
+        <p:spPr>
+          <a:xfrm>
+            <a:off x="2926725" y="1057650"/>
+            <a:ext cx="5274000" cy="3028200"/>
+          </a:xfrm>
+          <a:prstGeom prst="rect">
+            <a:avLst/>
+          </a:prstGeom>
+          <a:noFill/>
+          <a:ln>
+            <a:noFill/>
+          </a:ln>
+        </p:spPr>
+        <p:txBody>
+          <a:bodyPr spcFirstLastPara="1" wrap="square" lIns="91425" tIns="91425" rIns="91425" bIns="91425" anchor="t" anchorCtr="0">
+            <a:noAutofit/>
+          </a:bodyPr>
+          <a:lstStyle/>
+          <a:p>
+            <a:pPr marL="444500" lvl="0" indent="-342900" algn="l" rtl="0">
+              <a:lnSpc>
+                <a:spcPct val="115000"/>
+              </a:lnSpc>
+              <a:spcBef>
+                <a:spcPts val="0"/>
+              </a:spcBef>
+              <a:spcAft>
+                <a:spcPts val="0"/>
+              </a:spcAft>
+              <a:buClr>
+                <a:schemeClr val="dk1"/>
+              </a:buClr>
+              <a:buSzPts val="2000"/>
+              <a:buFont typeface="Arial" panose="020B0604020202020204" pitchFamily="34" charset="0"/>
+              <a:buChar char="•"/>
+            </a:pPr>
+            <a:endParaRPr lang="en-US" sz="2000" dirty="0">
+              <a:solidFill>
+                <a:schemeClr val="dk1"/>
+              </a:solidFill>
+              <a:latin typeface="Helvetica Neue"/>
+              <a:ea typeface="Helvetica Neue"/>
+              <a:cs typeface="Helvetica Neue"/>
+              <a:sym typeface="Helvetica Neue"/>
+            </a:endParaRPr>
+          </a:p>
+        </p:txBody>
+      </p:sp>
+    </p:spTree>
+    <p:extLst>
+      <p:ext uri="{BB962C8B-B14F-4D97-AF65-F5344CB8AC3E}">
+        <p14:creationId xmlns:p14="http://schemas.microsoft.com/office/powerpoint/2010/main" val="2816312007"/>
+      </p:ext>
+    </p:extLst>
+  </p:cSld>
+  <p:clrMapOvr>
+    <a:masterClrMapping/>
+  </p:clrMapOvr>
+</p:sld>
+</file>
+
+<file path=ppt/slides/slide12.xml><?xml version="1.0" encoding="utf-8"?>
+<p:sld xmlns:a="http://schemas.openxmlformats.org/drawingml/2006/main" xmlns:r="http://schemas.openxmlformats.org/officeDocument/2006/relationships" xmlns:p="http://schemas.openxmlformats.org/presentationml/2006/main">
+  <p:cSld>
+    <p:spTree>
+      <p:nvGrpSpPr>
+        <p:cNvPr id="1" name=""/>
+        <p:cNvGrpSpPr/>
+        <p:nvPr/>
+      </p:nvGrpSpPr>
+      <p:grpSpPr>
+        <a:xfrm>
+          <a:off x="0" y="0"/>
+          <a:ext cx="0" cy="0"/>
+          <a:chOff x="0" y="0"/>
+          <a:chExt cx="0" cy="0"/>
+        </a:xfrm>
+      </p:grpSpPr>
+      <p:sp>
+        <p:nvSpPr>
+          <p:cNvPr id="2" name="Title 1">
+            <a:extLst>
+              <a:ext uri="{FF2B5EF4-FFF2-40B4-BE49-F238E27FC236}">
+                <a16:creationId xmlns:a16="http://schemas.microsoft.com/office/drawing/2014/main" id="{004D21FA-FB07-B556-EAC7-51D79FFCFB6A}"/>
+              </a:ext>
+            </a:extLst>
+          </p:cNvPr>
+          <p:cNvSpPr>
+            <a:spLocks noGrp="1"/>
+          </p:cNvSpPr>
+          <p:nvPr>
+            <p:ph type="title"/>
+          </p:nvPr>
+        </p:nvSpPr>
+        <p:spPr>
+          <a:xfrm>
+            <a:off x="2698249" y="367099"/>
+            <a:ext cx="6065823" cy="3593155"/>
+          </a:xfrm>
+        </p:spPr>
+        <p:txBody>
+          <a:bodyPr>
+            <a:normAutofit fontScale="90000"/>
+          </a:bodyPr>
+          <a:lstStyle/>
+          <a:p>
+            <a:r>
+              <a:rPr lang="en-IN" dirty="0">
+                <a:sym typeface="Wingdings" panose="05000000000000000000" pitchFamily="2" charset="2"/>
+              </a:rPr>
+              <a:t> </a:t>
+            </a:r>
+            <a:r>
+              <a:rPr lang="en-IN" dirty="0"/>
+              <a:t>Select appropriate PWM mode(FAST/ PHASE correct)</a:t>
+            </a:r>
+            <a:br>
+              <a:rPr lang="en-IN" dirty="0"/>
+            </a:br>
+            <a:r>
+              <a:rPr lang="en-IN" dirty="0">
+                <a:sym typeface="Wingdings" panose="05000000000000000000" pitchFamily="2" charset="2"/>
+              </a:rPr>
+              <a:t> </a:t>
+            </a:r>
+            <a:r>
+              <a:rPr lang="en-IN" dirty="0"/>
+              <a:t>Select inverting or non-inverting</a:t>
+            </a:r>
+            <a:br>
+              <a:rPr lang="en-IN" dirty="0"/>
+            </a:br>
+            <a:r>
+              <a:rPr lang="en-IN" dirty="0">
+                <a:sym typeface="Wingdings" panose="05000000000000000000" pitchFamily="2" charset="2"/>
+              </a:rPr>
+              <a:t></a:t>
+            </a:r>
+            <a:r>
+              <a:rPr lang="en-IN" dirty="0"/>
+              <a:t>Select </a:t>
+            </a:r>
+            <a:r>
+              <a:rPr lang="en-IN" dirty="0" err="1"/>
+              <a:t>prescalar</a:t>
+            </a:r>
+            <a:r>
+              <a:rPr lang="en-IN" dirty="0"/>
+              <a:t>(depending on the required PWM frequency)</a:t>
+            </a:r>
+            <a:br>
+              <a:rPr lang="en-IN" dirty="0"/>
+            </a:br>
+            <a:r>
+              <a:rPr lang="en-IN" dirty="0">
+                <a:sym typeface="Wingdings" panose="05000000000000000000" pitchFamily="2" charset="2"/>
+              </a:rPr>
+              <a:t> Set </a:t>
+            </a:r>
+            <a:r>
+              <a:rPr lang="en-IN" dirty="0" err="1">
+                <a:sym typeface="Wingdings" panose="05000000000000000000" pitchFamily="2" charset="2"/>
+              </a:rPr>
+              <a:t>OCRx</a:t>
+            </a:r>
+            <a:r>
+              <a:rPr lang="en-IN" dirty="0">
+                <a:sym typeface="Wingdings" panose="05000000000000000000" pitchFamily="2" charset="2"/>
+              </a:rPr>
+              <a:t> depending on the </a:t>
+            </a:r>
+            <a:r>
+              <a:rPr lang="en-IN">
+                <a:sym typeface="Wingdings" panose="05000000000000000000" pitchFamily="2" charset="2"/>
+              </a:rPr>
+              <a:t>duty cycle</a:t>
+            </a:r>
+            <a:br>
+              <a:rPr lang="en-IN" dirty="0"/>
+            </a:br>
+            <a:br>
+              <a:rPr lang="en-IN" dirty="0"/>
+            </a:br>
+            <a:br>
+              <a:rPr lang="en-IN" dirty="0"/>
+            </a:br>
+            <a:endParaRPr lang="en-IN" dirty="0"/>
+          </a:p>
+        </p:txBody>
+      </p:sp>
+    </p:spTree>
+    <p:extLst>
+      <p:ext uri="{BB962C8B-B14F-4D97-AF65-F5344CB8AC3E}">
+        <p14:creationId xmlns:p14="http://schemas.microsoft.com/office/powerpoint/2010/main" val="2168209001"/>
+      </p:ext>
+    </p:extLst>
+  </p:cSld>
+  <p:clrMapOvr>
+    <a:masterClrMapping/>
+  </p:clrMapOvr>
+</p:sld>
+</file>
+
+<file path=ppt/slides/slide13.xml><?xml version="1.0" encoding="utf-8"?>
+<p:sld xmlns:a="http://schemas.openxmlformats.org/drawingml/2006/main" xmlns:r="http://schemas.openxmlformats.org/officeDocument/2006/relationships" xmlns:p="http://schemas.openxmlformats.org/presentationml/2006/main">
+  <p:cSld>
+    <p:spTree>
+      <p:nvGrpSpPr>
         <p:cNvPr id="1" name="Shape 79"/>
         <p:cNvGrpSpPr/>
         <p:nvPr/>
@@ -5807,7 +6436,7 @@
         <p:cNvPr id="1" name="Shape 53">
           <a:extLst>
             <a:ext uri="{FF2B5EF4-FFF2-40B4-BE49-F238E27FC236}">
-              <a16:creationId xmlns:a16="http://schemas.microsoft.com/office/drawing/2014/main" id="{34751E84-F289-6868-23E7-D94F4942B6A5}"/>
+              <a16:creationId xmlns:a16="http://schemas.microsoft.com/office/drawing/2014/main" id="{0EB86F16-7B4A-E98A-792D-FDF549C5B2B7}"/>
             </a:ext>
           </a:extLst>
         </p:cNvPr>
@@ -5827,7 +6456,7 @@
           <p:cNvPr id="54" name="Google Shape;54;p11">
             <a:extLst>
               <a:ext uri="{FF2B5EF4-FFF2-40B4-BE49-F238E27FC236}">
-                <a16:creationId xmlns:a16="http://schemas.microsoft.com/office/drawing/2014/main" id="{30DA5EE7-6660-CD87-865D-D50168C59BB5}"/>
+                <a16:creationId xmlns:a16="http://schemas.microsoft.com/office/drawing/2014/main" id="{C7928DC8-E13F-2991-8EA4-0C6925F8EE6C}"/>
               </a:ext>
             </a:extLst>
           </p:cNvPr>
@@ -5840,8 +6469,8 @@
         </p:nvSpPr>
         <p:spPr>
           <a:xfrm>
-            <a:off x="2698250" y="367100"/>
-            <a:ext cx="5905500" cy="572700"/>
+            <a:off x="2530824" y="295015"/>
+            <a:ext cx="6503705" cy="572700"/>
           </a:xfrm>
           <a:prstGeom prst="rect">
             <a:avLst/>
@@ -5875,7 +6504,7 @@
                 <a:cs typeface="Helvetica Neue"/>
                 <a:sym typeface="Helvetica Neue"/>
               </a:rPr>
-              <a:t>PWM Frequency</a:t>
+              <a:t>Fast PWM </a:t>
             </a:r>
             <a:endParaRPr sz="3300" dirty="0">
               <a:solidFill>
@@ -5906,7 +6535,7 @@
           <p:cNvPr id="55" name="Google Shape;55;p11">
             <a:extLst>
               <a:ext uri="{FF2B5EF4-FFF2-40B4-BE49-F238E27FC236}">
-                <a16:creationId xmlns:a16="http://schemas.microsoft.com/office/drawing/2014/main" id="{BF0CD398-A66F-BE54-C42B-73E9F30FF70A}"/>
+                <a16:creationId xmlns:a16="http://schemas.microsoft.com/office/drawing/2014/main" id="{3AF1126F-07D6-CEB2-8861-513FA81FB544}"/>
               </a:ext>
             </a:extLst>
           </p:cNvPr>
@@ -5932,21 +6561,12 @@
           </a:bodyPr>
           <a:lstStyle/>
           <a:p>
-            <a:pPr marL="101600" lvl="0" indent="0" algn="l" rtl="0">
-              <a:spcBef>
-                <a:spcPts val="0"/>
-              </a:spcBef>
-              <a:spcAft>
-                <a:spcPts val="0"/>
-              </a:spcAft>
-              <a:buClr>
-                <a:schemeClr val="dk1"/>
-              </a:buClr>
+            <a:pPr marL="101600" indent="0">
               <a:buSzPts val="2000"/>
               <a:buNone/>
             </a:pPr>
             <a:r>
-              <a:rPr lang="en-IN" sz="3600" dirty="0">
+              <a:rPr lang="en-IN" sz="2000" dirty="0" err="1">
                 <a:solidFill>
                   <a:schemeClr val="accent3"/>
                 </a:solidFill>
@@ -5958,7 +6578,7 @@
               <a:t>F</a:t>
             </a:r>
             <a:r>
-              <a:rPr lang="en-IN" sz="3600" baseline="-25000" dirty="0">
+              <a:rPr lang="en-IN" sz="2000" baseline="-25000" dirty="0" err="1">
                 <a:solidFill>
                   <a:schemeClr val="accent3"/>
                 </a:solidFill>
@@ -5970,7 +6590,7 @@
               <a:t>pwm</a:t>
             </a:r>
             <a:r>
-              <a:rPr lang="en-IN" sz="3600" dirty="0">
+              <a:rPr lang="en-IN" sz="2000" dirty="0">
                 <a:solidFill>
                   <a:schemeClr val="accent3"/>
                 </a:solidFill>
@@ -5979,10 +6599,22 @@
                 <a:cs typeface="Helvetica Neue"/>
                 <a:sym typeface="Helvetica Neue"/>
               </a:rPr>
-              <a:t> =  F</a:t>
+              <a:t> =  </a:t>
             </a:r>
             <a:r>
-              <a:rPr lang="en-IN" sz="3600" baseline="-25000" dirty="0">
+              <a:rPr lang="en-IN" sz="2000" dirty="0" err="1">
+                <a:solidFill>
+                  <a:schemeClr val="accent3"/>
+                </a:solidFill>
+                <a:latin typeface="Helvetica Neue"/>
+                <a:ea typeface="Helvetica Neue"/>
+                <a:cs typeface="Helvetica Neue"/>
+                <a:sym typeface="Helvetica Neue"/>
+              </a:rPr>
+              <a:t>F</a:t>
+            </a:r>
+            <a:r>
+              <a:rPr lang="en-IN" sz="2000" baseline="-25000" dirty="0" err="1">
                 <a:solidFill>
                   <a:schemeClr val="accent3"/>
                 </a:solidFill>
@@ -5994,7 +6626,7 @@
               <a:t>clk</a:t>
             </a:r>
             <a:r>
-              <a:rPr lang="en-IN" sz="3600" dirty="0">
+              <a:rPr lang="en-IN" sz="2000" dirty="0">
                 <a:solidFill>
                   <a:schemeClr val="accent3"/>
                 </a:solidFill>
@@ -6003,24 +6635,21 @@
                 <a:cs typeface="Helvetica Neue"/>
                 <a:sym typeface="Helvetica Neue"/>
               </a:rPr>
-              <a:t>/(N x 256)</a:t>
+              <a:t>/(N x 256); N= </a:t>
             </a:r>
-          </a:p>
-          <a:p>
-            <a:pPr marL="101600" lvl="0" indent="0" algn="l" rtl="0">
-              <a:spcBef>
-                <a:spcPts val="0"/>
-              </a:spcBef>
-              <a:spcAft>
-                <a:spcPts val="0"/>
-              </a:spcAft>
-              <a:buClr>
-                <a:schemeClr val="dk1"/>
-              </a:buClr>
-              <a:buSzPts val="2000"/>
-              <a:buNone/>
-            </a:pPr>
-            <a:endParaRPr lang="en-IN" sz="3600" dirty="0">
+            <a:r>
+              <a:rPr lang="en-IN" sz="2000" dirty="0" err="1">
+                <a:solidFill>
+                  <a:schemeClr val="accent3"/>
+                </a:solidFill>
+                <a:latin typeface="Helvetica Neue"/>
+                <a:ea typeface="Helvetica Neue"/>
+                <a:cs typeface="Helvetica Neue"/>
+                <a:sym typeface="Helvetica Neue"/>
+              </a:rPr>
+              <a:t>Prescalar</a:t>
+            </a:r>
+            <a:endParaRPr lang="en-IN" sz="2000" dirty="0">
               <a:solidFill>
                 <a:schemeClr val="accent3"/>
               </a:solidFill>
@@ -6031,21 +6660,204 @@
             </a:endParaRPr>
           </a:p>
           <a:p>
-            <a:pPr marL="101600" lvl="0" indent="0" algn="l" rtl="0">
-              <a:spcBef>
-                <a:spcPts val="0"/>
-              </a:spcBef>
-              <a:spcAft>
-                <a:spcPts val="0"/>
-              </a:spcAft>
-              <a:buClr>
-                <a:schemeClr val="dk1"/>
-              </a:buClr>
+            <a:pPr marL="101600" indent="0">
               <a:buSzPts val="2000"/>
+              <a:buNone/>
+            </a:pPr>
+            <a:endParaRPr sz="2000" dirty="0">
+              <a:solidFill>
+                <a:schemeClr val="accent3"/>
+              </a:solidFill>
+              <a:latin typeface="Helvetica Neue"/>
+              <a:ea typeface="Helvetica Neue"/>
+              <a:cs typeface="Helvetica Neue"/>
+              <a:sym typeface="Helvetica Neue"/>
+            </a:endParaRPr>
+          </a:p>
+        </p:txBody>
+      </p:sp>
+      <p:pic>
+        <p:nvPicPr>
+          <p:cNvPr id="3" name="Picture 2">
+            <a:extLst>
+              <a:ext uri="{FF2B5EF4-FFF2-40B4-BE49-F238E27FC236}">
+                <a16:creationId xmlns:a16="http://schemas.microsoft.com/office/drawing/2014/main" id="{FB83019C-ACF8-3F44-7281-A9CA1792F20E}"/>
+              </a:ext>
+            </a:extLst>
+          </p:cNvPr>
+          <p:cNvPicPr>
+            <a:picLocks noChangeAspect="1"/>
+          </p:cNvPicPr>
+          <p:nvPr/>
+        </p:nvPicPr>
+        <p:blipFill>
+          <a:blip r:embed="rId3"/>
+          <a:stretch>
+            <a:fillRect/>
+          </a:stretch>
+        </p:blipFill>
+        <p:spPr>
+          <a:xfrm>
+            <a:off x="3503511" y="1674068"/>
+            <a:ext cx="4294978" cy="3115290"/>
+          </a:xfrm>
+          <a:prstGeom prst="rect">
+            <a:avLst/>
+          </a:prstGeom>
+        </p:spPr>
+      </p:pic>
+    </p:spTree>
+    <p:extLst>
+      <p:ext uri="{BB962C8B-B14F-4D97-AF65-F5344CB8AC3E}">
+        <p14:creationId xmlns:p14="http://schemas.microsoft.com/office/powerpoint/2010/main" val="1542529864"/>
+      </p:ext>
+    </p:extLst>
+  </p:cSld>
+  <p:clrMapOvr>
+    <a:masterClrMapping/>
+  </p:clrMapOvr>
+</p:sld>
+</file>
+
+<file path=ppt/slides/slide5.xml><?xml version="1.0" encoding="utf-8"?>
+<p:sld xmlns:a="http://schemas.openxmlformats.org/drawingml/2006/main" xmlns:r="http://schemas.openxmlformats.org/officeDocument/2006/relationships" xmlns:p="http://schemas.openxmlformats.org/presentationml/2006/main">
+  <p:cSld>
+    <p:spTree>
+      <p:nvGrpSpPr>
+        <p:cNvPr id="1" name="Shape 53">
+          <a:extLst>
+            <a:ext uri="{FF2B5EF4-FFF2-40B4-BE49-F238E27FC236}">
+              <a16:creationId xmlns:a16="http://schemas.microsoft.com/office/drawing/2014/main" id="{CE173BAB-AE4F-5DD7-197D-2AA0A172EE92}"/>
+            </a:ext>
+          </a:extLst>
+        </p:cNvPr>
+        <p:cNvGrpSpPr/>
+        <p:nvPr/>
+      </p:nvGrpSpPr>
+      <p:grpSpPr>
+        <a:xfrm>
+          <a:off x="0" y="0"/>
+          <a:ext cx="0" cy="0"/>
+          <a:chOff x="0" y="0"/>
+          <a:chExt cx="0" cy="0"/>
+        </a:xfrm>
+      </p:grpSpPr>
+      <p:sp>
+        <p:nvSpPr>
+          <p:cNvPr id="54" name="Google Shape;54;p11">
+            <a:extLst>
+              <a:ext uri="{FF2B5EF4-FFF2-40B4-BE49-F238E27FC236}">
+                <a16:creationId xmlns:a16="http://schemas.microsoft.com/office/drawing/2014/main" id="{0E0B9E82-8A35-E70E-6693-3E87831442CA}"/>
+              </a:ext>
+            </a:extLst>
+          </p:cNvPr>
+          <p:cNvSpPr txBox="1">
+            <a:spLocks noGrp="1"/>
+          </p:cNvSpPr>
+          <p:nvPr>
+            <p:ph type="title"/>
+          </p:nvPr>
+        </p:nvSpPr>
+        <p:spPr>
+          <a:xfrm>
+            <a:off x="2530824" y="295015"/>
+            <a:ext cx="6503705" cy="572700"/>
+          </a:xfrm>
+          <a:prstGeom prst="rect">
+            <a:avLst/>
+          </a:prstGeom>
+        </p:spPr>
+        <p:txBody>
+          <a:bodyPr spcFirstLastPara="1" wrap="square" lIns="91425" tIns="91425" rIns="91425" bIns="91425" anchor="t" anchorCtr="0">
+            <a:normAutofit fontScale="90000"/>
+          </a:bodyPr>
+          <a:lstStyle/>
+          <a:p>
+            <a:pPr marL="0" lvl="0" indent="0" algn="ctr" rtl="0">
+              <a:lnSpc>
+                <a:spcPct val="115000"/>
+              </a:lnSpc>
+              <a:spcBef>
+                <a:spcPts val="0"/>
+              </a:spcBef>
+              <a:spcAft>
+                <a:spcPts val="0"/>
+              </a:spcAft>
               <a:buNone/>
             </a:pPr>
             <a:r>
-              <a:rPr lang="en-IN" sz="3600" dirty="0">
+              <a:rPr lang="en-IN" sz="3300" dirty="0">
+                <a:solidFill>
+                  <a:schemeClr val="dk1"/>
+                </a:solidFill>
+                <a:latin typeface="Helvetica Neue"/>
+                <a:ea typeface="Helvetica Neue"/>
+                <a:cs typeface="Helvetica Neue"/>
+                <a:sym typeface="Helvetica Neue"/>
+              </a:rPr>
+              <a:t>Phase Correct PWM</a:t>
+            </a:r>
+            <a:endParaRPr sz="3300" dirty="0">
+              <a:solidFill>
+                <a:schemeClr val="dk1"/>
+              </a:solidFill>
+              <a:latin typeface="Helvetica Neue"/>
+              <a:ea typeface="Helvetica Neue"/>
+              <a:cs typeface="Helvetica Neue"/>
+              <a:sym typeface="Helvetica Neue"/>
+            </a:endParaRPr>
+          </a:p>
+          <a:p>
+            <a:pPr marL="0" lvl="0" indent="0" algn="l" rtl="0">
+              <a:spcBef>
+                <a:spcPts val="0"/>
+              </a:spcBef>
+              <a:spcAft>
+                <a:spcPts val="0"/>
+              </a:spcAft>
+              <a:buNone/>
+            </a:pPr>
+            <a:endParaRPr dirty="0"/>
+          </a:p>
+        </p:txBody>
+      </p:sp>
+      <p:sp>
+        <p:nvSpPr>
+          <p:cNvPr id="55" name="Google Shape;55;p11">
+            <a:extLst>
+              <a:ext uri="{FF2B5EF4-FFF2-40B4-BE49-F238E27FC236}">
+                <a16:creationId xmlns:a16="http://schemas.microsoft.com/office/drawing/2014/main" id="{EB88BF98-861C-8470-0E43-431DC38938BE}"/>
+              </a:ext>
+            </a:extLst>
+          </p:cNvPr>
+          <p:cNvSpPr txBox="1">
+            <a:spLocks noGrp="1"/>
+          </p:cNvSpPr>
+          <p:nvPr>
+            <p:ph type="body" idx="1"/>
+          </p:nvPr>
+        </p:nvSpPr>
+        <p:spPr>
+          <a:xfrm>
+            <a:off x="2698250" y="1152474"/>
+            <a:ext cx="5905500" cy="3123311"/>
+          </a:xfrm>
+          <a:prstGeom prst="rect">
+            <a:avLst/>
+          </a:prstGeom>
+        </p:spPr>
+        <p:txBody>
+          <a:bodyPr spcFirstLastPara="1" wrap="square" lIns="91425" tIns="91425" rIns="91425" bIns="91425" anchor="t" anchorCtr="0">
+            <a:normAutofit/>
+          </a:bodyPr>
+          <a:lstStyle/>
+          <a:p>
+            <a:pPr marL="101600" indent="0">
+              <a:buSzPts val="2000"/>
+              <a:buNone/>
+            </a:pPr>
+            <a:r>
+              <a:rPr lang="en-IN" sz="2000" dirty="0" err="1">
                 <a:solidFill>
                   <a:schemeClr val="accent3"/>
                 </a:solidFill>
@@ -6054,10 +6866,70 @@
                 <a:cs typeface="Helvetica Neue"/>
                 <a:sym typeface="Helvetica Neue"/>
               </a:rPr>
-              <a:t>N= </a:t>
+              <a:t>F</a:t>
             </a:r>
             <a:r>
-              <a:rPr lang="en-IN" sz="3600" dirty="0" err="1">
+              <a:rPr lang="en-IN" sz="2000" baseline="-25000" dirty="0" err="1">
+                <a:solidFill>
+                  <a:schemeClr val="accent3"/>
+                </a:solidFill>
+                <a:latin typeface="Helvetica Neue"/>
+                <a:ea typeface="Helvetica Neue"/>
+                <a:cs typeface="Helvetica Neue"/>
+                <a:sym typeface="Helvetica Neue"/>
+              </a:rPr>
+              <a:t>pwm</a:t>
+            </a:r>
+            <a:r>
+              <a:rPr lang="en-IN" sz="2000" dirty="0">
+                <a:solidFill>
+                  <a:schemeClr val="accent3"/>
+                </a:solidFill>
+                <a:latin typeface="Helvetica Neue"/>
+                <a:ea typeface="Helvetica Neue"/>
+                <a:cs typeface="Helvetica Neue"/>
+                <a:sym typeface="Helvetica Neue"/>
+              </a:rPr>
+              <a:t> =  </a:t>
+            </a:r>
+            <a:r>
+              <a:rPr lang="en-IN" sz="2000" dirty="0" err="1">
+                <a:solidFill>
+                  <a:schemeClr val="accent3"/>
+                </a:solidFill>
+                <a:latin typeface="Helvetica Neue"/>
+                <a:ea typeface="Helvetica Neue"/>
+                <a:cs typeface="Helvetica Neue"/>
+                <a:sym typeface="Helvetica Neue"/>
+              </a:rPr>
+              <a:t>F</a:t>
+            </a:r>
+            <a:r>
+              <a:rPr lang="en-IN" sz="2000" baseline="-25000" dirty="0" err="1">
+                <a:solidFill>
+                  <a:schemeClr val="accent3"/>
+                </a:solidFill>
+                <a:latin typeface="Helvetica Neue"/>
+                <a:ea typeface="Helvetica Neue"/>
+                <a:cs typeface="Helvetica Neue"/>
+                <a:sym typeface="Helvetica Neue"/>
+              </a:rPr>
+              <a:t>clk</a:t>
+            </a:r>
+            <a:r>
+              <a:rPr lang="en-IN" sz="2000" dirty="0">
+                <a:solidFill>
+                  <a:schemeClr val="accent3"/>
+                </a:solidFill>
+                <a:latin typeface="Helvetica Neue"/>
+                <a:ea typeface="Helvetica Neue"/>
+                <a:cs typeface="Helvetica Neue"/>
+                <a:sym typeface="Helvetica Neue"/>
+              </a:rPr>
+              <a:t>/(2xN x 256) ; N = </a:t>
+            </a:r>
+            <a:r>
+              <a:rPr lang="en-IN" sz="2000" dirty="0" err="1">
                 <a:solidFill>
                   <a:schemeClr val="accent3"/>
                 </a:solidFill>
@@ -6068,7 +6940,1626 @@
               </a:rPr>
               <a:t>Prescalar</a:t>
             </a:r>
-            <a:endParaRPr sz="3600" dirty="0">
+            <a:endParaRPr lang="en-IN" sz="2000" dirty="0">
+              <a:solidFill>
+                <a:schemeClr val="accent3"/>
+              </a:solidFill>
+              <a:latin typeface="Helvetica Neue"/>
+              <a:ea typeface="Helvetica Neue"/>
+              <a:cs typeface="Helvetica Neue"/>
+              <a:sym typeface="Helvetica Neue"/>
+            </a:endParaRPr>
+          </a:p>
+          <a:p>
+            <a:pPr marL="101600" indent="0">
+              <a:buSzPts val="2000"/>
+              <a:buNone/>
+            </a:pPr>
+            <a:endParaRPr sz="2000" dirty="0">
+              <a:solidFill>
+                <a:schemeClr val="accent3"/>
+              </a:solidFill>
+              <a:latin typeface="Helvetica Neue"/>
+              <a:ea typeface="Helvetica Neue"/>
+              <a:cs typeface="Helvetica Neue"/>
+              <a:sym typeface="Helvetica Neue"/>
+            </a:endParaRPr>
+          </a:p>
+        </p:txBody>
+      </p:sp>
+      <p:pic>
+        <p:nvPicPr>
+          <p:cNvPr id="6" name="Picture 5">
+            <a:extLst>
+              <a:ext uri="{FF2B5EF4-FFF2-40B4-BE49-F238E27FC236}">
+                <a16:creationId xmlns:a16="http://schemas.microsoft.com/office/drawing/2014/main" id="{68C82DA3-DF1D-05D6-0D17-121E490BCB9B}"/>
+              </a:ext>
+            </a:extLst>
+          </p:cNvPr>
+          <p:cNvPicPr>
+            <a:picLocks noChangeAspect="1"/>
+          </p:cNvPicPr>
+          <p:nvPr/>
+        </p:nvPicPr>
+        <p:blipFill>
+          <a:blip r:embed="rId3"/>
+          <a:stretch>
+            <a:fillRect/>
+          </a:stretch>
+        </p:blipFill>
+        <p:spPr>
+          <a:xfrm>
+            <a:off x="3183669" y="1766604"/>
+            <a:ext cx="5198014" cy="3195816"/>
+          </a:xfrm>
+          <a:prstGeom prst="rect">
+            <a:avLst/>
+          </a:prstGeom>
+        </p:spPr>
+      </p:pic>
+    </p:spTree>
+    <p:extLst>
+      <p:ext uri="{BB962C8B-B14F-4D97-AF65-F5344CB8AC3E}">
+        <p14:creationId xmlns:p14="http://schemas.microsoft.com/office/powerpoint/2010/main" val="988321391"/>
+      </p:ext>
+    </p:extLst>
+  </p:cSld>
+  <p:clrMapOvr>
+    <a:masterClrMapping/>
+  </p:clrMapOvr>
+</p:sld>
+</file>
+
+<file path=ppt/slides/slide6.xml><?xml version="1.0" encoding="utf-8"?>
+<p:sld xmlns:a="http://schemas.openxmlformats.org/drawingml/2006/main" xmlns:r="http://schemas.openxmlformats.org/officeDocument/2006/relationships" xmlns:p="http://schemas.openxmlformats.org/presentationml/2006/main">
+  <p:cSld>
+    <p:spTree>
+      <p:nvGrpSpPr>
+        <p:cNvPr id="1" name="Shape 53">
+          <a:extLst>
+            <a:ext uri="{FF2B5EF4-FFF2-40B4-BE49-F238E27FC236}">
+              <a16:creationId xmlns:a16="http://schemas.microsoft.com/office/drawing/2014/main" id="{64585B45-8E10-53C2-CA4C-164CEC426802}"/>
+            </a:ext>
+          </a:extLst>
+        </p:cNvPr>
+        <p:cNvGrpSpPr/>
+        <p:nvPr/>
+      </p:nvGrpSpPr>
+      <p:grpSpPr>
+        <a:xfrm>
+          <a:off x="0" y="0"/>
+          <a:ext cx="0" cy="0"/>
+          <a:chOff x="0" y="0"/>
+          <a:chExt cx="0" cy="0"/>
+        </a:xfrm>
+      </p:grpSpPr>
+      <p:sp>
+        <p:nvSpPr>
+          <p:cNvPr id="54" name="Google Shape;54;p11">
+            <a:extLst>
+              <a:ext uri="{FF2B5EF4-FFF2-40B4-BE49-F238E27FC236}">
+                <a16:creationId xmlns:a16="http://schemas.microsoft.com/office/drawing/2014/main" id="{B99B92AD-4783-9494-3A62-3B2D9861BB69}"/>
+              </a:ext>
+            </a:extLst>
+          </p:cNvPr>
+          <p:cNvSpPr txBox="1">
+            <a:spLocks noGrp="1"/>
+          </p:cNvSpPr>
+          <p:nvPr>
+            <p:ph type="title"/>
+          </p:nvPr>
+        </p:nvSpPr>
+        <p:spPr>
+          <a:xfrm>
+            <a:off x="2698250" y="367100"/>
+            <a:ext cx="5905500" cy="1087050"/>
+          </a:xfrm>
+          <a:prstGeom prst="rect">
+            <a:avLst/>
+          </a:prstGeom>
+        </p:spPr>
+        <p:txBody>
+          <a:bodyPr spcFirstLastPara="1" wrap="square" lIns="91425" tIns="91425" rIns="91425" bIns="91425" anchor="t" anchorCtr="0">
+            <a:normAutofit fontScale="90000"/>
+          </a:bodyPr>
+          <a:lstStyle/>
+          <a:p>
+            <a:pPr marL="0" lvl="0" indent="0" algn="ctr" rtl="0">
+              <a:lnSpc>
+                <a:spcPct val="115000"/>
+              </a:lnSpc>
+              <a:spcBef>
+                <a:spcPts val="0"/>
+              </a:spcBef>
+              <a:spcAft>
+                <a:spcPts val="0"/>
+              </a:spcAft>
+              <a:buNone/>
+            </a:pPr>
+            <a:r>
+              <a:rPr lang="en-IN" sz="3300" dirty="0">
+                <a:solidFill>
+                  <a:schemeClr val="dk1"/>
+                </a:solidFill>
+                <a:latin typeface="Helvetica Neue"/>
+                <a:ea typeface="Helvetica Neue"/>
+                <a:cs typeface="Helvetica Neue"/>
+                <a:sym typeface="Helvetica Neue"/>
+              </a:rPr>
+              <a:t>Inverting and Noninverting PWM</a:t>
+            </a:r>
+            <a:endParaRPr sz="3300" dirty="0">
+              <a:solidFill>
+                <a:schemeClr val="dk1"/>
+              </a:solidFill>
+              <a:latin typeface="Helvetica Neue"/>
+              <a:ea typeface="Helvetica Neue"/>
+              <a:cs typeface="Helvetica Neue"/>
+              <a:sym typeface="Helvetica Neue"/>
+            </a:endParaRPr>
+          </a:p>
+          <a:p>
+            <a:pPr marL="0" lvl="0" indent="0" algn="l" rtl="0">
+              <a:spcBef>
+                <a:spcPts val="0"/>
+              </a:spcBef>
+              <a:spcAft>
+                <a:spcPts val="0"/>
+              </a:spcAft>
+              <a:buNone/>
+            </a:pPr>
+            <a:endParaRPr dirty="0"/>
+          </a:p>
+        </p:txBody>
+      </p:sp>
+      <p:graphicFrame>
+        <p:nvGraphicFramePr>
+          <p:cNvPr id="4" name="Table 3">
+            <a:extLst>
+              <a:ext uri="{FF2B5EF4-FFF2-40B4-BE49-F238E27FC236}">
+                <a16:creationId xmlns:a16="http://schemas.microsoft.com/office/drawing/2014/main" id="{AA0C860D-DD57-0428-CC84-A022984C5D96}"/>
+              </a:ext>
+            </a:extLst>
+          </p:cNvPr>
+          <p:cNvGraphicFramePr>
+            <a:graphicFrameLocks noGrp="1"/>
+          </p:cNvGraphicFramePr>
+          <p:nvPr>
+            <p:extLst>
+              <p:ext uri="{D42A27DB-BD31-4B8C-83A1-F6EECF244321}">
+                <p14:modId xmlns:p14="http://schemas.microsoft.com/office/powerpoint/2010/main" val="1242864013"/>
+              </p:ext>
+            </p:extLst>
+          </p:nvPr>
+        </p:nvGraphicFramePr>
+        <p:xfrm>
+          <a:off x="2962767" y="1802323"/>
+          <a:ext cx="5563048" cy="2295326"/>
+        </p:xfrm>
+        <a:graphic>
+          <a:graphicData uri="http://schemas.openxmlformats.org/drawingml/2006/table">
+            <a:tbl>
+              <a:tblPr/>
+              <a:tblGrid>
+                <a:gridCol w="1036123">
+                  <a:extLst>
+                    <a:ext uri="{9D8B030D-6E8A-4147-A177-3AD203B41FA5}">
+                      <a16:colId xmlns:a16="http://schemas.microsoft.com/office/drawing/2014/main" val="2871847296"/>
+                    </a:ext>
+                  </a:extLst>
+                </a:gridCol>
+                <a:gridCol w="1275008">
+                  <a:extLst>
+                    <a:ext uri="{9D8B030D-6E8A-4147-A177-3AD203B41FA5}">
+                      <a16:colId xmlns:a16="http://schemas.microsoft.com/office/drawing/2014/main" val="252607999"/>
+                    </a:ext>
+                  </a:extLst>
+                </a:gridCol>
+                <a:gridCol w="1120462">
+                  <a:extLst>
+                    <a:ext uri="{9D8B030D-6E8A-4147-A177-3AD203B41FA5}">
+                      <a16:colId xmlns:a16="http://schemas.microsoft.com/office/drawing/2014/main" val="87382814"/>
+                    </a:ext>
+                  </a:extLst>
+                </a:gridCol>
+                <a:gridCol w="2131455">
+                  <a:extLst>
+                    <a:ext uri="{9D8B030D-6E8A-4147-A177-3AD203B41FA5}">
+                      <a16:colId xmlns:a16="http://schemas.microsoft.com/office/drawing/2014/main" val="4249406453"/>
+                    </a:ext>
+                  </a:extLst>
+                </a:gridCol>
+              </a:tblGrid>
+              <a:tr h="259343">
+                <a:tc>
+                  <a:txBody>
+                    <a:bodyPr/>
+                    <a:lstStyle/>
+                    <a:p>
+                      <a:pPr>
+                        <a:buNone/>
+                      </a:pPr>
+                      <a:r>
+                        <a:rPr lang="en-IN"/>
+                        <a:t>Mode</a:t>
+                      </a:r>
+                    </a:p>
+                  </a:txBody>
+                  <a:tcPr anchor="ctr">
+                    <a:lnL w="12700" cap="flat" cmpd="sng" algn="ctr">
+                      <a:solidFill>
+                        <a:schemeClr val="tx1"/>
+                      </a:solidFill>
+                      <a:prstDash val="solid"/>
+                      <a:round/>
+                      <a:headEnd type="none" w="med" len="med"/>
+                      <a:tailEnd type="none" w="med" len="med"/>
+                    </a:lnL>
+                    <a:lnR w="12700" cap="flat" cmpd="sng" algn="ctr">
+                      <a:solidFill>
+                        <a:schemeClr val="tx1"/>
+                      </a:solidFill>
+                      <a:prstDash val="solid"/>
+                      <a:round/>
+                      <a:headEnd type="none" w="med" len="med"/>
+                      <a:tailEnd type="none" w="med" len="med"/>
+                    </a:lnR>
+                    <a:lnT w="12700" cap="flat" cmpd="sng" algn="ctr">
+                      <a:solidFill>
+                        <a:schemeClr val="tx1"/>
+                      </a:solidFill>
+                      <a:prstDash val="solid"/>
+                      <a:round/>
+                      <a:headEnd type="none" w="med" len="med"/>
+                      <a:tailEnd type="none" w="med" len="med"/>
+                    </a:lnT>
+                    <a:lnB w="12700" cap="flat" cmpd="sng" algn="ctr">
+                      <a:solidFill>
+                        <a:schemeClr val="tx1"/>
+                      </a:solidFill>
+                      <a:prstDash val="solid"/>
+                      <a:round/>
+                      <a:headEnd type="none" w="med" len="med"/>
+                      <a:tailEnd type="none" w="med" len="med"/>
+                    </a:lnB>
+                    <a:noFill/>
+                  </a:tcPr>
+                </a:tc>
+                <a:tc>
+                  <a:txBody>
+                    <a:bodyPr/>
+                    <a:lstStyle/>
+                    <a:p>
+                      <a:pPr>
+                        <a:buNone/>
+                      </a:pPr>
+                      <a:r>
+                        <a:rPr lang="en-IN"/>
+                        <a:t>COM1</a:t>
+                      </a:r>
+                    </a:p>
+                  </a:txBody>
+                  <a:tcPr anchor="ctr">
+                    <a:lnL w="12700" cap="flat" cmpd="sng" algn="ctr">
+                      <a:solidFill>
+                        <a:schemeClr val="tx1"/>
+                      </a:solidFill>
+                      <a:prstDash val="solid"/>
+                      <a:round/>
+                      <a:headEnd type="none" w="med" len="med"/>
+                      <a:tailEnd type="none" w="med" len="med"/>
+                    </a:lnL>
+                    <a:lnR w="12700" cap="flat" cmpd="sng" algn="ctr">
+                      <a:solidFill>
+                        <a:schemeClr val="tx1"/>
+                      </a:solidFill>
+                      <a:prstDash val="solid"/>
+                      <a:round/>
+                      <a:headEnd type="none" w="med" len="med"/>
+                      <a:tailEnd type="none" w="med" len="med"/>
+                    </a:lnR>
+                    <a:lnT w="12700" cap="flat" cmpd="sng" algn="ctr">
+                      <a:solidFill>
+                        <a:schemeClr val="tx1"/>
+                      </a:solidFill>
+                      <a:prstDash val="solid"/>
+                      <a:round/>
+                      <a:headEnd type="none" w="med" len="med"/>
+                      <a:tailEnd type="none" w="med" len="med"/>
+                    </a:lnT>
+                    <a:lnB w="12700" cap="flat" cmpd="sng" algn="ctr">
+                      <a:solidFill>
+                        <a:schemeClr val="tx1"/>
+                      </a:solidFill>
+                      <a:prstDash val="solid"/>
+                      <a:round/>
+                      <a:headEnd type="none" w="med" len="med"/>
+                      <a:tailEnd type="none" w="med" len="med"/>
+                    </a:lnB>
+                    <a:noFill/>
+                  </a:tcPr>
+                </a:tc>
+                <a:tc>
+                  <a:txBody>
+                    <a:bodyPr/>
+                    <a:lstStyle/>
+                    <a:p>
+                      <a:pPr>
+                        <a:buNone/>
+                      </a:pPr>
+                      <a:r>
+                        <a:rPr lang="en-IN"/>
+                        <a:t>COM0</a:t>
+                      </a:r>
+                    </a:p>
+                  </a:txBody>
+                  <a:tcPr anchor="ctr">
+                    <a:lnL w="12700" cap="flat" cmpd="sng" algn="ctr">
+                      <a:solidFill>
+                        <a:schemeClr val="tx1"/>
+                      </a:solidFill>
+                      <a:prstDash val="solid"/>
+                      <a:round/>
+                      <a:headEnd type="none" w="med" len="med"/>
+                      <a:tailEnd type="none" w="med" len="med"/>
+                    </a:lnL>
+                    <a:lnR w="12700" cap="flat" cmpd="sng" algn="ctr">
+                      <a:solidFill>
+                        <a:schemeClr val="tx1"/>
+                      </a:solidFill>
+                      <a:prstDash val="solid"/>
+                      <a:round/>
+                      <a:headEnd type="none" w="med" len="med"/>
+                      <a:tailEnd type="none" w="med" len="med"/>
+                    </a:lnR>
+                    <a:lnT w="12700" cap="flat" cmpd="sng" algn="ctr">
+                      <a:solidFill>
+                        <a:schemeClr val="tx1"/>
+                      </a:solidFill>
+                      <a:prstDash val="solid"/>
+                      <a:round/>
+                      <a:headEnd type="none" w="med" len="med"/>
+                      <a:tailEnd type="none" w="med" len="med"/>
+                    </a:lnT>
+                    <a:lnB w="12700" cap="flat" cmpd="sng" algn="ctr">
+                      <a:solidFill>
+                        <a:schemeClr val="tx1"/>
+                      </a:solidFill>
+                      <a:prstDash val="solid"/>
+                      <a:round/>
+                      <a:headEnd type="none" w="med" len="med"/>
+                      <a:tailEnd type="none" w="med" len="med"/>
+                    </a:lnB>
+                    <a:noFill/>
+                  </a:tcPr>
+                </a:tc>
+                <a:tc>
+                  <a:txBody>
+                    <a:bodyPr/>
+                    <a:lstStyle/>
+                    <a:p>
+                      <a:pPr>
+                        <a:buNone/>
+                      </a:pPr>
+                      <a:r>
+                        <a:rPr lang="en-IN"/>
+                        <a:t>Meaning</a:t>
+                      </a:r>
+                    </a:p>
+                  </a:txBody>
+                  <a:tcPr anchor="ctr">
+                    <a:lnL w="12700" cap="flat" cmpd="sng" algn="ctr">
+                      <a:solidFill>
+                        <a:schemeClr val="tx1"/>
+                      </a:solidFill>
+                      <a:prstDash val="solid"/>
+                      <a:round/>
+                      <a:headEnd type="none" w="med" len="med"/>
+                      <a:tailEnd type="none" w="med" len="med"/>
+                    </a:lnL>
+                    <a:lnR w="12700" cap="flat" cmpd="sng" algn="ctr">
+                      <a:solidFill>
+                        <a:schemeClr val="tx1"/>
+                      </a:solidFill>
+                      <a:prstDash val="solid"/>
+                      <a:round/>
+                      <a:headEnd type="none" w="med" len="med"/>
+                      <a:tailEnd type="none" w="med" len="med"/>
+                    </a:lnR>
+                    <a:lnT w="12700" cap="flat" cmpd="sng" algn="ctr">
+                      <a:solidFill>
+                        <a:schemeClr val="tx1"/>
+                      </a:solidFill>
+                      <a:prstDash val="solid"/>
+                      <a:round/>
+                      <a:headEnd type="none" w="med" len="med"/>
+                      <a:tailEnd type="none" w="med" len="med"/>
+                    </a:lnT>
+                    <a:lnB w="12700" cap="flat" cmpd="sng" algn="ctr">
+                      <a:solidFill>
+                        <a:schemeClr val="tx1"/>
+                      </a:solidFill>
+                      <a:prstDash val="solid"/>
+                      <a:round/>
+                      <a:headEnd type="none" w="med" len="med"/>
+                      <a:tailEnd type="none" w="med" len="med"/>
+                    </a:lnB>
+                    <a:noFill/>
+                  </a:tcPr>
+                </a:tc>
+                <a:extLst>
+                  <a:ext uri="{0D108BD9-81ED-4DB2-BD59-A6C34878D82A}">
+                    <a16:rowId xmlns:a16="http://schemas.microsoft.com/office/drawing/2014/main" val="1467687165"/>
+                  </a:ext>
+                </a:extLst>
+              </a:tr>
+              <a:tr h="622422">
+                <a:tc>
+                  <a:txBody>
+                    <a:bodyPr/>
+                    <a:lstStyle/>
+                    <a:p>
+                      <a:pPr>
+                        <a:buNone/>
+                      </a:pPr>
+                      <a:r>
+                        <a:rPr lang="en-IN"/>
+                        <a:t>00</a:t>
+                      </a:r>
+                    </a:p>
+                  </a:txBody>
+                  <a:tcPr anchor="ctr">
+                    <a:lnL w="12700" cap="flat" cmpd="sng" algn="ctr">
+                      <a:solidFill>
+                        <a:schemeClr val="tx1"/>
+                      </a:solidFill>
+                      <a:prstDash val="solid"/>
+                      <a:round/>
+                      <a:headEnd type="none" w="med" len="med"/>
+                      <a:tailEnd type="none" w="med" len="med"/>
+                    </a:lnL>
+                    <a:lnR w="12700" cap="flat" cmpd="sng" algn="ctr">
+                      <a:solidFill>
+                        <a:schemeClr val="tx1"/>
+                      </a:solidFill>
+                      <a:prstDash val="solid"/>
+                      <a:round/>
+                      <a:headEnd type="none" w="med" len="med"/>
+                      <a:tailEnd type="none" w="med" len="med"/>
+                    </a:lnR>
+                    <a:lnT w="12700" cap="flat" cmpd="sng" algn="ctr">
+                      <a:solidFill>
+                        <a:schemeClr val="tx1"/>
+                      </a:solidFill>
+                      <a:prstDash val="solid"/>
+                      <a:round/>
+                      <a:headEnd type="none" w="med" len="med"/>
+                      <a:tailEnd type="none" w="med" len="med"/>
+                    </a:lnT>
+                    <a:lnB w="12700" cap="flat" cmpd="sng" algn="ctr">
+                      <a:solidFill>
+                        <a:schemeClr val="tx1"/>
+                      </a:solidFill>
+                      <a:prstDash val="solid"/>
+                      <a:round/>
+                      <a:headEnd type="none" w="med" len="med"/>
+                      <a:tailEnd type="none" w="med" len="med"/>
+                    </a:lnB>
+                    <a:noFill/>
+                  </a:tcPr>
+                </a:tc>
+                <a:tc>
+                  <a:txBody>
+                    <a:bodyPr/>
+                    <a:lstStyle/>
+                    <a:p>
+                      <a:pPr>
+                        <a:buNone/>
+                      </a:pPr>
+                      <a:r>
+                        <a:rPr lang="en-IN"/>
+                        <a:t>0</a:t>
+                      </a:r>
+                    </a:p>
+                  </a:txBody>
+                  <a:tcPr anchor="ctr">
+                    <a:lnL w="12700" cap="flat" cmpd="sng" algn="ctr">
+                      <a:solidFill>
+                        <a:schemeClr val="tx1"/>
+                      </a:solidFill>
+                      <a:prstDash val="solid"/>
+                      <a:round/>
+                      <a:headEnd type="none" w="med" len="med"/>
+                      <a:tailEnd type="none" w="med" len="med"/>
+                    </a:lnL>
+                    <a:lnR w="12700" cap="flat" cmpd="sng" algn="ctr">
+                      <a:solidFill>
+                        <a:schemeClr val="tx1"/>
+                      </a:solidFill>
+                      <a:prstDash val="solid"/>
+                      <a:round/>
+                      <a:headEnd type="none" w="med" len="med"/>
+                      <a:tailEnd type="none" w="med" len="med"/>
+                    </a:lnR>
+                    <a:lnT w="12700" cap="flat" cmpd="sng" algn="ctr">
+                      <a:solidFill>
+                        <a:schemeClr val="tx1"/>
+                      </a:solidFill>
+                      <a:prstDash val="solid"/>
+                      <a:round/>
+                      <a:headEnd type="none" w="med" len="med"/>
+                      <a:tailEnd type="none" w="med" len="med"/>
+                    </a:lnT>
+                    <a:lnB w="12700" cap="flat" cmpd="sng" algn="ctr">
+                      <a:solidFill>
+                        <a:schemeClr val="tx1"/>
+                      </a:solidFill>
+                      <a:prstDash val="solid"/>
+                      <a:round/>
+                      <a:headEnd type="none" w="med" len="med"/>
+                      <a:tailEnd type="none" w="med" len="med"/>
+                    </a:lnB>
+                    <a:noFill/>
+                  </a:tcPr>
+                </a:tc>
+                <a:tc>
+                  <a:txBody>
+                    <a:bodyPr/>
+                    <a:lstStyle/>
+                    <a:p>
+                      <a:pPr>
+                        <a:buNone/>
+                      </a:pPr>
+                      <a:r>
+                        <a:rPr lang="en-IN" dirty="0"/>
+                        <a:t>0</a:t>
+                      </a:r>
+                    </a:p>
+                  </a:txBody>
+                  <a:tcPr anchor="ctr">
+                    <a:lnL w="12700" cap="flat" cmpd="sng" algn="ctr">
+                      <a:solidFill>
+                        <a:schemeClr val="tx1"/>
+                      </a:solidFill>
+                      <a:prstDash val="solid"/>
+                      <a:round/>
+                      <a:headEnd type="none" w="med" len="med"/>
+                      <a:tailEnd type="none" w="med" len="med"/>
+                    </a:lnL>
+                    <a:lnR w="12700" cap="flat" cmpd="sng" algn="ctr">
+                      <a:solidFill>
+                        <a:schemeClr val="tx1"/>
+                      </a:solidFill>
+                      <a:prstDash val="solid"/>
+                      <a:round/>
+                      <a:headEnd type="none" w="med" len="med"/>
+                      <a:tailEnd type="none" w="med" len="med"/>
+                    </a:lnR>
+                    <a:lnT w="12700" cap="flat" cmpd="sng" algn="ctr">
+                      <a:solidFill>
+                        <a:schemeClr val="tx1"/>
+                      </a:solidFill>
+                      <a:prstDash val="solid"/>
+                      <a:round/>
+                      <a:headEnd type="none" w="med" len="med"/>
+                      <a:tailEnd type="none" w="med" len="med"/>
+                    </a:lnT>
+                    <a:lnB w="12700" cap="flat" cmpd="sng" algn="ctr">
+                      <a:solidFill>
+                        <a:schemeClr val="tx1"/>
+                      </a:solidFill>
+                      <a:prstDash val="solid"/>
+                      <a:round/>
+                      <a:headEnd type="none" w="med" len="med"/>
+                      <a:tailEnd type="none" w="med" len="med"/>
+                    </a:lnB>
+                    <a:noFill/>
+                  </a:tcPr>
+                </a:tc>
+                <a:tc>
+                  <a:txBody>
+                    <a:bodyPr/>
+                    <a:lstStyle/>
+                    <a:p>
+                      <a:pPr>
+                        <a:buNone/>
+                      </a:pPr>
+                      <a:r>
+                        <a:rPr lang="en-IN"/>
+                        <a:t>Normal port operation (no PWM)</a:t>
+                      </a:r>
+                    </a:p>
+                  </a:txBody>
+                  <a:tcPr anchor="ctr">
+                    <a:lnL w="12700" cap="flat" cmpd="sng" algn="ctr">
+                      <a:solidFill>
+                        <a:schemeClr val="tx1"/>
+                      </a:solidFill>
+                      <a:prstDash val="solid"/>
+                      <a:round/>
+                      <a:headEnd type="none" w="med" len="med"/>
+                      <a:tailEnd type="none" w="med" len="med"/>
+                    </a:lnL>
+                    <a:lnR w="12700" cap="flat" cmpd="sng" algn="ctr">
+                      <a:solidFill>
+                        <a:schemeClr val="tx1"/>
+                      </a:solidFill>
+                      <a:prstDash val="solid"/>
+                      <a:round/>
+                      <a:headEnd type="none" w="med" len="med"/>
+                      <a:tailEnd type="none" w="med" len="med"/>
+                    </a:lnR>
+                    <a:lnT w="12700" cap="flat" cmpd="sng" algn="ctr">
+                      <a:solidFill>
+                        <a:schemeClr val="tx1"/>
+                      </a:solidFill>
+                      <a:prstDash val="solid"/>
+                      <a:round/>
+                      <a:headEnd type="none" w="med" len="med"/>
+                      <a:tailEnd type="none" w="med" len="med"/>
+                    </a:lnT>
+                    <a:lnB w="12700" cap="flat" cmpd="sng" algn="ctr">
+                      <a:solidFill>
+                        <a:schemeClr val="tx1"/>
+                      </a:solidFill>
+                      <a:prstDash val="solid"/>
+                      <a:round/>
+                      <a:headEnd type="none" w="med" len="med"/>
+                      <a:tailEnd type="none" w="med" len="med"/>
+                    </a:lnB>
+                    <a:noFill/>
+                  </a:tcPr>
+                </a:tc>
+                <a:extLst>
+                  <a:ext uri="{0D108BD9-81ED-4DB2-BD59-A6C34878D82A}">
+                    <a16:rowId xmlns:a16="http://schemas.microsoft.com/office/drawing/2014/main" val="1657688366"/>
+                  </a:ext>
+                </a:extLst>
+              </a:tr>
+              <a:tr h="622422">
+                <a:tc>
+                  <a:txBody>
+                    <a:bodyPr/>
+                    <a:lstStyle/>
+                    <a:p>
+                      <a:pPr>
+                        <a:buNone/>
+                      </a:pPr>
+                      <a:r>
+                        <a:rPr lang="en-IN"/>
+                        <a:t>01</a:t>
+                      </a:r>
+                    </a:p>
+                  </a:txBody>
+                  <a:tcPr anchor="ctr">
+                    <a:lnL w="12700" cap="flat" cmpd="sng" algn="ctr">
+                      <a:solidFill>
+                        <a:schemeClr val="tx1"/>
+                      </a:solidFill>
+                      <a:prstDash val="solid"/>
+                      <a:round/>
+                      <a:headEnd type="none" w="med" len="med"/>
+                      <a:tailEnd type="none" w="med" len="med"/>
+                    </a:lnL>
+                    <a:lnR w="12700" cap="flat" cmpd="sng" algn="ctr">
+                      <a:solidFill>
+                        <a:schemeClr val="tx1"/>
+                      </a:solidFill>
+                      <a:prstDash val="solid"/>
+                      <a:round/>
+                      <a:headEnd type="none" w="med" len="med"/>
+                      <a:tailEnd type="none" w="med" len="med"/>
+                    </a:lnR>
+                    <a:lnT w="12700" cap="flat" cmpd="sng" algn="ctr">
+                      <a:solidFill>
+                        <a:schemeClr val="tx1"/>
+                      </a:solidFill>
+                      <a:prstDash val="solid"/>
+                      <a:round/>
+                      <a:headEnd type="none" w="med" len="med"/>
+                      <a:tailEnd type="none" w="med" len="med"/>
+                    </a:lnT>
+                    <a:lnB w="12700" cap="flat" cmpd="sng" algn="ctr">
+                      <a:solidFill>
+                        <a:schemeClr val="tx1"/>
+                      </a:solidFill>
+                      <a:prstDash val="solid"/>
+                      <a:round/>
+                      <a:headEnd type="none" w="med" len="med"/>
+                      <a:tailEnd type="none" w="med" len="med"/>
+                    </a:lnB>
+                    <a:noFill/>
+                  </a:tcPr>
+                </a:tc>
+                <a:tc>
+                  <a:txBody>
+                    <a:bodyPr/>
+                    <a:lstStyle/>
+                    <a:p>
+                      <a:pPr>
+                        <a:buNone/>
+                      </a:pPr>
+                      <a:r>
+                        <a:rPr lang="en-IN"/>
+                        <a:t>0</a:t>
+                      </a:r>
+                    </a:p>
+                  </a:txBody>
+                  <a:tcPr anchor="ctr">
+                    <a:lnL w="12700" cap="flat" cmpd="sng" algn="ctr">
+                      <a:solidFill>
+                        <a:schemeClr val="tx1"/>
+                      </a:solidFill>
+                      <a:prstDash val="solid"/>
+                      <a:round/>
+                      <a:headEnd type="none" w="med" len="med"/>
+                      <a:tailEnd type="none" w="med" len="med"/>
+                    </a:lnL>
+                    <a:lnR w="12700" cap="flat" cmpd="sng" algn="ctr">
+                      <a:solidFill>
+                        <a:schemeClr val="tx1"/>
+                      </a:solidFill>
+                      <a:prstDash val="solid"/>
+                      <a:round/>
+                      <a:headEnd type="none" w="med" len="med"/>
+                      <a:tailEnd type="none" w="med" len="med"/>
+                    </a:lnR>
+                    <a:lnT w="12700" cap="flat" cmpd="sng" algn="ctr">
+                      <a:solidFill>
+                        <a:schemeClr val="tx1"/>
+                      </a:solidFill>
+                      <a:prstDash val="solid"/>
+                      <a:round/>
+                      <a:headEnd type="none" w="med" len="med"/>
+                      <a:tailEnd type="none" w="med" len="med"/>
+                    </a:lnT>
+                    <a:lnB w="12700" cap="flat" cmpd="sng" algn="ctr">
+                      <a:solidFill>
+                        <a:schemeClr val="tx1"/>
+                      </a:solidFill>
+                      <a:prstDash val="solid"/>
+                      <a:round/>
+                      <a:headEnd type="none" w="med" len="med"/>
+                      <a:tailEnd type="none" w="med" len="med"/>
+                    </a:lnB>
+                    <a:noFill/>
+                  </a:tcPr>
+                </a:tc>
+                <a:tc>
+                  <a:txBody>
+                    <a:bodyPr/>
+                    <a:lstStyle/>
+                    <a:p>
+                      <a:pPr>
+                        <a:buNone/>
+                      </a:pPr>
+                      <a:r>
+                        <a:rPr lang="en-IN" dirty="0"/>
+                        <a:t>1</a:t>
+                      </a:r>
+                    </a:p>
+                  </a:txBody>
+                  <a:tcPr anchor="ctr">
+                    <a:lnL w="12700" cap="flat" cmpd="sng" algn="ctr">
+                      <a:solidFill>
+                        <a:schemeClr val="tx1"/>
+                      </a:solidFill>
+                      <a:prstDash val="solid"/>
+                      <a:round/>
+                      <a:headEnd type="none" w="med" len="med"/>
+                      <a:tailEnd type="none" w="med" len="med"/>
+                    </a:lnL>
+                    <a:lnR w="12700" cap="flat" cmpd="sng" algn="ctr">
+                      <a:solidFill>
+                        <a:schemeClr val="tx1"/>
+                      </a:solidFill>
+                      <a:prstDash val="solid"/>
+                      <a:round/>
+                      <a:headEnd type="none" w="med" len="med"/>
+                      <a:tailEnd type="none" w="med" len="med"/>
+                    </a:lnR>
+                    <a:lnT w="12700" cap="flat" cmpd="sng" algn="ctr">
+                      <a:solidFill>
+                        <a:schemeClr val="tx1"/>
+                      </a:solidFill>
+                      <a:prstDash val="solid"/>
+                      <a:round/>
+                      <a:headEnd type="none" w="med" len="med"/>
+                      <a:tailEnd type="none" w="med" len="med"/>
+                    </a:lnT>
+                    <a:lnB w="12700" cap="flat" cmpd="sng" algn="ctr">
+                      <a:solidFill>
+                        <a:schemeClr val="tx1"/>
+                      </a:solidFill>
+                      <a:prstDash val="solid"/>
+                      <a:round/>
+                      <a:headEnd type="none" w="med" len="med"/>
+                      <a:tailEnd type="none" w="med" len="med"/>
+                    </a:lnB>
+                    <a:noFill/>
+                  </a:tcPr>
+                </a:tc>
+                <a:tc>
+                  <a:txBody>
+                    <a:bodyPr/>
+                    <a:lstStyle/>
+                    <a:p>
+                      <a:pPr>
+                        <a:buNone/>
+                      </a:pPr>
+                      <a:r>
+                        <a:rPr lang="en-US"/>
+                        <a:t>Toggle on Compare Match (not for PWM)</a:t>
+                      </a:r>
+                    </a:p>
+                  </a:txBody>
+                  <a:tcPr anchor="ctr">
+                    <a:lnL w="12700" cap="flat" cmpd="sng" algn="ctr">
+                      <a:solidFill>
+                        <a:schemeClr val="tx1"/>
+                      </a:solidFill>
+                      <a:prstDash val="solid"/>
+                      <a:round/>
+                      <a:headEnd type="none" w="med" len="med"/>
+                      <a:tailEnd type="none" w="med" len="med"/>
+                    </a:lnL>
+                    <a:lnR w="12700" cap="flat" cmpd="sng" algn="ctr">
+                      <a:solidFill>
+                        <a:schemeClr val="tx1"/>
+                      </a:solidFill>
+                      <a:prstDash val="solid"/>
+                      <a:round/>
+                      <a:headEnd type="none" w="med" len="med"/>
+                      <a:tailEnd type="none" w="med" len="med"/>
+                    </a:lnR>
+                    <a:lnT w="12700" cap="flat" cmpd="sng" algn="ctr">
+                      <a:solidFill>
+                        <a:schemeClr val="tx1"/>
+                      </a:solidFill>
+                      <a:prstDash val="solid"/>
+                      <a:round/>
+                      <a:headEnd type="none" w="med" len="med"/>
+                      <a:tailEnd type="none" w="med" len="med"/>
+                    </a:lnT>
+                    <a:lnB w="12700" cap="flat" cmpd="sng" algn="ctr">
+                      <a:solidFill>
+                        <a:schemeClr val="tx1"/>
+                      </a:solidFill>
+                      <a:prstDash val="solid"/>
+                      <a:round/>
+                      <a:headEnd type="none" w="med" len="med"/>
+                      <a:tailEnd type="none" w="med" len="med"/>
+                    </a:lnB>
+                    <a:noFill/>
+                  </a:tcPr>
+                </a:tc>
+                <a:extLst>
+                  <a:ext uri="{0D108BD9-81ED-4DB2-BD59-A6C34878D82A}">
+                    <a16:rowId xmlns:a16="http://schemas.microsoft.com/office/drawing/2014/main" val="1120707652"/>
+                  </a:ext>
+                </a:extLst>
+              </a:tr>
+              <a:tr h="440882">
+                <a:tc>
+                  <a:txBody>
+                    <a:bodyPr/>
+                    <a:lstStyle/>
+                    <a:p>
+                      <a:pPr>
+                        <a:buNone/>
+                      </a:pPr>
+                      <a:r>
+                        <a:rPr lang="en-IN"/>
+                        <a:t>10</a:t>
+                      </a:r>
+                    </a:p>
+                  </a:txBody>
+                  <a:tcPr anchor="ctr">
+                    <a:lnL w="12700" cap="flat" cmpd="sng" algn="ctr">
+                      <a:solidFill>
+                        <a:schemeClr val="tx1"/>
+                      </a:solidFill>
+                      <a:prstDash val="solid"/>
+                      <a:round/>
+                      <a:headEnd type="none" w="med" len="med"/>
+                      <a:tailEnd type="none" w="med" len="med"/>
+                    </a:lnL>
+                    <a:lnR w="12700" cap="flat" cmpd="sng" algn="ctr">
+                      <a:solidFill>
+                        <a:schemeClr val="tx1"/>
+                      </a:solidFill>
+                      <a:prstDash val="solid"/>
+                      <a:round/>
+                      <a:headEnd type="none" w="med" len="med"/>
+                      <a:tailEnd type="none" w="med" len="med"/>
+                    </a:lnR>
+                    <a:lnT w="12700" cap="flat" cmpd="sng" algn="ctr">
+                      <a:solidFill>
+                        <a:schemeClr val="tx1"/>
+                      </a:solidFill>
+                      <a:prstDash val="solid"/>
+                      <a:round/>
+                      <a:headEnd type="none" w="med" len="med"/>
+                      <a:tailEnd type="none" w="med" len="med"/>
+                    </a:lnT>
+                    <a:lnB w="12700" cap="flat" cmpd="sng" algn="ctr">
+                      <a:solidFill>
+                        <a:schemeClr val="tx1"/>
+                      </a:solidFill>
+                      <a:prstDash val="solid"/>
+                      <a:round/>
+                      <a:headEnd type="none" w="med" len="med"/>
+                      <a:tailEnd type="none" w="med" len="med"/>
+                    </a:lnB>
+                    <a:noFill/>
+                  </a:tcPr>
+                </a:tc>
+                <a:tc>
+                  <a:txBody>
+                    <a:bodyPr/>
+                    <a:lstStyle/>
+                    <a:p>
+                      <a:pPr>
+                        <a:buNone/>
+                      </a:pPr>
+                      <a:r>
+                        <a:rPr lang="en-IN"/>
+                        <a:t>1</a:t>
+                      </a:r>
+                    </a:p>
+                  </a:txBody>
+                  <a:tcPr anchor="ctr">
+                    <a:lnL w="12700" cap="flat" cmpd="sng" algn="ctr">
+                      <a:solidFill>
+                        <a:schemeClr val="tx1"/>
+                      </a:solidFill>
+                      <a:prstDash val="solid"/>
+                      <a:round/>
+                      <a:headEnd type="none" w="med" len="med"/>
+                      <a:tailEnd type="none" w="med" len="med"/>
+                    </a:lnL>
+                    <a:lnR w="12700" cap="flat" cmpd="sng" algn="ctr">
+                      <a:solidFill>
+                        <a:schemeClr val="tx1"/>
+                      </a:solidFill>
+                      <a:prstDash val="solid"/>
+                      <a:round/>
+                      <a:headEnd type="none" w="med" len="med"/>
+                      <a:tailEnd type="none" w="med" len="med"/>
+                    </a:lnR>
+                    <a:lnT w="12700" cap="flat" cmpd="sng" algn="ctr">
+                      <a:solidFill>
+                        <a:schemeClr val="tx1"/>
+                      </a:solidFill>
+                      <a:prstDash val="solid"/>
+                      <a:round/>
+                      <a:headEnd type="none" w="med" len="med"/>
+                      <a:tailEnd type="none" w="med" len="med"/>
+                    </a:lnT>
+                    <a:lnB w="12700" cap="flat" cmpd="sng" algn="ctr">
+                      <a:solidFill>
+                        <a:schemeClr val="tx1"/>
+                      </a:solidFill>
+                      <a:prstDash val="solid"/>
+                      <a:round/>
+                      <a:headEnd type="none" w="med" len="med"/>
+                      <a:tailEnd type="none" w="med" len="med"/>
+                    </a:lnB>
+                    <a:noFill/>
+                  </a:tcPr>
+                </a:tc>
+                <a:tc>
+                  <a:txBody>
+                    <a:bodyPr/>
+                    <a:lstStyle/>
+                    <a:p>
+                      <a:pPr>
+                        <a:buNone/>
+                      </a:pPr>
+                      <a:r>
+                        <a:rPr lang="en-IN"/>
+                        <a:t>0</a:t>
+                      </a:r>
+                    </a:p>
+                  </a:txBody>
+                  <a:tcPr anchor="ctr">
+                    <a:lnL w="12700" cap="flat" cmpd="sng" algn="ctr">
+                      <a:solidFill>
+                        <a:schemeClr val="tx1"/>
+                      </a:solidFill>
+                      <a:prstDash val="solid"/>
+                      <a:round/>
+                      <a:headEnd type="none" w="med" len="med"/>
+                      <a:tailEnd type="none" w="med" len="med"/>
+                    </a:lnL>
+                    <a:lnR w="12700" cap="flat" cmpd="sng" algn="ctr">
+                      <a:solidFill>
+                        <a:schemeClr val="tx1"/>
+                      </a:solidFill>
+                      <a:prstDash val="solid"/>
+                      <a:round/>
+                      <a:headEnd type="none" w="med" len="med"/>
+                      <a:tailEnd type="none" w="med" len="med"/>
+                    </a:lnR>
+                    <a:lnT w="12700" cap="flat" cmpd="sng" algn="ctr">
+                      <a:solidFill>
+                        <a:schemeClr val="tx1"/>
+                      </a:solidFill>
+                      <a:prstDash val="solid"/>
+                      <a:round/>
+                      <a:headEnd type="none" w="med" len="med"/>
+                      <a:tailEnd type="none" w="med" len="med"/>
+                    </a:lnT>
+                    <a:lnB w="12700" cap="flat" cmpd="sng" algn="ctr">
+                      <a:solidFill>
+                        <a:schemeClr val="tx1"/>
+                      </a:solidFill>
+                      <a:prstDash val="solid"/>
+                      <a:round/>
+                      <a:headEnd type="none" w="med" len="med"/>
+                      <a:tailEnd type="none" w="med" len="med"/>
+                    </a:lnB>
+                    <a:noFill/>
+                  </a:tcPr>
+                </a:tc>
+                <a:tc>
+                  <a:txBody>
+                    <a:bodyPr/>
+                    <a:lstStyle/>
+                    <a:p>
+                      <a:pPr>
+                        <a:buNone/>
+                      </a:pPr>
+                      <a:r>
+                        <a:rPr lang="en-IN" b="1"/>
+                        <a:t>Non-inverting PWM</a:t>
+                      </a:r>
+                      <a:endParaRPr lang="en-IN"/>
+                    </a:p>
+                  </a:txBody>
+                  <a:tcPr anchor="ctr">
+                    <a:lnL w="12700" cap="flat" cmpd="sng" algn="ctr">
+                      <a:solidFill>
+                        <a:schemeClr val="tx1"/>
+                      </a:solidFill>
+                      <a:prstDash val="solid"/>
+                      <a:round/>
+                      <a:headEnd type="none" w="med" len="med"/>
+                      <a:tailEnd type="none" w="med" len="med"/>
+                    </a:lnL>
+                    <a:lnR w="12700" cap="flat" cmpd="sng" algn="ctr">
+                      <a:solidFill>
+                        <a:schemeClr val="tx1"/>
+                      </a:solidFill>
+                      <a:prstDash val="solid"/>
+                      <a:round/>
+                      <a:headEnd type="none" w="med" len="med"/>
+                      <a:tailEnd type="none" w="med" len="med"/>
+                    </a:lnR>
+                    <a:lnT w="12700" cap="flat" cmpd="sng" algn="ctr">
+                      <a:solidFill>
+                        <a:schemeClr val="tx1"/>
+                      </a:solidFill>
+                      <a:prstDash val="solid"/>
+                      <a:round/>
+                      <a:headEnd type="none" w="med" len="med"/>
+                      <a:tailEnd type="none" w="med" len="med"/>
+                    </a:lnT>
+                    <a:lnB w="12700" cap="flat" cmpd="sng" algn="ctr">
+                      <a:solidFill>
+                        <a:schemeClr val="tx1"/>
+                      </a:solidFill>
+                      <a:prstDash val="solid"/>
+                      <a:round/>
+                      <a:headEnd type="none" w="med" len="med"/>
+                      <a:tailEnd type="none" w="med" len="med"/>
+                    </a:lnB>
+                    <a:noFill/>
+                  </a:tcPr>
+                </a:tc>
+                <a:extLst>
+                  <a:ext uri="{0D108BD9-81ED-4DB2-BD59-A6C34878D82A}">
+                    <a16:rowId xmlns:a16="http://schemas.microsoft.com/office/drawing/2014/main" val="3087527690"/>
+                  </a:ext>
+                </a:extLst>
+              </a:tr>
+              <a:tr h="259343">
+                <a:tc>
+                  <a:txBody>
+                    <a:bodyPr/>
+                    <a:lstStyle/>
+                    <a:p>
+                      <a:pPr>
+                        <a:buNone/>
+                      </a:pPr>
+                      <a:r>
+                        <a:rPr lang="en-IN"/>
+                        <a:t>11</a:t>
+                      </a:r>
+                    </a:p>
+                  </a:txBody>
+                  <a:tcPr anchor="ctr">
+                    <a:lnL w="12700" cap="flat" cmpd="sng" algn="ctr">
+                      <a:solidFill>
+                        <a:schemeClr val="tx1"/>
+                      </a:solidFill>
+                      <a:prstDash val="solid"/>
+                      <a:round/>
+                      <a:headEnd type="none" w="med" len="med"/>
+                      <a:tailEnd type="none" w="med" len="med"/>
+                    </a:lnL>
+                    <a:lnR w="12700" cap="flat" cmpd="sng" algn="ctr">
+                      <a:solidFill>
+                        <a:schemeClr val="tx1"/>
+                      </a:solidFill>
+                      <a:prstDash val="solid"/>
+                      <a:round/>
+                      <a:headEnd type="none" w="med" len="med"/>
+                      <a:tailEnd type="none" w="med" len="med"/>
+                    </a:lnR>
+                    <a:lnT w="12700" cap="flat" cmpd="sng" algn="ctr">
+                      <a:solidFill>
+                        <a:schemeClr val="tx1"/>
+                      </a:solidFill>
+                      <a:prstDash val="solid"/>
+                      <a:round/>
+                      <a:headEnd type="none" w="med" len="med"/>
+                      <a:tailEnd type="none" w="med" len="med"/>
+                    </a:lnT>
+                    <a:lnB w="12700" cap="flat" cmpd="sng" algn="ctr">
+                      <a:solidFill>
+                        <a:schemeClr val="tx1"/>
+                      </a:solidFill>
+                      <a:prstDash val="solid"/>
+                      <a:round/>
+                      <a:headEnd type="none" w="med" len="med"/>
+                      <a:tailEnd type="none" w="med" len="med"/>
+                    </a:lnB>
+                    <a:noFill/>
+                  </a:tcPr>
+                </a:tc>
+                <a:tc>
+                  <a:txBody>
+                    <a:bodyPr/>
+                    <a:lstStyle/>
+                    <a:p>
+                      <a:pPr>
+                        <a:buNone/>
+                      </a:pPr>
+                      <a:r>
+                        <a:rPr lang="en-IN"/>
+                        <a:t>1</a:t>
+                      </a:r>
+                    </a:p>
+                  </a:txBody>
+                  <a:tcPr anchor="ctr">
+                    <a:lnL w="12700" cap="flat" cmpd="sng" algn="ctr">
+                      <a:solidFill>
+                        <a:schemeClr val="tx1"/>
+                      </a:solidFill>
+                      <a:prstDash val="solid"/>
+                      <a:round/>
+                      <a:headEnd type="none" w="med" len="med"/>
+                      <a:tailEnd type="none" w="med" len="med"/>
+                    </a:lnL>
+                    <a:lnR w="12700" cap="flat" cmpd="sng" algn="ctr">
+                      <a:solidFill>
+                        <a:schemeClr val="tx1"/>
+                      </a:solidFill>
+                      <a:prstDash val="solid"/>
+                      <a:round/>
+                      <a:headEnd type="none" w="med" len="med"/>
+                      <a:tailEnd type="none" w="med" len="med"/>
+                    </a:lnR>
+                    <a:lnT w="12700" cap="flat" cmpd="sng" algn="ctr">
+                      <a:solidFill>
+                        <a:schemeClr val="tx1"/>
+                      </a:solidFill>
+                      <a:prstDash val="solid"/>
+                      <a:round/>
+                      <a:headEnd type="none" w="med" len="med"/>
+                      <a:tailEnd type="none" w="med" len="med"/>
+                    </a:lnT>
+                    <a:lnB w="12700" cap="flat" cmpd="sng" algn="ctr">
+                      <a:solidFill>
+                        <a:schemeClr val="tx1"/>
+                      </a:solidFill>
+                      <a:prstDash val="solid"/>
+                      <a:round/>
+                      <a:headEnd type="none" w="med" len="med"/>
+                      <a:tailEnd type="none" w="med" len="med"/>
+                    </a:lnB>
+                    <a:noFill/>
+                  </a:tcPr>
+                </a:tc>
+                <a:tc>
+                  <a:txBody>
+                    <a:bodyPr/>
+                    <a:lstStyle/>
+                    <a:p>
+                      <a:pPr>
+                        <a:buNone/>
+                      </a:pPr>
+                      <a:r>
+                        <a:rPr lang="en-IN"/>
+                        <a:t>1</a:t>
+                      </a:r>
+                    </a:p>
+                  </a:txBody>
+                  <a:tcPr anchor="ctr">
+                    <a:lnL w="12700" cap="flat" cmpd="sng" algn="ctr">
+                      <a:solidFill>
+                        <a:schemeClr val="tx1"/>
+                      </a:solidFill>
+                      <a:prstDash val="solid"/>
+                      <a:round/>
+                      <a:headEnd type="none" w="med" len="med"/>
+                      <a:tailEnd type="none" w="med" len="med"/>
+                    </a:lnL>
+                    <a:lnR w="12700" cap="flat" cmpd="sng" algn="ctr">
+                      <a:solidFill>
+                        <a:schemeClr val="tx1"/>
+                      </a:solidFill>
+                      <a:prstDash val="solid"/>
+                      <a:round/>
+                      <a:headEnd type="none" w="med" len="med"/>
+                      <a:tailEnd type="none" w="med" len="med"/>
+                    </a:lnR>
+                    <a:lnT w="12700" cap="flat" cmpd="sng" algn="ctr">
+                      <a:solidFill>
+                        <a:schemeClr val="tx1"/>
+                      </a:solidFill>
+                      <a:prstDash val="solid"/>
+                      <a:round/>
+                      <a:headEnd type="none" w="med" len="med"/>
+                      <a:tailEnd type="none" w="med" len="med"/>
+                    </a:lnT>
+                    <a:lnB w="12700" cap="flat" cmpd="sng" algn="ctr">
+                      <a:solidFill>
+                        <a:schemeClr val="tx1"/>
+                      </a:solidFill>
+                      <a:prstDash val="solid"/>
+                      <a:round/>
+                      <a:headEnd type="none" w="med" len="med"/>
+                      <a:tailEnd type="none" w="med" len="med"/>
+                    </a:lnB>
+                    <a:noFill/>
+                  </a:tcPr>
+                </a:tc>
+                <a:tc>
+                  <a:txBody>
+                    <a:bodyPr/>
+                    <a:lstStyle/>
+                    <a:p>
+                      <a:pPr>
+                        <a:buNone/>
+                      </a:pPr>
+                      <a:r>
+                        <a:rPr lang="en-IN" b="1" dirty="0"/>
+                        <a:t>Inverting PWM</a:t>
+                      </a:r>
+                      <a:endParaRPr lang="en-IN" dirty="0"/>
+                    </a:p>
+                  </a:txBody>
+                  <a:tcPr anchor="ctr">
+                    <a:lnL w="12700" cap="flat" cmpd="sng" algn="ctr">
+                      <a:solidFill>
+                        <a:schemeClr val="tx1"/>
+                      </a:solidFill>
+                      <a:prstDash val="solid"/>
+                      <a:round/>
+                      <a:headEnd type="none" w="med" len="med"/>
+                      <a:tailEnd type="none" w="med" len="med"/>
+                    </a:lnL>
+                    <a:lnR w="12700" cap="flat" cmpd="sng" algn="ctr">
+                      <a:solidFill>
+                        <a:schemeClr val="tx1"/>
+                      </a:solidFill>
+                      <a:prstDash val="solid"/>
+                      <a:round/>
+                      <a:headEnd type="none" w="med" len="med"/>
+                      <a:tailEnd type="none" w="med" len="med"/>
+                    </a:lnR>
+                    <a:lnT w="12700" cap="flat" cmpd="sng" algn="ctr">
+                      <a:solidFill>
+                        <a:schemeClr val="tx1"/>
+                      </a:solidFill>
+                      <a:prstDash val="solid"/>
+                      <a:round/>
+                      <a:headEnd type="none" w="med" len="med"/>
+                      <a:tailEnd type="none" w="med" len="med"/>
+                    </a:lnT>
+                    <a:lnB w="12700" cap="flat" cmpd="sng" algn="ctr">
+                      <a:solidFill>
+                        <a:schemeClr val="tx1"/>
+                      </a:solidFill>
+                      <a:prstDash val="solid"/>
+                      <a:round/>
+                      <a:headEnd type="none" w="med" len="med"/>
+                      <a:tailEnd type="none" w="med" len="med"/>
+                    </a:lnB>
+                    <a:noFill/>
+                  </a:tcPr>
+                </a:tc>
+                <a:extLst>
+                  <a:ext uri="{0D108BD9-81ED-4DB2-BD59-A6C34878D82A}">
+                    <a16:rowId xmlns:a16="http://schemas.microsoft.com/office/drawing/2014/main" val="2500360821"/>
+                  </a:ext>
+                </a:extLst>
+              </a:tr>
+            </a:tbl>
+          </a:graphicData>
+        </a:graphic>
+      </p:graphicFrame>
+    </p:spTree>
+    <p:extLst>
+      <p:ext uri="{BB962C8B-B14F-4D97-AF65-F5344CB8AC3E}">
+        <p14:creationId xmlns:p14="http://schemas.microsoft.com/office/powerpoint/2010/main" val="2957352177"/>
+      </p:ext>
+    </p:extLst>
+  </p:cSld>
+  <p:clrMapOvr>
+    <a:masterClrMapping/>
+  </p:clrMapOvr>
+</p:sld>
+</file>
+
+<file path=ppt/slides/slide7.xml><?xml version="1.0" encoding="utf-8"?>
+<p:sld xmlns:a="http://schemas.openxmlformats.org/drawingml/2006/main" xmlns:r="http://schemas.openxmlformats.org/officeDocument/2006/relationships" xmlns:p="http://schemas.openxmlformats.org/presentationml/2006/main">
+  <p:cSld>
+    <p:spTree>
+      <p:nvGrpSpPr>
+        <p:cNvPr id="1" name="Shape 53">
+          <a:extLst>
+            <a:ext uri="{FF2B5EF4-FFF2-40B4-BE49-F238E27FC236}">
+              <a16:creationId xmlns:a16="http://schemas.microsoft.com/office/drawing/2014/main" id="{D1732C1B-4101-A78B-8998-0E6AE3C41A08}"/>
+            </a:ext>
+          </a:extLst>
+        </p:cNvPr>
+        <p:cNvGrpSpPr/>
+        <p:nvPr/>
+      </p:nvGrpSpPr>
+      <p:grpSpPr>
+        <a:xfrm>
+          <a:off x="0" y="0"/>
+          <a:ext cx="0" cy="0"/>
+          <a:chOff x="0" y="0"/>
+          <a:chExt cx="0" cy="0"/>
+        </a:xfrm>
+      </p:grpSpPr>
+      <p:sp>
+        <p:nvSpPr>
+          <p:cNvPr id="54" name="Google Shape;54;p11">
+            <a:extLst>
+              <a:ext uri="{FF2B5EF4-FFF2-40B4-BE49-F238E27FC236}">
+                <a16:creationId xmlns:a16="http://schemas.microsoft.com/office/drawing/2014/main" id="{A80B68C1-8A66-CC8A-2E07-85E815945020}"/>
+              </a:ext>
+            </a:extLst>
+          </p:cNvPr>
+          <p:cNvSpPr txBox="1">
+            <a:spLocks noGrp="1"/>
+          </p:cNvSpPr>
+          <p:nvPr>
+            <p:ph type="title"/>
+          </p:nvPr>
+        </p:nvSpPr>
+        <p:spPr>
+          <a:xfrm>
+            <a:off x="2698250" y="367100"/>
+            <a:ext cx="5905500" cy="1087050"/>
+          </a:xfrm>
+          <a:prstGeom prst="rect">
+            <a:avLst/>
+          </a:prstGeom>
+        </p:spPr>
+        <p:txBody>
+          <a:bodyPr spcFirstLastPara="1" wrap="square" lIns="91425" tIns="91425" rIns="91425" bIns="91425" anchor="t" anchorCtr="0">
+            <a:normAutofit fontScale="90000"/>
+          </a:bodyPr>
+          <a:lstStyle/>
+          <a:p>
+            <a:pPr marL="0" lvl="0" indent="0" algn="ctr" rtl="0">
+              <a:lnSpc>
+                <a:spcPct val="115000"/>
+              </a:lnSpc>
+              <a:spcBef>
+                <a:spcPts val="0"/>
+              </a:spcBef>
+              <a:spcAft>
+                <a:spcPts val="0"/>
+              </a:spcAft>
+              <a:buNone/>
+            </a:pPr>
+            <a:r>
+              <a:rPr lang="en-IN" sz="3300" dirty="0">
+                <a:solidFill>
+                  <a:schemeClr val="dk1"/>
+                </a:solidFill>
+                <a:latin typeface="Helvetica Neue"/>
+                <a:ea typeface="Helvetica Neue"/>
+                <a:cs typeface="Helvetica Neue"/>
+                <a:sym typeface="Helvetica Neue"/>
+              </a:rPr>
+              <a:t>Inverting and Noninverting PWM</a:t>
+            </a:r>
+            <a:endParaRPr sz="3300" dirty="0">
+              <a:solidFill>
+                <a:schemeClr val="dk1"/>
+              </a:solidFill>
+              <a:latin typeface="Helvetica Neue"/>
+              <a:ea typeface="Helvetica Neue"/>
+              <a:cs typeface="Helvetica Neue"/>
+              <a:sym typeface="Helvetica Neue"/>
+            </a:endParaRPr>
+          </a:p>
+          <a:p>
+            <a:pPr marL="0" lvl="0" indent="0" algn="l" rtl="0">
+              <a:spcBef>
+                <a:spcPts val="0"/>
+              </a:spcBef>
+              <a:spcAft>
+                <a:spcPts val="0"/>
+              </a:spcAft>
+              <a:buNone/>
+            </a:pPr>
+            <a:endParaRPr dirty="0"/>
+          </a:p>
+        </p:txBody>
+      </p:sp>
+      <p:sp>
+        <p:nvSpPr>
+          <p:cNvPr id="55" name="Google Shape;55;p11">
+            <a:extLst>
+              <a:ext uri="{FF2B5EF4-FFF2-40B4-BE49-F238E27FC236}">
+                <a16:creationId xmlns:a16="http://schemas.microsoft.com/office/drawing/2014/main" id="{6B9686C3-835E-9639-2AA7-D0B611D0485D}"/>
+              </a:ext>
+            </a:extLst>
+          </p:cNvPr>
+          <p:cNvSpPr txBox="1">
+            <a:spLocks noGrp="1"/>
+          </p:cNvSpPr>
+          <p:nvPr>
+            <p:ph type="body" idx="1"/>
+          </p:nvPr>
+        </p:nvSpPr>
+        <p:spPr>
+          <a:xfrm>
+            <a:off x="2698250" y="1627079"/>
+            <a:ext cx="5905500" cy="3123311"/>
+          </a:xfrm>
+          <a:prstGeom prst="rect">
+            <a:avLst/>
+          </a:prstGeom>
+        </p:spPr>
+        <p:txBody>
+          <a:bodyPr spcFirstLastPara="1" wrap="square" lIns="91425" tIns="91425" rIns="91425" bIns="91425" anchor="t" anchorCtr="0">
+            <a:normAutofit/>
+          </a:bodyPr>
+          <a:lstStyle/>
+          <a:p>
+            <a:pPr marL="673100" indent="-571500">
+              <a:buSzPts val="2000"/>
+            </a:pPr>
+            <a:endParaRPr lang="pt-BR" sz="2000" dirty="0">
+              <a:solidFill>
+                <a:schemeClr val="accent3"/>
+              </a:solidFill>
+              <a:latin typeface="Helvetica Neue"/>
+              <a:ea typeface="Helvetica Neue"/>
+              <a:cs typeface="Helvetica Neue"/>
+              <a:sym typeface="Helvetica Neue"/>
+            </a:endParaRPr>
+          </a:p>
+          <a:p>
+            <a:pPr marL="673100" indent="-571500">
+              <a:buSzPts val="2000"/>
+            </a:pPr>
+            <a:r>
+              <a:rPr lang="pt-BR" sz="2000" dirty="0">
+                <a:solidFill>
+                  <a:schemeClr val="accent3"/>
+                </a:solidFill>
+                <a:latin typeface="Helvetica Neue"/>
+                <a:ea typeface="Helvetica Neue"/>
+                <a:cs typeface="Helvetica Neue"/>
+                <a:sym typeface="Helvetica Neue"/>
+              </a:rPr>
+              <a:t>// Non-inverting COM0A1 =1</a:t>
+            </a:r>
+          </a:p>
+          <a:p>
+            <a:pPr marL="673100" indent="-571500">
+              <a:buSzPts val="2000"/>
+            </a:pPr>
+            <a:endParaRPr lang="pt-BR" sz="2000" dirty="0">
+              <a:solidFill>
+                <a:schemeClr val="accent3"/>
+              </a:solidFill>
+              <a:latin typeface="Helvetica Neue"/>
+              <a:ea typeface="Helvetica Neue"/>
+              <a:cs typeface="Helvetica Neue"/>
+              <a:sym typeface="Helvetica Neue"/>
+            </a:endParaRPr>
+          </a:p>
+          <a:p>
+            <a:pPr marL="1130300" lvl="1" indent="-571500">
+              <a:buSzPts val="2000"/>
+            </a:pPr>
+            <a:r>
+              <a:rPr lang="pt-BR" sz="1600" dirty="0">
+                <a:solidFill>
+                  <a:schemeClr val="accent3"/>
+                </a:solidFill>
+                <a:latin typeface="Helvetica Neue"/>
+                <a:ea typeface="Helvetica Neue"/>
+                <a:cs typeface="Helvetica Neue"/>
+                <a:sym typeface="Helvetica Neue"/>
+              </a:rPr>
+              <a:t>TCCR0A |= (1 &lt;&lt; COM0A1);</a:t>
+            </a:r>
+          </a:p>
+          <a:p>
+            <a:pPr marL="673100" indent="-571500">
+              <a:buSzPts val="2000"/>
+            </a:pPr>
+            <a:endParaRPr lang="pt-BR" sz="2000" dirty="0">
+              <a:solidFill>
+                <a:schemeClr val="accent3"/>
+              </a:solidFill>
+              <a:latin typeface="Helvetica Neue"/>
+              <a:ea typeface="Helvetica Neue"/>
+              <a:cs typeface="Helvetica Neue"/>
+              <a:sym typeface="Helvetica Neue"/>
+            </a:endParaRPr>
+          </a:p>
+          <a:p>
+            <a:pPr marL="673100" indent="-571500">
+              <a:buSzPts val="2000"/>
+            </a:pPr>
+            <a:r>
+              <a:rPr lang="pt-BR" sz="2000" dirty="0">
+                <a:solidFill>
+                  <a:schemeClr val="accent3"/>
+                </a:solidFill>
+                <a:latin typeface="Helvetica Neue"/>
+                <a:ea typeface="Helvetica Neue"/>
+                <a:cs typeface="Helvetica Neue"/>
+                <a:sym typeface="Helvetica Neue"/>
+              </a:rPr>
+              <a:t>// Inverting COM0A1 AND COM0A0 =1</a:t>
+            </a:r>
+          </a:p>
+          <a:p>
+            <a:pPr marL="673100" indent="-571500">
+              <a:buSzPts val="2000"/>
+            </a:pPr>
+            <a:endParaRPr lang="pt-BR" sz="2000" dirty="0">
+              <a:solidFill>
+                <a:schemeClr val="accent3"/>
+              </a:solidFill>
+              <a:latin typeface="Helvetica Neue"/>
+              <a:ea typeface="Helvetica Neue"/>
+              <a:cs typeface="Helvetica Neue"/>
+              <a:sym typeface="Helvetica Neue"/>
+            </a:endParaRPr>
+          </a:p>
+          <a:p>
+            <a:pPr marL="1130300" lvl="1" indent="-571500">
+              <a:buSzPts val="2000"/>
+            </a:pPr>
+            <a:r>
+              <a:rPr lang="pt-BR" sz="1600" dirty="0">
+                <a:solidFill>
+                  <a:schemeClr val="accent3"/>
+                </a:solidFill>
+                <a:latin typeface="Helvetica Neue"/>
+                <a:ea typeface="Helvetica Neue"/>
+                <a:cs typeface="Helvetica Neue"/>
+                <a:sym typeface="Helvetica Neue"/>
+              </a:rPr>
+              <a:t>TCCR0A |= (1 &lt;&lt; COM0A1) | (1 &lt;&lt; COM0A0);</a:t>
+            </a:r>
+            <a:endParaRPr lang="en-IN" sz="1600" dirty="0">
               <a:solidFill>
                 <a:schemeClr val="accent3"/>
               </a:solidFill>
@@ -6083,7 +8574,7 @@
     </p:spTree>
     <p:extLst>
       <p:ext uri="{BB962C8B-B14F-4D97-AF65-F5344CB8AC3E}">
-        <p14:creationId xmlns:p14="http://schemas.microsoft.com/office/powerpoint/2010/main" val="1255739614"/>
+        <p14:creationId xmlns:p14="http://schemas.microsoft.com/office/powerpoint/2010/main" val="668661736"/>
       </p:ext>
     </p:extLst>
   </p:cSld>
@@ -6093,7 +8584,7 @@
 </p:sld>
 </file>
 
-<file path=ppt/slides/slide5.xml><?xml version="1.0" encoding="utf-8"?>
+<file path=ppt/slides/slide8.xml><?xml version="1.0" encoding="utf-8"?>
 <p:sld xmlns:a="http://schemas.openxmlformats.org/drawingml/2006/main" xmlns:r="http://schemas.openxmlformats.org/officeDocument/2006/relationships" xmlns:p="http://schemas.openxmlformats.org/presentationml/2006/main">
   <p:cSld>
     <p:spTree>
@@ -6339,44 +8830,62 @@
                     <m:f>
                       <m:fPr>
                         <m:ctrlPr>
-                          <a:rPr lang="ar-AE"/>
+                          <a:rPr lang="ar-AE" i="1">
+                            <a:latin typeface="Cambria Math" panose="02040503050406030204" pitchFamily="18" charset="0"/>
+                          </a:rPr>
                         </m:ctrlPr>
                       </m:fPr>
                       <m:num>
                         <m:r>
-                          <a:rPr lang="ar-AE" i="1"/>
+                          <a:rPr lang="ar-AE" i="1">
+                            <a:latin typeface="Cambria Math" panose="02040503050406030204" pitchFamily="18" charset="0"/>
+                          </a:rPr>
                           <m:t>𝑂𝐶𝑅</m:t>
                         </m:r>
                         <m:r>
-                          <a:rPr lang="ar-AE"/>
+                          <a:rPr lang="ar-AE">
+                            <a:latin typeface="Cambria Math" panose="02040503050406030204" pitchFamily="18" charset="0"/>
+                          </a:rPr>
                           <m:t>0</m:t>
                         </m:r>
                         <m:r>
-                          <a:rPr lang="ar-AE" i="1"/>
+                          <a:rPr lang="ar-AE" i="1">
+                            <a:latin typeface="Cambria Math" panose="02040503050406030204" pitchFamily="18" charset="0"/>
+                          </a:rPr>
                           <m:t>𝑥</m:t>
                         </m:r>
                       </m:num>
                       <m:den>
                         <m:r>
-                          <a:rPr lang="ar-AE" i="1"/>
+                          <a:rPr lang="ar-AE" i="1">
+                            <a:latin typeface="Cambria Math" panose="02040503050406030204" pitchFamily="18" charset="0"/>
+                          </a:rPr>
                           <m:t>𝑇𝑂𝑃</m:t>
                         </m:r>
                         <m:r>
-                          <a:rPr lang="ar-AE"/>
+                          <a:rPr lang="en-IN" b="0" i="1" smtClean="0">
+                            <a:latin typeface="Cambria Math" panose="02040503050406030204" pitchFamily="18" charset="0"/>
+                          </a:rPr>
                           <m:t>+</m:t>
                         </m:r>
                         <m:r>
-                          <a:rPr lang="ar-AE"/>
+                          <a:rPr lang="en-IN" b="0" i="1" smtClean="0">
+                            <a:latin typeface="Cambria Math" panose="02040503050406030204" pitchFamily="18" charset="0"/>
+                          </a:rPr>
                           <m:t>1</m:t>
                         </m:r>
                       </m:den>
                     </m:f>
                     <m:r>
-                      <a:rPr lang="ar-AE"/>
+                      <a:rPr lang="ar-AE">
+                        <a:latin typeface="Cambria Math" panose="02040503050406030204" pitchFamily="18" charset="0"/>
+                      </a:rPr>
                       <m:t>×</m:t>
                     </m:r>
                     <m:r>
-                      <a:rPr lang="ar-AE"/>
+                      <a:rPr lang="ar-AE">
+                        <a:latin typeface="Cambria Math" panose="02040503050406030204" pitchFamily="18" charset="0"/>
+                      </a:rPr>
                       <m:t>100</m:t>
                     </m:r>
                   </m:oMath>
@@ -6423,19 +8932,7 @@
                     <a:cs typeface="Helvetica Neue"/>
                     <a:sym typeface="Helvetica Neue"/>
                   </a:rPr>
-                  <a:t>FAST PWM and Phase Correct PWM </a:t>
-                </a:r>
-                <a:r>
-                  <a:rPr lang="en-IN" sz="2000" dirty="0" err="1">
-                    <a:solidFill>
-                      <a:schemeClr val="accent3"/>
-                    </a:solidFill>
-                    <a:latin typeface="Helvetica Neue"/>
-                    <a:ea typeface="Helvetica Neue"/>
-                    <a:cs typeface="Helvetica Neue"/>
-                    <a:sym typeface="Helvetica Neue"/>
-                  </a:rPr>
-                  <a:t>Cocept</a:t>
+                  <a:t>FAST PWM and Phase Correct PWM Concept</a:t>
                 </a:r>
                 <a:endParaRPr sz="2000" dirty="0">
                   <a:solidFill>
@@ -6510,273 +9007,7 @@
 </p:sld>
 </file>
 
-<file path=ppt/slides/slide6.xml><?xml version="1.0" encoding="utf-8"?>
-<p:sld xmlns:a="http://schemas.openxmlformats.org/drawingml/2006/main" xmlns:r="http://schemas.openxmlformats.org/officeDocument/2006/relationships" xmlns:p="http://schemas.openxmlformats.org/presentationml/2006/main">
-  <p:cSld>
-    <p:spTree>
-      <p:nvGrpSpPr>
-        <p:cNvPr id="1" name="Shape 53">
-          <a:extLst>
-            <a:ext uri="{FF2B5EF4-FFF2-40B4-BE49-F238E27FC236}">
-              <a16:creationId xmlns:a16="http://schemas.microsoft.com/office/drawing/2014/main" id="{64585B45-8E10-53C2-CA4C-164CEC426802}"/>
-            </a:ext>
-          </a:extLst>
-        </p:cNvPr>
-        <p:cNvGrpSpPr/>
-        <p:nvPr/>
-      </p:nvGrpSpPr>
-      <p:grpSpPr>
-        <a:xfrm>
-          <a:off x="0" y="0"/>
-          <a:ext cx="0" cy="0"/>
-          <a:chOff x="0" y="0"/>
-          <a:chExt cx="0" cy="0"/>
-        </a:xfrm>
-      </p:grpSpPr>
-      <p:sp>
-        <p:nvSpPr>
-          <p:cNvPr id="54" name="Google Shape;54;p11">
-            <a:extLst>
-              <a:ext uri="{FF2B5EF4-FFF2-40B4-BE49-F238E27FC236}">
-                <a16:creationId xmlns:a16="http://schemas.microsoft.com/office/drawing/2014/main" id="{B99B92AD-4783-9494-3A62-3B2D9861BB69}"/>
-              </a:ext>
-            </a:extLst>
-          </p:cNvPr>
-          <p:cNvSpPr txBox="1">
-            <a:spLocks noGrp="1"/>
-          </p:cNvSpPr>
-          <p:nvPr>
-            <p:ph type="title"/>
-          </p:nvPr>
-        </p:nvSpPr>
-        <p:spPr>
-          <a:xfrm>
-            <a:off x="2698250" y="367100"/>
-            <a:ext cx="5905500" cy="1087050"/>
-          </a:xfrm>
-          <a:prstGeom prst="rect">
-            <a:avLst/>
-          </a:prstGeom>
-        </p:spPr>
-        <p:txBody>
-          <a:bodyPr spcFirstLastPara="1" wrap="square" lIns="91425" tIns="91425" rIns="91425" bIns="91425" anchor="t" anchorCtr="0">
-            <a:normAutofit fontScale="90000"/>
-          </a:bodyPr>
-          <a:lstStyle/>
-          <a:p>
-            <a:pPr marL="0" lvl="0" indent="0" algn="ctr" rtl="0">
-              <a:lnSpc>
-                <a:spcPct val="115000"/>
-              </a:lnSpc>
-              <a:spcBef>
-                <a:spcPts val="0"/>
-              </a:spcBef>
-              <a:spcAft>
-                <a:spcPts val="0"/>
-              </a:spcAft>
-              <a:buNone/>
-            </a:pPr>
-            <a:r>
-              <a:rPr lang="en-IN" sz="3300" dirty="0">
-                <a:solidFill>
-                  <a:schemeClr val="dk1"/>
-                </a:solidFill>
-                <a:latin typeface="Helvetica Neue"/>
-                <a:ea typeface="Helvetica Neue"/>
-                <a:cs typeface="Helvetica Neue"/>
-                <a:sym typeface="Helvetica Neue"/>
-              </a:rPr>
-              <a:t>Inverting and Noninverting PWM</a:t>
-            </a:r>
-            <a:endParaRPr sz="3300" dirty="0">
-              <a:solidFill>
-                <a:schemeClr val="dk1"/>
-              </a:solidFill>
-              <a:latin typeface="Helvetica Neue"/>
-              <a:ea typeface="Helvetica Neue"/>
-              <a:cs typeface="Helvetica Neue"/>
-              <a:sym typeface="Helvetica Neue"/>
-            </a:endParaRPr>
-          </a:p>
-          <a:p>
-            <a:pPr marL="0" lvl="0" indent="0" algn="l" rtl="0">
-              <a:spcBef>
-                <a:spcPts val="0"/>
-              </a:spcBef>
-              <a:spcAft>
-                <a:spcPts val="0"/>
-              </a:spcAft>
-              <a:buNone/>
-            </a:pPr>
-            <a:endParaRPr dirty="0"/>
-          </a:p>
-        </p:txBody>
-      </p:sp>
-      <p:sp>
-        <p:nvSpPr>
-          <p:cNvPr id="55" name="Google Shape;55;p11">
-            <a:extLst>
-              <a:ext uri="{FF2B5EF4-FFF2-40B4-BE49-F238E27FC236}">
-                <a16:creationId xmlns:a16="http://schemas.microsoft.com/office/drawing/2014/main" id="{2098EACB-53C4-E0DB-A70B-D0A9993E17EF}"/>
-              </a:ext>
-            </a:extLst>
-          </p:cNvPr>
-          <p:cNvSpPr txBox="1">
-            <a:spLocks noGrp="1"/>
-          </p:cNvSpPr>
-          <p:nvPr>
-            <p:ph type="body" idx="1"/>
-          </p:nvPr>
-        </p:nvSpPr>
-        <p:spPr>
-          <a:xfrm>
-            <a:off x="2698250" y="1627079"/>
-            <a:ext cx="5905500" cy="3123311"/>
-          </a:xfrm>
-          <a:prstGeom prst="rect">
-            <a:avLst/>
-          </a:prstGeom>
-        </p:spPr>
-        <p:txBody>
-          <a:bodyPr spcFirstLastPara="1" wrap="square" lIns="91425" tIns="91425" rIns="91425" bIns="91425" anchor="t" anchorCtr="0">
-            <a:normAutofit/>
-          </a:bodyPr>
-          <a:lstStyle/>
-          <a:p>
-            <a:pPr marL="673100" indent="-571500">
-              <a:buSzPts val="2000"/>
-            </a:pPr>
-            <a:r>
-              <a:rPr lang="pt-BR" sz="2000" dirty="0">
-                <a:solidFill>
-                  <a:schemeClr val="accent3"/>
-                </a:solidFill>
-                <a:latin typeface="Helvetica Neue"/>
-                <a:ea typeface="Helvetica Neue"/>
-                <a:cs typeface="Helvetica Neue"/>
-                <a:sym typeface="Helvetica Neue"/>
-              </a:rPr>
-              <a:t>// Non-inverting COM0A1 =1</a:t>
-            </a:r>
-          </a:p>
-          <a:p>
-            <a:pPr marL="673100" indent="-571500">
-              <a:buSzPts val="2000"/>
-            </a:pPr>
-            <a:endParaRPr lang="pt-BR" sz="2000" dirty="0">
-              <a:solidFill>
-                <a:schemeClr val="accent3"/>
-              </a:solidFill>
-              <a:latin typeface="Helvetica Neue"/>
-              <a:ea typeface="Helvetica Neue"/>
-              <a:cs typeface="Helvetica Neue"/>
-              <a:sym typeface="Helvetica Neue"/>
-            </a:endParaRPr>
-          </a:p>
-          <a:p>
-            <a:pPr marL="1130300" lvl="1" indent="-571500">
-              <a:buSzPts val="2000"/>
-            </a:pPr>
-            <a:r>
-              <a:rPr lang="pt-BR" sz="1600" dirty="0">
-                <a:solidFill>
-                  <a:schemeClr val="accent3"/>
-                </a:solidFill>
-                <a:latin typeface="Helvetica Neue"/>
-                <a:ea typeface="Helvetica Neue"/>
-                <a:cs typeface="Helvetica Neue"/>
-                <a:sym typeface="Helvetica Neue"/>
-              </a:rPr>
-              <a:t>TCCR0A |= (1 &lt;&lt; COM0A1);</a:t>
-            </a:r>
-          </a:p>
-          <a:p>
-            <a:pPr marL="673100" indent="-571500">
-              <a:buSzPts val="2000"/>
-            </a:pPr>
-            <a:endParaRPr lang="pt-BR" sz="2000" dirty="0">
-              <a:solidFill>
-                <a:schemeClr val="accent3"/>
-              </a:solidFill>
-              <a:latin typeface="Helvetica Neue"/>
-              <a:ea typeface="Helvetica Neue"/>
-              <a:cs typeface="Helvetica Neue"/>
-              <a:sym typeface="Helvetica Neue"/>
-            </a:endParaRPr>
-          </a:p>
-          <a:p>
-            <a:pPr marL="673100" indent="-571500">
-              <a:buSzPts val="2000"/>
-            </a:pPr>
-            <a:r>
-              <a:rPr lang="pt-BR" sz="2000" dirty="0">
-                <a:solidFill>
-                  <a:schemeClr val="accent3"/>
-                </a:solidFill>
-                <a:latin typeface="Helvetica Neue"/>
-                <a:ea typeface="Helvetica Neue"/>
-                <a:cs typeface="Helvetica Neue"/>
-                <a:sym typeface="Helvetica Neue"/>
-              </a:rPr>
-              <a:t>// Inverting COM0A1 AND COM0A0 =1</a:t>
-            </a:r>
-          </a:p>
-          <a:p>
-            <a:pPr marL="673100" indent="-571500">
-              <a:buSzPts val="2000"/>
-            </a:pPr>
-            <a:endParaRPr lang="pt-BR" sz="2000" dirty="0">
-              <a:solidFill>
-                <a:schemeClr val="accent3"/>
-              </a:solidFill>
-              <a:latin typeface="Helvetica Neue"/>
-              <a:ea typeface="Helvetica Neue"/>
-              <a:cs typeface="Helvetica Neue"/>
-              <a:sym typeface="Helvetica Neue"/>
-            </a:endParaRPr>
-          </a:p>
-          <a:p>
-            <a:pPr marL="1130300" lvl="1" indent="-571500">
-              <a:buSzPts val="2000"/>
-            </a:pPr>
-            <a:r>
-              <a:rPr lang="pt-BR" sz="1600" dirty="0">
-                <a:solidFill>
-                  <a:schemeClr val="accent3"/>
-                </a:solidFill>
-                <a:latin typeface="Helvetica Neue"/>
-                <a:ea typeface="Helvetica Neue"/>
-                <a:cs typeface="Helvetica Neue"/>
-                <a:sym typeface="Helvetica Neue"/>
-              </a:rPr>
-              <a:t>TCCR0A |= (1 &lt;&lt; COM0A1) | (1 &lt;&lt; COM0A0);</a:t>
-            </a:r>
-            <a:endParaRPr lang="en-IN" sz="1600" dirty="0">
-              <a:solidFill>
-                <a:schemeClr val="accent3"/>
-              </a:solidFill>
-              <a:latin typeface="Helvetica Neue"/>
-              <a:ea typeface="Helvetica Neue"/>
-              <a:cs typeface="Helvetica Neue"/>
-              <a:sym typeface="Helvetica Neue"/>
-            </a:endParaRPr>
-          </a:p>
-        </p:txBody>
-      </p:sp>
-    </p:spTree>
-    <p:extLst>
-      <p:ext uri="{BB962C8B-B14F-4D97-AF65-F5344CB8AC3E}">
-        <p14:creationId xmlns:p14="http://schemas.microsoft.com/office/powerpoint/2010/main" val="2957352177"/>
-      </p:ext>
-    </p:extLst>
-  </p:cSld>
-  <p:clrMapOvr>
-    <a:masterClrMapping/>
-  </p:clrMapOvr>
-</p:sld>
-</file>
-
-<file path=ppt/slides/slide7.xml><?xml version="1.0" encoding="utf-8"?>
+<file path=ppt/slides/slide9.xml><?xml version="1.0" encoding="utf-8"?>
 <p:sld xmlns:a="http://schemas.openxmlformats.org/drawingml/2006/main" xmlns:r="http://schemas.openxmlformats.org/officeDocument/2006/relationships" xmlns:p="http://schemas.openxmlformats.org/presentationml/2006/main">
   <p:cSld>
     <p:spTree>
@@ -6949,386 +9180,6 @@
         </p:spPr>
       </p:pic>
     </p:spTree>
-  </p:cSld>
-  <p:clrMapOvr>
-    <a:masterClrMapping/>
-  </p:clrMapOvr>
-</p:sld>
-</file>
-
-<file path=ppt/slides/slide8.xml><?xml version="1.0" encoding="utf-8"?>
-<p:sld xmlns:a="http://schemas.openxmlformats.org/drawingml/2006/main" xmlns:r="http://schemas.openxmlformats.org/officeDocument/2006/relationships" xmlns:p="http://schemas.openxmlformats.org/presentationml/2006/main">
-  <p:cSld>
-    <p:spTree>
-      <p:nvGrpSpPr>
-        <p:cNvPr id="1" name="Shape 45">
-          <a:extLst>
-            <a:ext uri="{FF2B5EF4-FFF2-40B4-BE49-F238E27FC236}">
-              <a16:creationId xmlns:a16="http://schemas.microsoft.com/office/drawing/2014/main" id="{B5F0FD63-E2C6-3346-9533-4F323DCCD5BC}"/>
-            </a:ext>
-          </a:extLst>
-        </p:cNvPr>
-        <p:cNvGrpSpPr/>
-        <p:nvPr/>
-      </p:nvGrpSpPr>
-      <p:grpSpPr>
-        <a:xfrm>
-          <a:off x="0" y="0"/>
-          <a:ext cx="0" cy="0"/>
-          <a:chOff x="0" y="0"/>
-          <a:chExt cx="0" cy="0"/>
-        </a:xfrm>
-      </p:grpSpPr>
-      <p:sp>
-        <p:nvSpPr>
-          <p:cNvPr id="46" name="Google Shape;46;p10">
-            <a:extLst>
-              <a:ext uri="{FF2B5EF4-FFF2-40B4-BE49-F238E27FC236}">
-                <a16:creationId xmlns:a16="http://schemas.microsoft.com/office/drawing/2014/main" id="{AD0C9125-2529-87A6-A821-EF0157BECEF2}"/>
-              </a:ext>
-            </a:extLst>
-          </p:cNvPr>
-          <p:cNvSpPr txBox="1">
-            <a:spLocks noGrp="1"/>
-          </p:cNvSpPr>
-          <p:nvPr>
-            <p:ph type="title"/>
-          </p:nvPr>
-        </p:nvSpPr>
-        <p:spPr>
-          <a:xfrm>
-            <a:off x="2698250" y="367100"/>
-            <a:ext cx="5905500" cy="572700"/>
-          </a:xfrm>
-          <a:prstGeom prst="rect">
-            <a:avLst/>
-          </a:prstGeom>
-        </p:spPr>
-        <p:txBody>
-          <a:bodyPr spcFirstLastPara="1" wrap="square" lIns="91425" tIns="91425" rIns="91425" bIns="91425" anchor="t" anchorCtr="0">
-            <a:normAutofit fontScale="90000"/>
-          </a:bodyPr>
-          <a:lstStyle/>
-          <a:p>
-            <a:pPr marL="0" lvl="0" indent="0" algn="ctr" rtl="0">
-              <a:lnSpc>
-                <a:spcPct val="115000"/>
-              </a:lnSpc>
-              <a:spcBef>
-                <a:spcPts val="0"/>
-              </a:spcBef>
-              <a:spcAft>
-                <a:spcPts val="0"/>
-              </a:spcAft>
-              <a:buNone/>
-            </a:pPr>
-            <a:r>
-              <a:rPr lang="en-IN" sz="3300" dirty="0">
-                <a:solidFill>
-                  <a:schemeClr val="dk1"/>
-                </a:solidFill>
-                <a:latin typeface="Helvetica Neue"/>
-                <a:ea typeface="Helvetica Neue"/>
-                <a:cs typeface="Helvetica Neue"/>
-                <a:sym typeface="Helvetica Neue"/>
-              </a:rPr>
-              <a:t>ATMEGA 328 TCCR 0</a:t>
-            </a:r>
-            <a:endParaRPr sz="3300" dirty="0">
-              <a:solidFill>
-                <a:schemeClr val="dk1"/>
-              </a:solidFill>
-              <a:latin typeface="Helvetica Neue"/>
-              <a:ea typeface="Helvetica Neue"/>
-              <a:cs typeface="Helvetica Neue"/>
-              <a:sym typeface="Helvetica Neue"/>
-            </a:endParaRPr>
-          </a:p>
-          <a:p>
-            <a:pPr marL="0" lvl="0" indent="0" algn="l" rtl="0">
-              <a:spcBef>
-                <a:spcPts val="0"/>
-              </a:spcBef>
-              <a:spcAft>
-                <a:spcPts val="0"/>
-              </a:spcAft>
-              <a:buNone/>
-            </a:pPr>
-            <a:endParaRPr dirty="0"/>
-          </a:p>
-        </p:txBody>
-      </p:sp>
-      <p:sp>
-        <p:nvSpPr>
-          <p:cNvPr id="47" name="Google Shape;47;p10">
-            <a:extLst>
-              <a:ext uri="{FF2B5EF4-FFF2-40B4-BE49-F238E27FC236}">
-                <a16:creationId xmlns:a16="http://schemas.microsoft.com/office/drawing/2014/main" id="{E974ABAE-A1E9-5AF4-4F05-9A6B3B72156A}"/>
-              </a:ext>
-            </a:extLst>
-          </p:cNvPr>
-          <p:cNvSpPr txBox="1"/>
-          <p:nvPr/>
-        </p:nvSpPr>
-        <p:spPr>
-          <a:xfrm>
-            <a:off x="2926725" y="1057650"/>
-            <a:ext cx="5274000" cy="3028200"/>
-          </a:xfrm>
-          <a:prstGeom prst="rect">
-            <a:avLst/>
-          </a:prstGeom>
-          <a:noFill/>
-          <a:ln>
-            <a:noFill/>
-          </a:ln>
-        </p:spPr>
-        <p:txBody>
-          <a:bodyPr spcFirstLastPara="1" wrap="square" lIns="91425" tIns="91425" rIns="91425" bIns="91425" anchor="t" anchorCtr="0">
-            <a:noAutofit/>
-          </a:bodyPr>
-          <a:lstStyle/>
-          <a:p>
-            <a:pPr marL="444500" lvl="0" indent="-342900" algn="l" rtl="0">
-              <a:lnSpc>
-                <a:spcPct val="115000"/>
-              </a:lnSpc>
-              <a:spcBef>
-                <a:spcPts val="0"/>
-              </a:spcBef>
-              <a:spcAft>
-                <a:spcPts val="0"/>
-              </a:spcAft>
-              <a:buClr>
-                <a:schemeClr val="dk1"/>
-              </a:buClr>
-              <a:buSzPts val="2000"/>
-              <a:buFont typeface="Arial" panose="020B0604020202020204" pitchFamily="34" charset="0"/>
-              <a:buChar char="•"/>
-            </a:pPr>
-            <a:endParaRPr lang="en-US" sz="2000" dirty="0">
-              <a:solidFill>
-                <a:schemeClr val="dk1"/>
-              </a:solidFill>
-              <a:latin typeface="Helvetica Neue"/>
-              <a:ea typeface="Helvetica Neue"/>
-              <a:cs typeface="Helvetica Neue"/>
-              <a:sym typeface="Helvetica Neue"/>
-            </a:endParaRPr>
-          </a:p>
-        </p:txBody>
-      </p:sp>
-      <p:pic>
-        <p:nvPicPr>
-          <p:cNvPr id="4" name="Picture 3">
-            <a:extLst>
-              <a:ext uri="{FF2B5EF4-FFF2-40B4-BE49-F238E27FC236}">
-                <a16:creationId xmlns:a16="http://schemas.microsoft.com/office/drawing/2014/main" id="{24A15A76-7B21-037E-1031-980EB6A2BB21}"/>
-              </a:ext>
-            </a:extLst>
-          </p:cNvPr>
-          <p:cNvPicPr>
-            <a:picLocks noChangeAspect="1"/>
-          </p:cNvPicPr>
-          <p:nvPr/>
-        </p:nvPicPr>
-        <p:blipFill>
-          <a:blip r:embed="rId3"/>
-          <a:stretch>
-            <a:fillRect/>
-          </a:stretch>
-        </p:blipFill>
-        <p:spPr>
-          <a:xfrm>
-            <a:off x="2698250" y="1636745"/>
-            <a:ext cx="6021172" cy="1778405"/>
-          </a:xfrm>
-          <a:prstGeom prst="rect">
-            <a:avLst/>
-          </a:prstGeom>
-        </p:spPr>
-      </p:pic>
-    </p:spTree>
-    <p:extLst>
-      <p:ext uri="{BB962C8B-B14F-4D97-AF65-F5344CB8AC3E}">
-        <p14:creationId xmlns:p14="http://schemas.microsoft.com/office/powerpoint/2010/main" val="2771709912"/>
-      </p:ext>
-    </p:extLst>
-  </p:cSld>
-  <p:clrMapOvr>
-    <a:masterClrMapping/>
-  </p:clrMapOvr>
-</p:sld>
-</file>
-
-<file path=ppt/slides/slide9.xml><?xml version="1.0" encoding="utf-8"?>
-<p:sld xmlns:a="http://schemas.openxmlformats.org/drawingml/2006/main" xmlns:r="http://schemas.openxmlformats.org/officeDocument/2006/relationships" xmlns:p="http://schemas.openxmlformats.org/presentationml/2006/main">
-  <p:cSld>
-    <p:spTree>
-      <p:nvGrpSpPr>
-        <p:cNvPr id="1" name="Shape 45">
-          <a:extLst>
-            <a:ext uri="{FF2B5EF4-FFF2-40B4-BE49-F238E27FC236}">
-              <a16:creationId xmlns:a16="http://schemas.microsoft.com/office/drawing/2014/main" id="{C9F305B8-3D07-4351-6D66-D5B8ECD1F6AC}"/>
-            </a:ext>
-          </a:extLst>
-        </p:cNvPr>
-        <p:cNvGrpSpPr/>
-        <p:nvPr/>
-      </p:nvGrpSpPr>
-      <p:grpSpPr>
-        <a:xfrm>
-          <a:off x="0" y="0"/>
-          <a:ext cx="0" cy="0"/>
-          <a:chOff x="0" y="0"/>
-          <a:chExt cx="0" cy="0"/>
-        </a:xfrm>
-      </p:grpSpPr>
-      <p:sp>
-        <p:nvSpPr>
-          <p:cNvPr id="46" name="Google Shape;46;p10">
-            <a:extLst>
-              <a:ext uri="{FF2B5EF4-FFF2-40B4-BE49-F238E27FC236}">
-                <a16:creationId xmlns:a16="http://schemas.microsoft.com/office/drawing/2014/main" id="{9A579AF7-4051-6167-3D0A-4D25C2B6F53E}"/>
-              </a:ext>
-            </a:extLst>
-          </p:cNvPr>
-          <p:cNvSpPr txBox="1">
-            <a:spLocks noGrp="1"/>
-          </p:cNvSpPr>
-          <p:nvPr>
-            <p:ph type="title"/>
-          </p:nvPr>
-        </p:nvSpPr>
-        <p:spPr>
-          <a:xfrm>
-            <a:off x="2610975" y="1948250"/>
-            <a:ext cx="5905500" cy="572700"/>
-          </a:xfrm>
-          <a:prstGeom prst="rect">
-            <a:avLst/>
-          </a:prstGeom>
-        </p:spPr>
-        <p:txBody>
-          <a:bodyPr spcFirstLastPara="1" wrap="square" lIns="91425" tIns="91425" rIns="91425" bIns="91425" anchor="t" anchorCtr="0">
-            <a:normAutofit fontScale="90000"/>
-          </a:bodyPr>
-          <a:lstStyle/>
-          <a:p>
-            <a:pPr marL="0" lvl="0" indent="0" algn="ctr" rtl="0">
-              <a:lnSpc>
-                <a:spcPct val="115000"/>
-              </a:lnSpc>
-              <a:spcBef>
-                <a:spcPts val="0"/>
-              </a:spcBef>
-              <a:spcAft>
-                <a:spcPts val="0"/>
-              </a:spcAft>
-              <a:buNone/>
-            </a:pPr>
-            <a:r>
-              <a:rPr lang="en-IN" sz="3300" dirty="0">
-                <a:solidFill>
-                  <a:schemeClr val="dk1"/>
-                </a:solidFill>
-                <a:latin typeface="Helvetica Neue"/>
-                <a:ea typeface="Helvetica Neue"/>
-                <a:cs typeface="Helvetica Neue"/>
-                <a:sym typeface="Helvetica Neue"/>
-              </a:rPr>
-              <a:t>Let us Code</a:t>
-            </a:r>
-            <a:endParaRPr sz="3300" dirty="0">
-              <a:solidFill>
-                <a:schemeClr val="dk1"/>
-              </a:solidFill>
-              <a:latin typeface="Helvetica Neue"/>
-              <a:ea typeface="Helvetica Neue"/>
-              <a:cs typeface="Helvetica Neue"/>
-              <a:sym typeface="Helvetica Neue"/>
-            </a:endParaRPr>
-          </a:p>
-          <a:p>
-            <a:pPr marL="0" lvl="0" indent="0" algn="l" rtl="0">
-              <a:spcBef>
-                <a:spcPts val="0"/>
-              </a:spcBef>
-              <a:spcAft>
-                <a:spcPts val="0"/>
-              </a:spcAft>
-              <a:buNone/>
-            </a:pPr>
-            <a:endParaRPr dirty="0"/>
-          </a:p>
-        </p:txBody>
-      </p:sp>
-      <p:sp>
-        <p:nvSpPr>
-          <p:cNvPr id="47" name="Google Shape;47;p10">
-            <a:extLst>
-              <a:ext uri="{FF2B5EF4-FFF2-40B4-BE49-F238E27FC236}">
-                <a16:creationId xmlns:a16="http://schemas.microsoft.com/office/drawing/2014/main" id="{E30FF108-42AE-A420-A9C5-909055950C75}"/>
-              </a:ext>
-            </a:extLst>
-          </p:cNvPr>
-          <p:cNvSpPr txBox="1"/>
-          <p:nvPr/>
-        </p:nvSpPr>
-        <p:spPr>
-          <a:xfrm>
-            <a:off x="2926725" y="1057650"/>
-            <a:ext cx="5274000" cy="3028200"/>
-          </a:xfrm>
-          <a:prstGeom prst="rect">
-            <a:avLst/>
-          </a:prstGeom>
-          <a:noFill/>
-          <a:ln>
-            <a:noFill/>
-          </a:ln>
-        </p:spPr>
-        <p:txBody>
-          <a:bodyPr spcFirstLastPara="1" wrap="square" lIns="91425" tIns="91425" rIns="91425" bIns="91425" anchor="t" anchorCtr="0">
-            <a:noAutofit/>
-          </a:bodyPr>
-          <a:lstStyle/>
-          <a:p>
-            <a:pPr marL="444500" lvl="0" indent="-342900" algn="l" rtl="0">
-              <a:lnSpc>
-                <a:spcPct val="115000"/>
-              </a:lnSpc>
-              <a:spcBef>
-                <a:spcPts val="0"/>
-              </a:spcBef>
-              <a:spcAft>
-                <a:spcPts val="0"/>
-              </a:spcAft>
-              <a:buClr>
-                <a:schemeClr val="dk1"/>
-              </a:buClr>
-              <a:buSzPts val="2000"/>
-              <a:buFont typeface="Arial" panose="020B0604020202020204" pitchFamily="34" charset="0"/>
-              <a:buChar char="•"/>
-            </a:pPr>
-            <a:endParaRPr lang="en-US" sz="2000" dirty="0">
-              <a:solidFill>
-                <a:schemeClr val="dk1"/>
-              </a:solidFill>
-              <a:latin typeface="Helvetica Neue"/>
-              <a:ea typeface="Helvetica Neue"/>
-              <a:cs typeface="Helvetica Neue"/>
-              <a:sym typeface="Helvetica Neue"/>
-            </a:endParaRPr>
-          </a:p>
-        </p:txBody>
-      </p:sp>
-    </p:spTree>
-    <p:extLst>
-      <p:ext uri="{BB962C8B-B14F-4D97-AF65-F5344CB8AC3E}">
-        <p14:creationId xmlns:p14="http://schemas.microsoft.com/office/powerpoint/2010/main" val="2816312007"/>
-      </p:ext>
-    </p:extLst>
   </p:cSld>
   <p:clrMapOvr>
     <a:masterClrMapping/>
